--- a/SSMPPT/第10章 MyBatis的注解开发.pptx
+++ b/SSMPPT/第10章 MyBatis的注解开发.pptx
@@ -6793,36 +6793,6 @@
           </a:p>
         </p:txBody>
       </p:sp>
-      <p:pic>
-        <p:nvPicPr>
-          <p:cNvPr id="3" name="图片 2"/>
-          <p:cNvPicPr>
-            <a:picLocks noChangeAspect="1"/>
-          </p:cNvPicPr>
-          <p:nvPr userDrawn="1"/>
-        </p:nvPicPr>
-        <p:blipFill>
-          <a:blip r:embed="rId2" cstate="print">
-            <a:extLst>
-              <a:ext uri="{28A0092B-C50C-407E-A947-70E740481C1C}">
-                <a14:useLocalDpi xmlns:a14="http://schemas.microsoft.com/office/drawing/2010/main" val="0"/>
-              </a:ext>
-            </a:extLst>
-          </a:blip>
-          <a:stretch>
-            <a:fillRect/>
-          </a:stretch>
-        </p:blipFill>
-        <p:spPr>
-          <a:xfrm>
-            <a:off x="4118890" y="5045086"/>
-            <a:ext cx="3952633" cy="616956"/>
-          </a:xfrm>
-          <a:prstGeom prst="rect">
-            <a:avLst/>
-          </a:prstGeom>
-        </p:spPr>
-      </p:pic>
     </p:spTree>
   </p:cSld>
   <p:clrMapOvr>
@@ -6935,8 +6905,8 @@
                   <a:solidFill>
                     <a:schemeClr val="tx1"/>
                   </a:solidFill>
-                  <a:latin typeface="Arial" panose="020B0604020202020204" pitchFamily="34" charset="0"/>
-                  <a:ea typeface="宋体" panose="02010600030101010101" pitchFamily="2" charset="-122"/>
+                  <a:latin typeface="Arial" panose="020B0604020202090204" pitchFamily="34" charset="0"/>
+                  <a:ea typeface="宋体" pitchFamily="2" charset="-122"/>
                 </a:defRPr>
               </a:lvl1pPr>
               <a:lvl2pPr marL="742950" indent="-285750" eaLnBrk="0" hangingPunct="0">
@@ -6944,8 +6914,8 @@
                   <a:solidFill>
                     <a:schemeClr val="tx1"/>
                   </a:solidFill>
-                  <a:latin typeface="Arial" panose="020B0604020202020204" pitchFamily="34" charset="0"/>
-                  <a:ea typeface="宋体" panose="02010600030101010101" pitchFamily="2" charset="-122"/>
+                  <a:latin typeface="Arial" panose="020B0604020202090204" pitchFamily="34" charset="0"/>
+                  <a:ea typeface="宋体" pitchFamily="2" charset="-122"/>
                 </a:defRPr>
               </a:lvl2pPr>
               <a:lvl3pPr marL="1143000" indent="-228600" eaLnBrk="0" hangingPunct="0">
@@ -6953,8 +6923,8 @@
                   <a:solidFill>
                     <a:schemeClr val="tx1"/>
                   </a:solidFill>
-                  <a:latin typeface="Arial" panose="020B0604020202020204" pitchFamily="34" charset="0"/>
-                  <a:ea typeface="宋体" panose="02010600030101010101" pitchFamily="2" charset="-122"/>
+                  <a:latin typeface="Arial" panose="020B0604020202090204" pitchFamily="34" charset="0"/>
+                  <a:ea typeface="宋体" pitchFamily="2" charset="-122"/>
                 </a:defRPr>
               </a:lvl3pPr>
               <a:lvl4pPr marL="1600200" indent="-228600" eaLnBrk="0" hangingPunct="0">
@@ -6962,8 +6932,8 @@
                   <a:solidFill>
                     <a:schemeClr val="tx1"/>
                   </a:solidFill>
-                  <a:latin typeface="Arial" panose="020B0604020202020204" pitchFamily="34" charset="0"/>
-                  <a:ea typeface="宋体" panose="02010600030101010101" pitchFamily="2" charset="-122"/>
+                  <a:latin typeface="Arial" panose="020B0604020202090204" pitchFamily="34" charset="0"/>
+                  <a:ea typeface="宋体" pitchFamily="2" charset="-122"/>
                 </a:defRPr>
               </a:lvl4pPr>
               <a:lvl5pPr marL="2057400" indent="-228600" eaLnBrk="0" hangingPunct="0">
@@ -6971,8 +6941,8 @@
                   <a:solidFill>
                     <a:schemeClr val="tx1"/>
                   </a:solidFill>
-                  <a:latin typeface="Arial" panose="020B0604020202020204" pitchFamily="34" charset="0"/>
-                  <a:ea typeface="宋体" panose="02010600030101010101" pitchFamily="2" charset="-122"/>
+                  <a:latin typeface="Arial" panose="020B0604020202090204" pitchFamily="34" charset="0"/>
+                  <a:ea typeface="宋体" pitchFamily="2" charset="-122"/>
                 </a:defRPr>
               </a:lvl5pPr>
               <a:lvl6pPr marL="2514600" indent="-228600" eaLnBrk="0" fontAlgn="base" hangingPunct="0">
@@ -6982,13 +6952,13 @@
                 <a:spcAft>
                   <a:spcPct val="0"/>
                 </a:spcAft>
-                <a:buFont typeface="Arial" panose="020B0604020202020204" pitchFamily="34" charset="0"/>
+                <a:buFont typeface="Arial" panose="020B0604020202090204" pitchFamily="34" charset="0"/>
                 <a:defRPr>
                   <a:solidFill>
                     <a:schemeClr val="tx1"/>
                   </a:solidFill>
-                  <a:latin typeface="Arial" panose="020B0604020202020204" pitchFamily="34" charset="0"/>
-                  <a:ea typeface="宋体" panose="02010600030101010101" pitchFamily="2" charset="-122"/>
+                  <a:latin typeface="Arial" panose="020B0604020202090204" pitchFamily="34" charset="0"/>
+                  <a:ea typeface="宋体" pitchFamily="2" charset="-122"/>
                 </a:defRPr>
               </a:lvl6pPr>
               <a:lvl7pPr marL="2971800" indent="-228600" eaLnBrk="0" fontAlgn="base" hangingPunct="0">
@@ -6998,13 +6968,13 @@
                 <a:spcAft>
                   <a:spcPct val="0"/>
                 </a:spcAft>
-                <a:buFont typeface="Arial" panose="020B0604020202020204" pitchFamily="34" charset="0"/>
+                <a:buFont typeface="Arial" panose="020B0604020202090204" pitchFamily="34" charset="0"/>
                 <a:defRPr>
                   <a:solidFill>
                     <a:schemeClr val="tx1"/>
                   </a:solidFill>
-                  <a:latin typeface="Arial" panose="020B0604020202020204" pitchFamily="34" charset="0"/>
-                  <a:ea typeface="宋体" panose="02010600030101010101" pitchFamily="2" charset="-122"/>
+                  <a:latin typeface="Arial" panose="020B0604020202090204" pitchFamily="34" charset="0"/>
+                  <a:ea typeface="宋体" pitchFamily="2" charset="-122"/>
                 </a:defRPr>
               </a:lvl7pPr>
               <a:lvl8pPr marL="3429000" indent="-228600" eaLnBrk="0" fontAlgn="base" hangingPunct="0">
@@ -7014,13 +6984,13 @@
                 <a:spcAft>
                   <a:spcPct val="0"/>
                 </a:spcAft>
-                <a:buFont typeface="Arial" panose="020B0604020202020204" pitchFamily="34" charset="0"/>
+                <a:buFont typeface="Arial" panose="020B0604020202090204" pitchFamily="34" charset="0"/>
                 <a:defRPr>
                   <a:solidFill>
                     <a:schemeClr val="tx1"/>
                   </a:solidFill>
-                  <a:latin typeface="Arial" panose="020B0604020202020204" pitchFamily="34" charset="0"/>
-                  <a:ea typeface="宋体" panose="02010600030101010101" pitchFamily="2" charset="-122"/>
+                  <a:latin typeface="Arial" panose="020B0604020202090204" pitchFamily="34" charset="0"/>
+                  <a:ea typeface="宋体" pitchFamily="2" charset="-122"/>
                 </a:defRPr>
               </a:lvl8pPr>
               <a:lvl9pPr marL="3886200" indent="-228600" eaLnBrk="0" fontAlgn="base" hangingPunct="0">
@@ -7030,13 +7000,13 @@
                 <a:spcAft>
                   <a:spcPct val="0"/>
                 </a:spcAft>
-                <a:buFont typeface="Arial" panose="020B0604020202020204" pitchFamily="34" charset="0"/>
+                <a:buFont typeface="Arial" panose="020B0604020202090204" pitchFamily="34" charset="0"/>
                 <a:defRPr>
                   <a:solidFill>
                     <a:schemeClr val="tx1"/>
                   </a:solidFill>
-                  <a:latin typeface="Arial" panose="020B0604020202020204" pitchFamily="34" charset="0"/>
-                  <a:ea typeface="宋体" panose="02010600030101010101" pitchFamily="2" charset="-122"/>
+                  <a:latin typeface="Arial" panose="020B0604020202090204" pitchFamily="34" charset="0"/>
+                  <a:ea typeface="宋体" pitchFamily="2" charset="-122"/>
                 </a:defRPr>
               </a:lvl9pPr>
             </a:lstStyle>
@@ -7898,8 +7868,8 @@
                   <a:solidFill>
                     <a:schemeClr val="tx1"/>
                   </a:solidFill>
-                  <a:latin typeface="Arial" panose="020B0604020202020204" pitchFamily="34" charset="0"/>
-                  <a:ea typeface="宋体" panose="02010600030101010101" pitchFamily="2" charset="-122"/>
+                  <a:latin typeface="Arial" panose="020B0604020202090204" pitchFamily="34" charset="0"/>
+                  <a:ea typeface="宋体" pitchFamily="2" charset="-122"/>
                 </a:defRPr>
               </a:lvl1pPr>
               <a:lvl2pPr marL="742950" indent="-285750" eaLnBrk="0" hangingPunct="0">
@@ -7907,8 +7877,8 @@
                   <a:solidFill>
                     <a:schemeClr val="tx1"/>
                   </a:solidFill>
-                  <a:latin typeface="Arial" panose="020B0604020202020204" pitchFamily="34" charset="0"/>
-                  <a:ea typeface="宋体" panose="02010600030101010101" pitchFamily="2" charset="-122"/>
+                  <a:latin typeface="Arial" panose="020B0604020202090204" pitchFamily="34" charset="0"/>
+                  <a:ea typeface="宋体" pitchFamily="2" charset="-122"/>
                 </a:defRPr>
               </a:lvl2pPr>
               <a:lvl3pPr marL="1143000" indent="-228600" eaLnBrk="0" hangingPunct="0">
@@ -7916,8 +7886,8 @@
                   <a:solidFill>
                     <a:schemeClr val="tx1"/>
                   </a:solidFill>
-                  <a:latin typeface="Arial" panose="020B0604020202020204" pitchFamily="34" charset="0"/>
-                  <a:ea typeface="宋体" panose="02010600030101010101" pitchFamily="2" charset="-122"/>
+                  <a:latin typeface="Arial" panose="020B0604020202090204" pitchFamily="34" charset="0"/>
+                  <a:ea typeface="宋体" pitchFamily="2" charset="-122"/>
                 </a:defRPr>
               </a:lvl3pPr>
               <a:lvl4pPr marL="1600200" indent="-228600" eaLnBrk="0" hangingPunct="0">
@@ -7925,8 +7895,8 @@
                   <a:solidFill>
                     <a:schemeClr val="tx1"/>
                   </a:solidFill>
-                  <a:latin typeface="Arial" panose="020B0604020202020204" pitchFamily="34" charset="0"/>
-                  <a:ea typeface="宋体" panose="02010600030101010101" pitchFamily="2" charset="-122"/>
+                  <a:latin typeface="Arial" panose="020B0604020202090204" pitchFamily="34" charset="0"/>
+                  <a:ea typeface="宋体" pitchFamily="2" charset="-122"/>
                 </a:defRPr>
               </a:lvl4pPr>
               <a:lvl5pPr marL="2057400" indent="-228600" eaLnBrk="0" hangingPunct="0">
@@ -7934,8 +7904,8 @@
                   <a:solidFill>
                     <a:schemeClr val="tx1"/>
                   </a:solidFill>
-                  <a:latin typeface="Arial" panose="020B0604020202020204" pitchFamily="34" charset="0"/>
-                  <a:ea typeface="宋体" panose="02010600030101010101" pitchFamily="2" charset="-122"/>
+                  <a:latin typeface="Arial" panose="020B0604020202090204" pitchFamily="34" charset="0"/>
+                  <a:ea typeface="宋体" pitchFamily="2" charset="-122"/>
                 </a:defRPr>
               </a:lvl5pPr>
               <a:lvl6pPr marL="2514600" indent="-228600" eaLnBrk="0" fontAlgn="base" hangingPunct="0">
@@ -7945,13 +7915,13 @@
                 <a:spcAft>
                   <a:spcPct val="0"/>
                 </a:spcAft>
-                <a:buFont typeface="Arial" panose="020B0604020202020204" pitchFamily="34" charset="0"/>
+                <a:buFont typeface="Arial" panose="020B0604020202090204" pitchFamily="34" charset="0"/>
                 <a:defRPr>
                   <a:solidFill>
                     <a:schemeClr val="tx1"/>
                   </a:solidFill>
-                  <a:latin typeface="Arial" panose="020B0604020202020204" pitchFamily="34" charset="0"/>
-                  <a:ea typeface="宋体" panose="02010600030101010101" pitchFamily="2" charset="-122"/>
+                  <a:latin typeface="Arial" panose="020B0604020202090204" pitchFamily="34" charset="0"/>
+                  <a:ea typeface="宋体" pitchFamily="2" charset="-122"/>
                 </a:defRPr>
               </a:lvl6pPr>
               <a:lvl7pPr marL="2971800" indent="-228600" eaLnBrk="0" fontAlgn="base" hangingPunct="0">
@@ -7961,13 +7931,13 @@
                 <a:spcAft>
                   <a:spcPct val="0"/>
                 </a:spcAft>
-                <a:buFont typeface="Arial" panose="020B0604020202020204" pitchFamily="34" charset="0"/>
+                <a:buFont typeface="Arial" panose="020B0604020202090204" pitchFamily="34" charset="0"/>
                 <a:defRPr>
                   <a:solidFill>
                     <a:schemeClr val="tx1"/>
                   </a:solidFill>
-                  <a:latin typeface="Arial" panose="020B0604020202020204" pitchFamily="34" charset="0"/>
-                  <a:ea typeface="宋体" panose="02010600030101010101" pitchFamily="2" charset="-122"/>
+                  <a:latin typeface="Arial" panose="020B0604020202090204" pitchFamily="34" charset="0"/>
+                  <a:ea typeface="宋体" pitchFamily="2" charset="-122"/>
                 </a:defRPr>
               </a:lvl7pPr>
               <a:lvl8pPr marL="3429000" indent="-228600" eaLnBrk="0" fontAlgn="base" hangingPunct="0">
@@ -7977,13 +7947,13 @@
                 <a:spcAft>
                   <a:spcPct val="0"/>
                 </a:spcAft>
-                <a:buFont typeface="Arial" panose="020B0604020202020204" pitchFamily="34" charset="0"/>
+                <a:buFont typeface="Arial" panose="020B0604020202090204" pitchFamily="34" charset="0"/>
                 <a:defRPr>
                   <a:solidFill>
                     <a:schemeClr val="tx1"/>
                   </a:solidFill>
-                  <a:latin typeface="Arial" panose="020B0604020202020204" pitchFamily="34" charset="0"/>
-                  <a:ea typeface="宋体" panose="02010600030101010101" pitchFamily="2" charset="-122"/>
+                  <a:latin typeface="Arial" panose="020B0604020202090204" pitchFamily="34" charset="0"/>
+                  <a:ea typeface="宋体" pitchFamily="2" charset="-122"/>
                 </a:defRPr>
               </a:lvl8pPr>
               <a:lvl9pPr marL="3886200" indent="-228600" eaLnBrk="0" fontAlgn="base" hangingPunct="0">
@@ -7993,13 +7963,13 @@
                 <a:spcAft>
                   <a:spcPct val="0"/>
                 </a:spcAft>
-                <a:buFont typeface="Arial" panose="020B0604020202020204" pitchFamily="34" charset="0"/>
+                <a:buFont typeface="Arial" panose="020B0604020202090204" pitchFamily="34" charset="0"/>
                 <a:defRPr>
                   <a:solidFill>
                     <a:schemeClr val="tx1"/>
                   </a:solidFill>
-                  <a:latin typeface="Arial" panose="020B0604020202020204" pitchFamily="34" charset="0"/>
-                  <a:ea typeface="宋体" panose="02010600030101010101" pitchFamily="2" charset="-122"/>
+                  <a:latin typeface="Arial" panose="020B0604020202090204" pitchFamily="34" charset="0"/>
+                  <a:ea typeface="宋体" pitchFamily="2" charset="-122"/>
                 </a:defRPr>
               </a:lvl9pPr>
             </a:lstStyle>
@@ -8504,8 +8474,8 @@
                   <a:solidFill>
                     <a:schemeClr val="tx1"/>
                   </a:solidFill>
-                  <a:latin typeface="Arial" panose="020B0604020202020204" pitchFamily="34" charset="0"/>
-                  <a:ea typeface="宋体" panose="02010600030101010101" pitchFamily="2" charset="-122"/>
+                  <a:latin typeface="Arial" panose="020B0604020202090204" pitchFamily="34" charset="0"/>
+                  <a:ea typeface="宋体" pitchFamily="2" charset="-122"/>
                 </a:defRPr>
               </a:lvl1pPr>
               <a:lvl2pPr marL="742950" indent="-285750" eaLnBrk="0" hangingPunct="0">
@@ -8513,8 +8483,8 @@
                   <a:solidFill>
                     <a:schemeClr val="tx1"/>
                   </a:solidFill>
-                  <a:latin typeface="Arial" panose="020B0604020202020204" pitchFamily="34" charset="0"/>
-                  <a:ea typeface="宋体" panose="02010600030101010101" pitchFamily="2" charset="-122"/>
+                  <a:latin typeface="Arial" panose="020B0604020202090204" pitchFamily="34" charset="0"/>
+                  <a:ea typeface="宋体" pitchFamily="2" charset="-122"/>
                 </a:defRPr>
               </a:lvl2pPr>
               <a:lvl3pPr marL="1143000" indent="-228600" eaLnBrk="0" hangingPunct="0">
@@ -8522,8 +8492,8 @@
                   <a:solidFill>
                     <a:schemeClr val="tx1"/>
                   </a:solidFill>
-                  <a:latin typeface="Arial" panose="020B0604020202020204" pitchFamily="34" charset="0"/>
-                  <a:ea typeface="宋体" panose="02010600030101010101" pitchFamily="2" charset="-122"/>
+                  <a:latin typeface="Arial" panose="020B0604020202090204" pitchFamily="34" charset="0"/>
+                  <a:ea typeface="宋体" pitchFamily="2" charset="-122"/>
                 </a:defRPr>
               </a:lvl3pPr>
               <a:lvl4pPr marL="1600200" indent="-228600" eaLnBrk="0" hangingPunct="0">
@@ -8531,8 +8501,8 @@
                   <a:solidFill>
                     <a:schemeClr val="tx1"/>
                   </a:solidFill>
-                  <a:latin typeface="Arial" panose="020B0604020202020204" pitchFamily="34" charset="0"/>
-                  <a:ea typeface="宋体" panose="02010600030101010101" pitchFamily="2" charset="-122"/>
+                  <a:latin typeface="Arial" panose="020B0604020202090204" pitchFamily="34" charset="0"/>
+                  <a:ea typeface="宋体" pitchFamily="2" charset="-122"/>
                 </a:defRPr>
               </a:lvl4pPr>
               <a:lvl5pPr marL="2057400" indent="-228600" eaLnBrk="0" hangingPunct="0">
@@ -8540,8 +8510,8 @@
                   <a:solidFill>
                     <a:schemeClr val="tx1"/>
                   </a:solidFill>
-                  <a:latin typeface="Arial" panose="020B0604020202020204" pitchFamily="34" charset="0"/>
-                  <a:ea typeface="宋体" panose="02010600030101010101" pitchFamily="2" charset="-122"/>
+                  <a:latin typeface="Arial" panose="020B0604020202090204" pitchFamily="34" charset="0"/>
+                  <a:ea typeface="宋体" pitchFamily="2" charset="-122"/>
                 </a:defRPr>
               </a:lvl5pPr>
               <a:lvl6pPr marL="2514600" indent="-228600" eaLnBrk="0" fontAlgn="base" hangingPunct="0">
@@ -8551,13 +8521,13 @@
                 <a:spcAft>
                   <a:spcPct val="0"/>
                 </a:spcAft>
-                <a:buFont typeface="Arial" panose="020B0604020202020204" pitchFamily="34" charset="0"/>
+                <a:buFont typeface="Arial" panose="020B0604020202090204" pitchFamily="34" charset="0"/>
                 <a:defRPr>
                   <a:solidFill>
                     <a:schemeClr val="tx1"/>
                   </a:solidFill>
-                  <a:latin typeface="Arial" panose="020B0604020202020204" pitchFamily="34" charset="0"/>
-                  <a:ea typeface="宋体" panose="02010600030101010101" pitchFamily="2" charset="-122"/>
+                  <a:latin typeface="Arial" panose="020B0604020202090204" pitchFamily="34" charset="0"/>
+                  <a:ea typeface="宋体" pitchFamily="2" charset="-122"/>
                 </a:defRPr>
               </a:lvl6pPr>
               <a:lvl7pPr marL="2971800" indent="-228600" eaLnBrk="0" fontAlgn="base" hangingPunct="0">
@@ -8567,13 +8537,13 @@
                 <a:spcAft>
                   <a:spcPct val="0"/>
                 </a:spcAft>
-                <a:buFont typeface="Arial" panose="020B0604020202020204" pitchFamily="34" charset="0"/>
+                <a:buFont typeface="Arial" panose="020B0604020202090204" pitchFamily="34" charset="0"/>
                 <a:defRPr>
                   <a:solidFill>
                     <a:schemeClr val="tx1"/>
                   </a:solidFill>
-                  <a:latin typeface="Arial" panose="020B0604020202020204" pitchFamily="34" charset="0"/>
-                  <a:ea typeface="宋体" panose="02010600030101010101" pitchFamily="2" charset="-122"/>
+                  <a:latin typeface="Arial" panose="020B0604020202090204" pitchFamily="34" charset="0"/>
+                  <a:ea typeface="宋体" pitchFamily="2" charset="-122"/>
                 </a:defRPr>
               </a:lvl7pPr>
               <a:lvl8pPr marL="3429000" indent="-228600" eaLnBrk="0" fontAlgn="base" hangingPunct="0">
@@ -8583,13 +8553,13 @@
                 <a:spcAft>
                   <a:spcPct val="0"/>
                 </a:spcAft>
-                <a:buFont typeface="Arial" panose="020B0604020202020204" pitchFamily="34" charset="0"/>
+                <a:buFont typeface="Arial" panose="020B0604020202090204" pitchFamily="34" charset="0"/>
                 <a:defRPr>
                   <a:solidFill>
                     <a:schemeClr val="tx1"/>
                   </a:solidFill>
-                  <a:latin typeface="Arial" panose="020B0604020202020204" pitchFamily="34" charset="0"/>
-                  <a:ea typeface="宋体" panose="02010600030101010101" pitchFamily="2" charset="-122"/>
+                  <a:latin typeface="Arial" panose="020B0604020202090204" pitchFamily="34" charset="0"/>
+                  <a:ea typeface="宋体" pitchFamily="2" charset="-122"/>
                 </a:defRPr>
               </a:lvl8pPr>
               <a:lvl9pPr marL="3886200" indent="-228600" eaLnBrk="0" fontAlgn="base" hangingPunct="0">
@@ -8599,13 +8569,13 @@
                 <a:spcAft>
                   <a:spcPct val="0"/>
                 </a:spcAft>
-                <a:buFont typeface="Arial" panose="020B0604020202020204" pitchFamily="34" charset="0"/>
+                <a:buFont typeface="Arial" panose="020B0604020202090204" pitchFamily="34" charset="0"/>
                 <a:defRPr>
                   <a:solidFill>
                     <a:schemeClr val="tx1"/>
                   </a:solidFill>
-                  <a:latin typeface="Arial" panose="020B0604020202020204" pitchFamily="34" charset="0"/>
-                  <a:ea typeface="宋体" panose="02010600030101010101" pitchFamily="2" charset="-122"/>
+                  <a:latin typeface="Arial" panose="020B0604020202090204" pitchFamily="34" charset="0"/>
+                  <a:ea typeface="宋体" pitchFamily="2" charset="-122"/>
                 </a:defRPr>
               </a:lvl9pPr>
             </a:lstStyle>
@@ -9313,8 +9283,8 @@
                   <a:solidFill>
                     <a:schemeClr val="tx1"/>
                   </a:solidFill>
-                  <a:latin typeface="Arial" panose="020B0604020202020204" pitchFamily="34" charset="0"/>
-                  <a:ea typeface="宋体" panose="02010600030101010101" pitchFamily="2" charset="-122"/>
+                  <a:latin typeface="Arial" panose="020B0604020202090204" pitchFamily="34" charset="0"/>
+                  <a:ea typeface="宋体" pitchFamily="2" charset="-122"/>
                 </a:defRPr>
               </a:lvl1pPr>
               <a:lvl2pPr marL="742950" indent="-285750" eaLnBrk="0" hangingPunct="0">
@@ -9322,8 +9292,8 @@
                   <a:solidFill>
                     <a:schemeClr val="tx1"/>
                   </a:solidFill>
-                  <a:latin typeface="Arial" panose="020B0604020202020204" pitchFamily="34" charset="0"/>
-                  <a:ea typeface="宋体" panose="02010600030101010101" pitchFamily="2" charset="-122"/>
+                  <a:latin typeface="Arial" panose="020B0604020202090204" pitchFamily="34" charset="0"/>
+                  <a:ea typeface="宋体" pitchFamily="2" charset="-122"/>
                 </a:defRPr>
               </a:lvl2pPr>
               <a:lvl3pPr marL="1143000" indent="-228600" eaLnBrk="0" hangingPunct="0">
@@ -9331,8 +9301,8 @@
                   <a:solidFill>
                     <a:schemeClr val="tx1"/>
                   </a:solidFill>
-                  <a:latin typeface="Arial" panose="020B0604020202020204" pitchFamily="34" charset="0"/>
-                  <a:ea typeface="宋体" panose="02010600030101010101" pitchFamily="2" charset="-122"/>
+                  <a:latin typeface="Arial" panose="020B0604020202090204" pitchFamily="34" charset="0"/>
+                  <a:ea typeface="宋体" pitchFamily="2" charset="-122"/>
                 </a:defRPr>
               </a:lvl3pPr>
               <a:lvl4pPr marL="1600200" indent="-228600" eaLnBrk="0" hangingPunct="0">
@@ -9340,8 +9310,8 @@
                   <a:solidFill>
                     <a:schemeClr val="tx1"/>
                   </a:solidFill>
-                  <a:latin typeface="Arial" panose="020B0604020202020204" pitchFamily="34" charset="0"/>
-                  <a:ea typeface="宋体" panose="02010600030101010101" pitchFamily="2" charset="-122"/>
+                  <a:latin typeface="Arial" panose="020B0604020202090204" pitchFamily="34" charset="0"/>
+                  <a:ea typeface="宋体" pitchFamily="2" charset="-122"/>
                 </a:defRPr>
               </a:lvl4pPr>
               <a:lvl5pPr marL="2057400" indent="-228600" eaLnBrk="0" hangingPunct="0">
@@ -9349,8 +9319,8 @@
                   <a:solidFill>
                     <a:schemeClr val="tx1"/>
                   </a:solidFill>
-                  <a:latin typeface="Arial" panose="020B0604020202020204" pitchFamily="34" charset="0"/>
-                  <a:ea typeface="宋体" panose="02010600030101010101" pitchFamily="2" charset="-122"/>
+                  <a:latin typeface="Arial" panose="020B0604020202090204" pitchFamily="34" charset="0"/>
+                  <a:ea typeface="宋体" pitchFamily="2" charset="-122"/>
                 </a:defRPr>
               </a:lvl5pPr>
               <a:lvl6pPr marL="2514600" indent="-228600" eaLnBrk="0" fontAlgn="base" hangingPunct="0">
@@ -9360,13 +9330,13 @@
                 <a:spcAft>
                   <a:spcPct val="0"/>
                 </a:spcAft>
-                <a:buFont typeface="Arial" panose="020B0604020202020204" pitchFamily="34" charset="0"/>
+                <a:buFont typeface="Arial" panose="020B0604020202090204" pitchFamily="34" charset="0"/>
                 <a:defRPr>
                   <a:solidFill>
                     <a:schemeClr val="tx1"/>
                   </a:solidFill>
-                  <a:latin typeface="Arial" panose="020B0604020202020204" pitchFamily="34" charset="0"/>
-                  <a:ea typeface="宋体" panose="02010600030101010101" pitchFamily="2" charset="-122"/>
+                  <a:latin typeface="Arial" panose="020B0604020202090204" pitchFamily="34" charset="0"/>
+                  <a:ea typeface="宋体" pitchFamily="2" charset="-122"/>
                 </a:defRPr>
               </a:lvl6pPr>
               <a:lvl7pPr marL="2971800" indent="-228600" eaLnBrk="0" fontAlgn="base" hangingPunct="0">
@@ -9376,13 +9346,13 @@
                 <a:spcAft>
                   <a:spcPct val="0"/>
                 </a:spcAft>
-                <a:buFont typeface="Arial" panose="020B0604020202020204" pitchFamily="34" charset="0"/>
+                <a:buFont typeface="Arial" panose="020B0604020202090204" pitchFamily="34" charset="0"/>
                 <a:defRPr>
                   <a:solidFill>
                     <a:schemeClr val="tx1"/>
                   </a:solidFill>
-                  <a:latin typeface="Arial" panose="020B0604020202020204" pitchFamily="34" charset="0"/>
-                  <a:ea typeface="宋体" panose="02010600030101010101" pitchFamily="2" charset="-122"/>
+                  <a:latin typeface="Arial" panose="020B0604020202090204" pitchFamily="34" charset="0"/>
+                  <a:ea typeface="宋体" pitchFamily="2" charset="-122"/>
                 </a:defRPr>
               </a:lvl7pPr>
               <a:lvl8pPr marL="3429000" indent="-228600" eaLnBrk="0" fontAlgn="base" hangingPunct="0">
@@ -9392,13 +9362,13 @@
                 <a:spcAft>
                   <a:spcPct val="0"/>
                 </a:spcAft>
-                <a:buFont typeface="Arial" panose="020B0604020202020204" pitchFamily="34" charset="0"/>
+                <a:buFont typeface="Arial" panose="020B0604020202090204" pitchFamily="34" charset="0"/>
                 <a:defRPr>
                   <a:solidFill>
                     <a:schemeClr val="tx1"/>
                   </a:solidFill>
-                  <a:latin typeface="Arial" panose="020B0604020202020204" pitchFamily="34" charset="0"/>
-                  <a:ea typeface="宋体" panose="02010600030101010101" pitchFamily="2" charset="-122"/>
+                  <a:latin typeface="Arial" panose="020B0604020202090204" pitchFamily="34" charset="0"/>
+                  <a:ea typeface="宋体" pitchFamily="2" charset="-122"/>
                 </a:defRPr>
               </a:lvl8pPr>
               <a:lvl9pPr marL="3886200" indent="-228600" eaLnBrk="0" fontAlgn="base" hangingPunct="0">
@@ -9408,13 +9378,13 @@
                 <a:spcAft>
                   <a:spcPct val="0"/>
                 </a:spcAft>
-                <a:buFont typeface="Arial" panose="020B0604020202020204" pitchFamily="34" charset="0"/>
+                <a:buFont typeface="Arial" panose="020B0604020202090204" pitchFamily="34" charset="0"/>
                 <a:defRPr>
                   <a:solidFill>
                     <a:schemeClr val="tx1"/>
                   </a:solidFill>
-                  <a:latin typeface="Arial" panose="020B0604020202020204" pitchFamily="34" charset="0"/>
-                  <a:ea typeface="宋体" panose="02010600030101010101" pitchFamily="2" charset="-122"/>
+                  <a:latin typeface="Arial" panose="020B0604020202090204" pitchFamily="34" charset="0"/>
+                  <a:ea typeface="宋体" pitchFamily="2" charset="-122"/>
                 </a:defRPr>
               </a:lvl9pPr>
             </a:lstStyle>
@@ -9978,8 +9948,8 @@
                   <a:solidFill>
                     <a:schemeClr val="tx1"/>
                   </a:solidFill>
-                  <a:latin typeface="Arial" panose="020B0604020202020204" pitchFamily="34" charset="0"/>
-                  <a:ea typeface="宋体" panose="02010600030101010101" pitchFamily="2" charset="-122"/>
+                  <a:latin typeface="Arial" panose="020B0604020202090204" pitchFamily="34" charset="0"/>
+                  <a:ea typeface="宋体" pitchFamily="2" charset="-122"/>
                 </a:defRPr>
               </a:lvl1pPr>
               <a:lvl2pPr marL="742950" indent="-285750" eaLnBrk="0" hangingPunct="0">
@@ -9987,8 +9957,8 @@
                   <a:solidFill>
                     <a:schemeClr val="tx1"/>
                   </a:solidFill>
-                  <a:latin typeface="Arial" panose="020B0604020202020204" pitchFamily="34" charset="0"/>
-                  <a:ea typeface="宋体" panose="02010600030101010101" pitchFamily="2" charset="-122"/>
+                  <a:latin typeface="Arial" panose="020B0604020202090204" pitchFamily="34" charset="0"/>
+                  <a:ea typeface="宋体" pitchFamily="2" charset="-122"/>
                 </a:defRPr>
               </a:lvl2pPr>
               <a:lvl3pPr marL="1143000" indent="-228600" eaLnBrk="0" hangingPunct="0">
@@ -9996,8 +9966,8 @@
                   <a:solidFill>
                     <a:schemeClr val="tx1"/>
                   </a:solidFill>
-                  <a:latin typeface="Arial" panose="020B0604020202020204" pitchFamily="34" charset="0"/>
-                  <a:ea typeface="宋体" panose="02010600030101010101" pitchFamily="2" charset="-122"/>
+                  <a:latin typeface="Arial" panose="020B0604020202090204" pitchFamily="34" charset="0"/>
+                  <a:ea typeface="宋体" pitchFamily="2" charset="-122"/>
                 </a:defRPr>
               </a:lvl3pPr>
               <a:lvl4pPr marL="1600200" indent="-228600" eaLnBrk="0" hangingPunct="0">
@@ -10005,8 +9975,8 @@
                   <a:solidFill>
                     <a:schemeClr val="tx1"/>
                   </a:solidFill>
-                  <a:latin typeface="Arial" panose="020B0604020202020204" pitchFamily="34" charset="0"/>
-                  <a:ea typeface="宋体" panose="02010600030101010101" pitchFamily="2" charset="-122"/>
+                  <a:latin typeface="Arial" panose="020B0604020202090204" pitchFamily="34" charset="0"/>
+                  <a:ea typeface="宋体" pitchFamily="2" charset="-122"/>
                 </a:defRPr>
               </a:lvl4pPr>
               <a:lvl5pPr marL="2057400" indent="-228600" eaLnBrk="0" hangingPunct="0">
@@ -10014,8 +9984,8 @@
                   <a:solidFill>
                     <a:schemeClr val="tx1"/>
                   </a:solidFill>
-                  <a:latin typeface="Arial" panose="020B0604020202020204" pitchFamily="34" charset="0"/>
-                  <a:ea typeface="宋体" panose="02010600030101010101" pitchFamily="2" charset="-122"/>
+                  <a:latin typeface="Arial" panose="020B0604020202090204" pitchFamily="34" charset="0"/>
+                  <a:ea typeface="宋体" pitchFamily="2" charset="-122"/>
                 </a:defRPr>
               </a:lvl5pPr>
               <a:lvl6pPr marL="2514600" indent="-228600" eaLnBrk="0" fontAlgn="base" hangingPunct="0">
@@ -10025,13 +9995,13 @@
                 <a:spcAft>
                   <a:spcPct val="0"/>
                 </a:spcAft>
-                <a:buFont typeface="Arial" panose="020B0604020202020204" pitchFamily="34" charset="0"/>
+                <a:buFont typeface="Arial" panose="020B0604020202090204" pitchFamily="34" charset="0"/>
                 <a:defRPr>
                   <a:solidFill>
                     <a:schemeClr val="tx1"/>
                   </a:solidFill>
-                  <a:latin typeface="Arial" panose="020B0604020202020204" pitchFamily="34" charset="0"/>
-                  <a:ea typeface="宋体" panose="02010600030101010101" pitchFamily="2" charset="-122"/>
+                  <a:latin typeface="Arial" panose="020B0604020202090204" pitchFamily="34" charset="0"/>
+                  <a:ea typeface="宋体" pitchFamily="2" charset="-122"/>
                 </a:defRPr>
               </a:lvl6pPr>
               <a:lvl7pPr marL="2971800" indent="-228600" eaLnBrk="0" fontAlgn="base" hangingPunct="0">
@@ -10041,13 +10011,13 @@
                 <a:spcAft>
                   <a:spcPct val="0"/>
                 </a:spcAft>
-                <a:buFont typeface="Arial" panose="020B0604020202020204" pitchFamily="34" charset="0"/>
+                <a:buFont typeface="Arial" panose="020B0604020202090204" pitchFamily="34" charset="0"/>
                 <a:defRPr>
                   <a:solidFill>
                     <a:schemeClr val="tx1"/>
                   </a:solidFill>
-                  <a:latin typeface="Arial" panose="020B0604020202020204" pitchFamily="34" charset="0"/>
-                  <a:ea typeface="宋体" panose="02010600030101010101" pitchFamily="2" charset="-122"/>
+                  <a:latin typeface="Arial" panose="020B0604020202090204" pitchFamily="34" charset="0"/>
+                  <a:ea typeface="宋体" pitchFamily="2" charset="-122"/>
                 </a:defRPr>
               </a:lvl7pPr>
               <a:lvl8pPr marL="3429000" indent="-228600" eaLnBrk="0" fontAlgn="base" hangingPunct="0">
@@ -10057,13 +10027,13 @@
                 <a:spcAft>
                   <a:spcPct val="0"/>
                 </a:spcAft>
-                <a:buFont typeface="Arial" panose="020B0604020202020204" pitchFamily="34" charset="0"/>
+                <a:buFont typeface="Arial" panose="020B0604020202090204" pitchFamily="34" charset="0"/>
                 <a:defRPr>
                   <a:solidFill>
                     <a:schemeClr val="tx1"/>
                   </a:solidFill>
-                  <a:latin typeface="Arial" panose="020B0604020202020204" pitchFamily="34" charset="0"/>
-                  <a:ea typeface="宋体" panose="02010600030101010101" pitchFamily="2" charset="-122"/>
+                  <a:latin typeface="Arial" panose="020B0604020202090204" pitchFamily="34" charset="0"/>
+                  <a:ea typeface="宋体" pitchFamily="2" charset="-122"/>
                 </a:defRPr>
               </a:lvl8pPr>
               <a:lvl9pPr marL="3886200" indent="-228600" eaLnBrk="0" fontAlgn="base" hangingPunct="0">
@@ -10073,13 +10043,13 @@
                 <a:spcAft>
                   <a:spcPct val="0"/>
                 </a:spcAft>
-                <a:buFont typeface="Arial" panose="020B0604020202020204" pitchFamily="34" charset="0"/>
+                <a:buFont typeface="Arial" panose="020B0604020202090204" pitchFamily="34" charset="0"/>
                 <a:defRPr>
                   <a:solidFill>
                     <a:schemeClr val="tx1"/>
                   </a:solidFill>
-                  <a:latin typeface="Arial" panose="020B0604020202020204" pitchFamily="34" charset="0"/>
-                  <a:ea typeface="宋体" panose="02010600030101010101" pitchFamily="2" charset="-122"/>
+                  <a:latin typeface="Arial" panose="020B0604020202090204" pitchFamily="34" charset="0"/>
+                  <a:ea typeface="宋体" pitchFamily="2" charset="-122"/>
                 </a:defRPr>
               </a:lvl9pPr>
             </a:lstStyle>
@@ -10523,36 +10493,6 @@
           <a:chExt cx="0" cy="0"/>
         </a:xfrm>
       </p:grpSpPr>
-      <p:pic>
-        <p:nvPicPr>
-          <p:cNvPr id="16" name="图片 15"/>
-          <p:cNvPicPr>
-            <a:picLocks noChangeAspect="1"/>
-          </p:cNvPicPr>
-          <p:nvPr userDrawn="1"/>
-        </p:nvPicPr>
-        <p:blipFill>
-          <a:blip r:embed="rId2" cstate="print">
-            <a:extLst>
-              <a:ext uri="{28A0092B-C50C-407E-A947-70E740481C1C}">
-                <a14:useLocalDpi xmlns:a14="http://schemas.microsoft.com/office/drawing/2010/main" val="0"/>
-              </a:ext>
-            </a:extLst>
-          </a:blip>
-          <a:stretch>
-            <a:fillRect/>
-          </a:stretch>
-        </p:blipFill>
-        <p:spPr>
-          <a:xfrm>
-            <a:off x="4222998" y="3789834"/>
-            <a:ext cx="3952633" cy="616956"/>
-          </a:xfrm>
-          <a:prstGeom prst="rect">
-            <a:avLst/>
-          </a:prstGeom>
-        </p:spPr>
-      </p:pic>
       <p:sp>
         <p:nvSpPr>
           <p:cNvPr id="4" name="日期占位符 3"/>
@@ -10969,31 +10909,6 @@
           </a:p>
         </p:txBody>
       </p:sp>
-      <p:pic>
-        <p:nvPicPr>
-          <p:cNvPr id="11" name="图片 10" descr="寄语(1)"/>
-          <p:cNvPicPr>
-            <a:picLocks noChangeAspect="1"/>
-          </p:cNvPicPr>
-          <p:nvPr userDrawn="1"/>
-        </p:nvPicPr>
-        <p:blipFill>
-          <a:blip r:embed="rId3"/>
-          <a:srcRect l="114" t="60287" r="-114" b="572"/>
-          <a:stretch>
-            <a:fillRect/>
-          </a:stretch>
-        </p:blipFill>
-        <p:spPr>
-          <a:xfrm>
-            <a:off x="2480310" y="2508250"/>
-            <a:ext cx="7532370" cy="1657985"/>
-          </a:xfrm>
-          <a:prstGeom prst="rect">
-            <a:avLst/>
-          </a:prstGeom>
-        </p:spPr>
-      </p:pic>
     </p:spTree>
   </p:cSld>
   <p:clrMapOvr>
@@ -11401,7 +11316,7 @@
           <a:bodyPr/>
           <a:lstStyle>
             <a:lvl1pPr marL="342900" indent="-342900">
-              <a:buFont typeface="Arial" panose="020B0604020202020204" pitchFamily="34" charset="0"/>
+              <a:buFont typeface="Arial" panose="020B0604020202090204" pitchFamily="34" charset="0"/>
               <a:buChar char="•"/>
               <a:defRPr sz="2400">
                 <a:latin typeface="+mn-ea"/>
@@ -11637,7 +11552,7 @@
               <a:spcAft>
                 <a:spcPts val="1000"/>
               </a:spcAft>
-              <a:buFont typeface="Arial" panose="020B0604020202020204" pitchFamily="34" charset="0"/>
+              <a:buFont typeface="Arial" panose="020B0604020202090204" pitchFamily="34" charset="0"/>
               <a:buChar char="•"/>
               <a:defRPr kumimoji="0" lang="zh-CN" altLang="en-US" sz="2400" b="0" i="0" u="none" strike="noStrike" kern="1200" cap="none" spc="150" normalizeH="0" baseline="0" noProof="1" dirty="0">
                 <a:solidFill>
@@ -11663,7 +11578,7 @@
               <a:spcAft>
                 <a:spcPts val="1000"/>
               </a:spcAft>
-              <a:buFont typeface="Arial" panose="020B0604020202020204" pitchFamily="34" charset="0"/>
+              <a:buFont typeface="Arial" panose="020B0604020202090204" pitchFamily="34" charset="0"/>
               <a:buNone/>
               <a:tabLst>
                 <a:tab pos="1609725" algn="l"/>
@@ -11692,7 +11607,7 @@
               <a:spcAft>
                 <a:spcPts val="1000"/>
               </a:spcAft>
-              <a:buFont typeface="Arial" panose="020B0604020202020204" pitchFamily="34" charset="0"/>
+              <a:buFont typeface="Arial" panose="020B0604020202090204" pitchFamily="34" charset="0"/>
               <a:buChar char="•"/>
               <a:defRPr kumimoji="0" lang="zh-CN" altLang="en-US" sz="2400" b="0" i="0" u="none" strike="noStrike" kern="1200" cap="none" spc="150" normalizeH="0" baseline="0" noProof="1" dirty="0">
                 <a:solidFill>
@@ -11718,7 +11633,7 @@
               <a:spcAft>
                 <a:spcPts val="1000"/>
               </a:spcAft>
-              <a:buFont typeface="Arial" panose="020B0604020202020204" pitchFamily="34" charset="0"/>
+              <a:buFont typeface="Arial" panose="020B0604020202090204" pitchFamily="34" charset="0"/>
               <a:buChar char="•"/>
               <a:defRPr kumimoji="0" lang="zh-CN" altLang="en-US" sz="2400" b="0" i="0" u="none" strike="noStrike" kern="1200" cap="none" spc="150" normalizeH="0" baseline="0" noProof="1" dirty="0">
                 <a:solidFill>
@@ -11744,7 +11659,7 @@
               <a:spcAft>
                 <a:spcPts val="1000"/>
               </a:spcAft>
-              <a:buFont typeface="Arial" panose="020B0604020202020204" pitchFamily="34" charset="0"/>
+              <a:buFont typeface="Arial" panose="020B0604020202090204" pitchFamily="34" charset="0"/>
               <a:buChar char="•"/>
               <a:defRPr kumimoji="0" lang="zh-CN" altLang="en-US" sz="2400" b="0" i="0" u="none" strike="noStrike" kern="1200" cap="none" spc="150" normalizeH="0" baseline="0" noProof="1" dirty="0">
                 <a:solidFill>
@@ -11884,7 +11799,7 @@
               <a:spcAft>
                 <a:spcPts val="1000"/>
               </a:spcAft>
-              <a:buFont typeface="Arial" panose="020B0604020202020204" pitchFamily="34" charset="0"/>
+              <a:buFont typeface="Arial" panose="020B0604020202090204" pitchFamily="34" charset="0"/>
               <a:buChar char="•"/>
               <a:defRPr kumimoji="0" lang="zh-CN" altLang="en-US" sz="2400" b="0" i="0" u="none" strike="noStrike" kern="1200" cap="none" spc="150" normalizeH="0" baseline="0" noProof="1" dirty="0">
                 <a:solidFill>
@@ -11910,7 +11825,7 @@
               <a:spcAft>
                 <a:spcPts val="1000"/>
               </a:spcAft>
-              <a:buFont typeface="Arial" panose="020B0604020202020204" pitchFamily="34" charset="0"/>
+              <a:buFont typeface="Arial" panose="020B0604020202090204" pitchFamily="34" charset="0"/>
               <a:buNone/>
               <a:tabLst>
                 <a:tab pos="1609725" algn="l"/>
@@ -11939,7 +11854,7 @@
               <a:spcAft>
                 <a:spcPts val="1000"/>
               </a:spcAft>
-              <a:buFont typeface="Arial" panose="020B0604020202020204" pitchFamily="34" charset="0"/>
+              <a:buFont typeface="Arial" panose="020B0604020202090204" pitchFamily="34" charset="0"/>
               <a:buChar char="•"/>
               <a:defRPr kumimoji="0" lang="zh-CN" altLang="en-US" sz="2400" b="0" i="0" u="none" strike="noStrike" kern="1200" cap="none" spc="150" normalizeH="0" baseline="0" noProof="1" dirty="0">
                 <a:solidFill>
@@ -11965,7 +11880,7 @@
               <a:spcAft>
                 <a:spcPts val="1000"/>
               </a:spcAft>
-              <a:buFont typeface="Arial" panose="020B0604020202020204" pitchFamily="34" charset="0"/>
+              <a:buFont typeface="Arial" panose="020B0604020202090204" pitchFamily="34" charset="0"/>
               <a:buChar char="•"/>
               <a:defRPr kumimoji="0" lang="zh-CN" altLang="en-US" sz="2400" b="0" i="0" u="none" strike="noStrike" kern="1200" cap="none" spc="150" normalizeH="0" baseline="0" noProof="1" dirty="0">
                 <a:solidFill>
@@ -11991,7 +11906,7 @@
               <a:spcAft>
                 <a:spcPts val="1000"/>
               </a:spcAft>
-              <a:buFont typeface="Arial" panose="020B0604020202020204" pitchFamily="34" charset="0"/>
+              <a:buFont typeface="Arial" panose="020B0604020202090204" pitchFamily="34" charset="0"/>
               <a:buChar char="•"/>
               <a:defRPr kumimoji="0" lang="zh-CN" altLang="en-US" sz="2400" b="0" i="0" u="none" strike="noStrike" kern="1200" cap="none" spc="150" normalizeH="0" baseline="0" noProof="1" dirty="0">
                 <a:solidFill>
@@ -12131,7 +12046,7 @@
               <a:spcAft>
                 <a:spcPts val="1000"/>
               </a:spcAft>
-              <a:buFont typeface="Arial" panose="020B0604020202020204" pitchFamily="34" charset="0"/>
+              <a:buFont typeface="Arial" panose="020B0604020202090204" pitchFamily="34" charset="0"/>
               <a:buChar char="•"/>
               <a:defRPr kumimoji="0" lang="zh-CN" altLang="en-US" sz="2400" b="0" i="0" u="none" strike="noStrike" kern="1200" cap="none" spc="150" normalizeH="0" baseline="0" noProof="1" dirty="0">
                 <a:solidFill>
@@ -12157,7 +12072,7 @@
               <a:spcAft>
                 <a:spcPts val="1000"/>
               </a:spcAft>
-              <a:buFont typeface="Arial" panose="020B0604020202020204" pitchFamily="34" charset="0"/>
+              <a:buFont typeface="Arial" panose="020B0604020202090204" pitchFamily="34" charset="0"/>
               <a:buChar char="•"/>
               <a:tabLst>
                 <a:tab pos="1609725" algn="l"/>
@@ -12186,7 +12101,7 @@
               <a:spcAft>
                 <a:spcPts val="1000"/>
               </a:spcAft>
-              <a:buFont typeface="Arial" panose="020B0604020202020204" pitchFamily="34" charset="0"/>
+              <a:buFont typeface="Arial" panose="020B0604020202090204" pitchFamily="34" charset="0"/>
               <a:buChar char="•"/>
               <a:defRPr kumimoji="0" lang="zh-CN" altLang="en-US" sz="2400" b="0" i="0" u="none" strike="noStrike" kern="1200" cap="none" spc="150" normalizeH="0" baseline="0" noProof="1" dirty="0">
                 <a:solidFill>
@@ -12212,7 +12127,7 @@
               <a:spcAft>
                 <a:spcPts val="1000"/>
               </a:spcAft>
-              <a:buFont typeface="Arial" panose="020B0604020202020204" pitchFamily="34" charset="0"/>
+              <a:buFont typeface="Arial" panose="020B0604020202090204" pitchFamily="34" charset="0"/>
               <a:buChar char="•"/>
               <a:defRPr kumimoji="0" lang="zh-CN" altLang="en-US" sz="2400" b="0" i="0" u="none" strike="noStrike" kern="1200" cap="none" spc="150" normalizeH="0" baseline="0" noProof="1" dirty="0">
                 <a:solidFill>
@@ -12238,7 +12153,7 @@
               <a:spcAft>
                 <a:spcPts val="1000"/>
               </a:spcAft>
-              <a:buFont typeface="Arial" panose="020B0604020202020204" pitchFamily="34" charset="0"/>
+              <a:buFont typeface="Arial" panose="020B0604020202090204" pitchFamily="34" charset="0"/>
               <a:buChar char="•"/>
               <a:defRPr kumimoji="0" lang="zh-CN" altLang="en-US" sz="2400" b="0" i="0" u="none" strike="noStrike" kern="1200" cap="none" spc="150" normalizeH="0" baseline="0" noProof="1" dirty="0">
                 <a:solidFill>
@@ -12300,7 +12215,7 @@
               <a:spcAft>
                 <a:spcPts val="1000"/>
               </a:spcAft>
-              <a:buFont typeface="Arial" panose="020B0604020202020204" pitchFamily="34" charset="0"/>
+              <a:buFont typeface="Arial" panose="020B0604020202090204" pitchFamily="34" charset="0"/>
               <a:buChar char="•"/>
               <a:defRPr kumimoji="0" lang="zh-CN" altLang="en-US" sz="2400" b="0" i="0" u="none" strike="noStrike" kern="1200" cap="none" spc="150" normalizeH="0" baseline="0" noProof="1" dirty="0">
                 <a:solidFill>
@@ -12326,7 +12241,7 @@
               <a:spcAft>
                 <a:spcPts val="1000"/>
               </a:spcAft>
-              <a:buFont typeface="Arial" panose="020B0604020202020204" pitchFamily="34" charset="0"/>
+              <a:buFont typeface="Arial" panose="020B0604020202090204" pitchFamily="34" charset="0"/>
               <a:buChar char="•"/>
               <a:tabLst>
                 <a:tab pos="1609725" algn="l"/>
@@ -12355,7 +12270,7 @@
               <a:spcAft>
                 <a:spcPts val="1000"/>
               </a:spcAft>
-              <a:buFont typeface="Arial" panose="020B0604020202020204" pitchFamily="34" charset="0"/>
+              <a:buFont typeface="Arial" panose="020B0604020202090204" pitchFamily="34" charset="0"/>
               <a:buChar char="•"/>
               <a:defRPr kumimoji="0" lang="zh-CN" altLang="en-US" sz="2400" b="0" i="0" u="none" strike="noStrike" kern="1200" cap="none" spc="150" normalizeH="0" baseline="0" noProof="1" dirty="0">
                 <a:solidFill>
@@ -12381,7 +12296,7 @@
               <a:spcAft>
                 <a:spcPts val="1000"/>
               </a:spcAft>
-              <a:buFont typeface="Arial" panose="020B0604020202020204" pitchFamily="34" charset="0"/>
+              <a:buFont typeface="Arial" panose="020B0604020202090204" pitchFamily="34" charset="0"/>
               <a:buChar char="•"/>
               <a:defRPr kumimoji="0" lang="zh-CN" altLang="en-US" sz="2400" b="0" i="0" u="none" strike="noStrike" kern="1200" cap="none" spc="150" normalizeH="0" baseline="0" noProof="1" dirty="0">
                 <a:solidFill>
@@ -12407,7 +12322,7 @@
               <a:spcAft>
                 <a:spcPts val="1000"/>
               </a:spcAft>
-              <a:buFont typeface="Arial" panose="020B0604020202020204" pitchFamily="34" charset="0"/>
+              <a:buFont typeface="Arial" panose="020B0604020202090204" pitchFamily="34" charset="0"/>
               <a:buChar char="•"/>
               <a:defRPr kumimoji="0" lang="zh-CN" altLang="en-US" sz="2400" b="0" i="0" u="none" strike="noStrike" kern="1200" cap="none" spc="150" normalizeH="0" baseline="0" noProof="1" dirty="0">
                 <a:solidFill>
@@ -12978,8 +12893,8 @@
                   <a:solidFill>
                     <a:schemeClr val="tx1"/>
                   </a:solidFill>
-                  <a:latin typeface="Arial" panose="020B0604020202020204" pitchFamily="34" charset="0"/>
-                  <a:ea typeface="宋体" panose="02010600030101010101" pitchFamily="2" charset="-122"/>
+                  <a:latin typeface="Arial" panose="020B0604020202090204" pitchFamily="34" charset="0"/>
+                  <a:ea typeface="宋体" pitchFamily="2" charset="-122"/>
                 </a:defRPr>
               </a:lvl1pPr>
               <a:lvl2pPr marL="742950" indent="-285750" eaLnBrk="0" hangingPunct="0">
@@ -12987,8 +12902,8 @@
                   <a:solidFill>
                     <a:schemeClr val="tx1"/>
                   </a:solidFill>
-                  <a:latin typeface="Arial" panose="020B0604020202020204" pitchFamily="34" charset="0"/>
-                  <a:ea typeface="宋体" panose="02010600030101010101" pitchFamily="2" charset="-122"/>
+                  <a:latin typeface="Arial" panose="020B0604020202090204" pitchFamily="34" charset="0"/>
+                  <a:ea typeface="宋体" pitchFamily="2" charset="-122"/>
                 </a:defRPr>
               </a:lvl2pPr>
               <a:lvl3pPr marL="1143000" indent="-228600" eaLnBrk="0" hangingPunct="0">
@@ -12996,8 +12911,8 @@
                   <a:solidFill>
                     <a:schemeClr val="tx1"/>
                   </a:solidFill>
-                  <a:latin typeface="Arial" panose="020B0604020202020204" pitchFamily="34" charset="0"/>
-                  <a:ea typeface="宋体" panose="02010600030101010101" pitchFamily="2" charset="-122"/>
+                  <a:latin typeface="Arial" panose="020B0604020202090204" pitchFamily="34" charset="0"/>
+                  <a:ea typeface="宋体" pitchFamily="2" charset="-122"/>
                 </a:defRPr>
               </a:lvl3pPr>
               <a:lvl4pPr marL="1600200" indent="-228600" eaLnBrk="0" hangingPunct="0">
@@ -13005,8 +12920,8 @@
                   <a:solidFill>
                     <a:schemeClr val="tx1"/>
                   </a:solidFill>
-                  <a:latin typeface="Arial" panose="020B0604020202020204" pitchFamily="34" charset="0"/>
-                  <a:ea typeface="宋体" panose="02010600030101010101" pitchFamily="2" charset="-122"/>
+                  <a:latin typeface="Arial" panose="020B0604020202090204" pitchFamily="34" charset="0"/>
+                  <a:ea typeface="宋体" pitchFamily="2" charset="-122"/>
                 </a:defRPr>
               </a:lvl4pPr>
               <a:lvl5pPr marL="2057400" indent="-228600" eaLnBrk="0" hangingPunct="0">
@@ -13014,8 +12929,8 @@
                   <a:solidFill>
                     <a:schemeClr val="tx1"/>
                   </a:solidFill>
-                  <a:latin typeface="Arial" panose="020B0604020202020204" pitchFamily="34" charset="0"/>
-                  <a:ea typeface="宋体" panose="02010600030101010101" pitchFamily="2" charset="-122"/>
+                  <a:latin typeface="Arial" panose="020B0604020202090204" pitchFamily="34" charset="0"/>
+                  <a:ea typeface="宋体" pitchFamily="2" charset="-122"/>
                 </a:defRPr>
               </a:lvl5pPr>
               <a:lvl6pPr marL="2514600" indent="-228600" eaLnBrk="0" fontAlgn="base" hangingPunct="0">
@@ -13025,13 +12940,13 @@
                 <a:spcAft>
                   <a:spcPct val="0"/>
                 </a:spcAft>
-                <a:buFont typeface="Arial" panose="020B0604020202020204" pitchFamily="34" charset="0"/>
+                <a:buFont typeface="Arial" panose="020B0604020202090204" pitchFamily="34" charset="0"/>
                 <a:defRPr>
                   <a:solidFill>
                     <a:schemeClr val="tx1"/>
                   </a:solidFill>
-                  <a:latin typeface="Arial" panose="020B0604020202020204" pitchFamily="34" charset="0"/>
-                  <a:ea typeface="宋体" panose="02010600030101010101" pitchFamily="2" charset="-122"/>
+                  <a:latin typeface="Arial" panose="020B0604020202090204" pitchFamily="34" charset="0"/>
+                  <a:ea typeface="宋体" pitchFamily="2" charset="-122"/>
                 </a:defRPr>
               </a:lvl6pPr>
               <a:lvl7pPr marL="2971800" indent="-228600" eaLnBrk="0" fontAlgn="base" hangingPunct="0">
@@ -13041,13 +12956,13 @@
                 <a:spcAft>
                   <a:spcPct val="0"/>
                 </a:spcAft>
-                <a:buFont typeface="Arial" panose="020B0604020202020204" pitchFamily="34" charset="0"/>
+                <a:buFont typeface="Arial" panose="020B0604020202090204" pitchFamily="34" charset="0"/>
                 <a:defRPr>
                   <a:solidFill>
                     <a:schemeClr val="tx1"/>
                   </a:solidFill>
-                  <a:latin typeface="Arial" panose="020B0604020202020204" pitchFamily="34" charset="0"/>
-                  <a:ea typeface="宋体" panose="02010600030101010101" pitchFamily="2" charset="-122"/>
+                  <a:latin typeface="Arial" panose="020B0604020202090204" pitchFamily="34" charset="0"/>
+                  <a:ea typeface="宋体" pitchFamily="2" charset="-122"/>
                 </a:defRPr>
               </a:lvl7pPr>
               <a:lvl8pPr marL="3429000" indent="-228600" eaLnBrk="0" fontAlgn="base" hangingPunct="0">
@@ -13057,13 +12972,13 @@
                 <a:spcAft>
                   <a:spcPct val="0"/>
                 </a:spcAft>
-                <a:buFont typeface="Arial" panose="020B0604020202020204" pitchFamily="34" charset="0"/>
+                <a:buFont typeface="Arial" panose="020B0604020202090204" pitchFamily="34" charset="0"/>
                 <a:defRPr>
                   <a:solidFill>
                     <a:schemeClr val="tx1"/>
                   </a:solidFill>
-                  <a:latin typeface="Arial" panose="020B0604020202020204" pitchFamily="34" charset="0"/>
-                  <a:ea typeface="宋体" panose="02010600030101010101" pitchFamily="2" charset="-122"/>
+                  <a:latin typeface="Arial" panose="020B0604020202090204" pitchFamily="34" charset="0"/>
+                  <a:ea typeface="宋体" pitchFamily="2" charset="-122"/>
                 </a:defRPr>
               </a:lvl8pPr>
               <a:lvl9pPr marL="3886200" indent="-228600" eaLnBrk="0" fontAlgn="base" hangingPunct="0">
@@ -13073,13 +12988,13 @@
                 <a:spcAft>
                   <a:spcPct val="0"/>
                 </a:spcAft>
-                <a:buFont typeface="Arial" panose="020B0604020202020204" pitchFamily="34" charset="0"/>
+                <a:buFont typeface="Arial" panose="020B0604020202090204" pitchFamily="34" charset="0"/>
                 <a:defRPr>
                   <a:solidFill>
                     <a:schemeClr val="tx1"/>
                   </a:solidFill>
-                  <a:latin typeface="Arial" panose="020B0604020202020204" pitchFamily="34" charset="0"/>
-                  <a:ea typeface="宋体" panose="02010600030101010101" pitchFamily="2" charset="-122"/>
+                  <a:latin typeface="Arial" panose="020B0604020202090204" pitchFamily="34" charset="0"/>
+                  <a:ea typeface="宋体" pitchFamily="2" charset="-122"/>
                 </a:defRPr>
               </a:lvl9pPr>
             </a:lstStyle>
@@ -13941,8 +13856,8 @@
                   <a:solidFill>
                     <a:schemeClr val="tx1"/>
                   </a:solidFill>
-                  <a:latin typeface="Arial" panose="020B0604020202020204" pitchFamily="34" charset="0"/>
-                  <a:ea typeface="宋体" panose="02010600030101010101" pitchFamily="2" charset="-122"/>
+                  <a:latin typeface="Arial" panose="020B0604020202090204" pitchFamily="34" charset="0"/>
+                  <a:ea typeface="宋体" pitchFamily="2" charset="-122"/>
                 </a:defRPr>
               </a:lvl1pPr>
               <a:lvl2pPr marL="742950" indent="-285750" eaLnBrk="0" hangingPunct="0">
@@ -13950,8 +13865,8 @@
                   <a:solidFill>
                     <a:schemeClr val="tx1"/>
                   </a:solidFill>
-                  <a:latin typeface="Arial" panose="020B0604020202020204" pitchFamily="34" charset="0"/>
-                  <a:ea typeface="宋体" panose="02010600030101010101" pitchFamily="2" charset="-122"/>
+                  <a:latin typeface="Arial" panose="020B0604020202090204" pitchFamily="34" charset="0"/>
+                  <a:ea typeface="宋体" pitchFamily="2" charset="-122"/>
                 </a:defRPr>
               </a:lvl2pPr>
               <a:lvl3pPr marL="1143000" indent="-228600" eaLnBrk="0" hangingPunct="0">
@@ -13959,8 +13874,8 @@
                   <a:solidFill>
                     <a:schemeClr val="tx1"/>
                   </a:solidFill>
-                  <a:latin typeface="Arial" panose="020B0604020202020204" pitchFamily="34" charset="0"/>
-                  <a:ea typeface="宋体" panose="02010600030101010101" pitchFamily="2" charset="-122"/>
+                  <a:latin typeface="Arial" panose="020B0604020202090204" pitchFamily="34" charset="0"/>
+                  <a:ea typeface="宋体" pitchFamily="2" charset="-122"/>
                 </a:defRPr>
               </a:lvl3pPr>
               <a:lvl4pPr marL="1600200" indent="-228600" eaLnBrk="0" hangingPunct="0">
@@ -13968,8 +13883,8 @@
                   <a:solidFill>
                     <a:schemeClr val="tx1"/>
                   </a:solidFill>
-                  <a:latin typeface="Arial" panose="020B0604020202020204" pitchFamily="34" charset="0"/>
-                  <a:ea typeface="宋体" panose="02010600030101010101" pitchFamily="2" charset="-122"/>
+                  <a:latin typeface="Arial" panose="020B0604020202090204" pitchFamily="34" charset="0"/>
+                  <a:ea typeface="宋体" pitchFamily="2" charset="-122"/>
                 </a:defRPr>
               </a:lvl4pPr>
               <a:lvl5pPr marL="2057400" indent="-228600" eaLnBrk="0" hangingPunct="0">
@@ -13977,8 +13892,8 @@
                   <a:solidFill>
                     <a:schemeClr val="tx1"/>
                   </a:solidFill>
-                  <a:latin typeface="Arial" panose="020B0604020202020204" pitchFamily="34" charset="0"/>
-                  <a:ea typeface="宋体" panose="02010600030101010101" pitchFamily="2" charset="-122"/>
+                  <a:latin typeface="Arial" panose="020B0604020202090204" pitchFamily="34" charset="0"/>
+                  <a:ea typeface="宋体" pitchFamily="2" charset="-122"/>
                 </a:defRPr>
               </a:lvl5pPr>
               <a:lvl6pPr marL="2514600" indent="-228600" eaLnBrk="0" fontAlgn="base" hangingPunct="0">
@@ -13988,13 +13903,13 @@
                 <a:spcAft>
                   <a:spcPct val="0"/>
                 </a:spcAft>
-                <a:buFont typeface="Arial" panose="020B0604020202020204" pitchFamily="34" charset="0"/>
+                <a:buFont typeface="Arial" panose="020B0604020202090204" pitchFamily="34" charset="0"/>
                 <a:defRPr>
                   <a:solidFill>
                     <a:schemeClr val="tx1"/>
                   </a:solidFill>
-                  <a:latin typeface="Arial" panose="020B0604020202020204" pitchFamily="34" charset="0"/>
-                  <a:ea typeface="宋体" panose="02010600030101010101" pitchFamily="2" charset="-122"/>
+                  <a:latin typeface="Arial" panose="020B0604020202090204" pitchFamily="34" charset="0"/>
+                  <a:ea typeface="宋体" pitchFamily="2" charset="-122"/>
                 </a:defRPr>
               </a:lvl6pPr>
               <a:lvl7pPr marL="2971800" indent="-228600" eaLnBrk="0" fontAlgn="base" hangingPunct="0">
@@ -14004,13 +13919,13 @@
                 <a:spcAft>
                   <a:spcPct val="0"/>
                 </a:spcAft>
-                <a:buFont typeface="Arial" panose="020B0604020202020204" pitchFamily="34" charset="0"/>
+                <a:buFont typeface="Arial" panose="020B0604020202090204" pitchFamily="34" charset="0"/>
                 <a:defRPr>
                   <a:solidFill>
                     <a:schemeClr val="tx1"/>
                   </a:solidFill>
-                  <a:latin typeface="Arial" panose="020B0604020202020204" pitchFamily="34" charset="0"/>
-                  <a:ea typeface="宋体" panose="02010600030101010101" pitchFamily="2" charset="-122"/>
+                  <a:latin typeface="Arial" panose="020B0604020202090204" pitchFamily="34" charset="0"/>
+                  <a:ea typeface="宋体" pitchFamily="2" charset="-122"/>
                 </a:defRPr>
               </a:lvl7pPr>
               <a:lvl8pPr marL="3429000" indent="-228600" eaLnBrk="0" fontAlgn="base" hangingPunct="0">
@@ -14020,13 +13935,13 @@
                 <a:spcAft>
                   <a:spcPct val="0"/>
                 </a:spcAft>
-                <a:buFont typeface="Arial" panose="020B0604020202020204" pitchFamily="34" charset="0"/>
+                <a:buFont typeface="Arial" panose="020B0604020202090204" pitchFamily="34" charset="0"/>
                 <a:defRPr>
                   <a:solidFill>
                     <a:schemeClr val="tx1"/>
                   </a:solidFill>
-                  <a:latin typeface="Arial" panose="020B0604020202020204" pitchFamily="34" charset="0"/>
-                  <a:ea typeface="宋体" panose="02010600030101010101" pitchFamily="2" charset="-122"/>
+                  <a:latin typeface="Arial" panose="020B0604020202090204" pitchFamily="34" charset="0"/>
+                  <a:ea typeface="宋体" pitchFamily="2" charset="-122"/>
                 </a:defRPr>
               </a:lvl8pPr>
               <a:lvl9pPr marL="3886200" indent="-228600" eaLnBrk="0" fontAlgn="base" hangingPunct="0">
@@ -14036,13 +13951,13 @@
                 <a:spcAft>
                   <a:spcPct val="0"/>
                 </a:spcAft>
-                <a:buFont typeface="Arial" panose="020B0604020202020204" pitchFamily="34" charset="0"/>
+                <a:buFont typeface="Arial" panose="020B0604020202090204" pitchFamily="34" charset="0"/>
                 <a:defRPr>
                   <a:solidFill>
                     <a:schemeClr val="tx1"/>
                   </a:solidFill>
-                  <a:latin typeface="Arial" panose="020B0604020202020204" pitchFamily="34" charset="0"/>
-                  <a:ea typeface="宋体" panose="02010600030101010101" pitchFamily="2" charset="-122"/>
+                  <a:latin typeface="Arial" panose="020B0604020202090204" pitchFamily="34" charset="0"/>
+                  <a:ea typeface="宋体" pitchFamily="2" charset="-122"/>
                 </a:defRPr>
               </a:lvl9pPr>
             </a:lstStyle>
@@ -14547,8 +14462,8 @@
                   <a:solidFill>
                     <a:schemeClr val="tx1"/>
                   </a:solidFill>
-                  <a:latin typeface="Arial" panose="020B0604020202020204" pitchFamily="34" charset="0"/>
-                  <a:ea typeface="宋体" panose="02010600030101010101" pitchFamily="2" charset="-122"/>
+                  <a:latin typeface="Arial" panose="020B0604020202090204" pitchFamily="34" charset="0"/>
+                  <a:ea typeface="宋体" pitchFamily="2" charset="-122"/>
                 </a:defRPr>
               </a:lvl1pPr>
               <a:lvl2pPr marL="742950" indent="-285750" eaLnBrk="0" hangingPunct="0">
@@ -14556,8 +14471,8 @@
                   <a:solidFill>
                     <a:schemeClr val="tx1"/>
                   </a:solidFill>
-                  <a:latin typeface="Arial" panose="020B0604020202020204" pitchFamily="34" charset="0"/>
-                  <a:ea typeface="宋体" panose="02010600030101010101" pitchFamily="2" charset="-122"/>
+                  <a:latin typeface="Arial" panose="020B0604020202090204" pitchFamily="34" charset="0"/>
+                  <a:ea typeface="宋体" pitchFamily="2" charset="-122"/>
                 </a:defRPr>
               </a:lvl2pPr>
               <a:lvl3pPr marL="1143000" indent="-228600" eaLnBrk="0" hangingPunct="0">
@@ -14565,8 +14480,8 @@
                   <a:solidFill>
                     <a:schemeClr val="tx1"/>
                   </a:solidFill>
-                  <a:latin typeface="Arial" panose="020B0604020202020204" pitchFamily="34" charset="0"/>
-                  <a:ea typeface="宋体" panose="02010600030101010101" pitchFamily="2" charset="-122"/>
+                  <a:latin typeface="Arial" panose="020B0604020202090204" pitchFamily="34" charset="0"/>
+                  <a:ea typeface="宋体" pitchFamily="2" charset="-122"/>
                 </a:defRPr>
               </a:lvl3pPr>
               <a:lvl4pPr marL="1600200" indent="-228600" eaLnBrk="0" hangingPunct="0">
@@ -14574,8 +14489,8 @@
                   <a:solidFill>
                     <a:schemeClr val="tx1"/>
                   </a:solidFill>
-                  <a:latin typeface="Arial" panose="020B0604020202020204" pitchFamily="34" charset="0"/>
-                  <a:ea typeface="宋体" panose="02010600030101010101" pitchFamily="2" charset="-122"/>
+                  <a:latin typeface="Arial" panose="020B0604020202090204" pitchFamily="34" charset="0"/>
+                  <a:ea typeface="宋体" pitchFamily="2" charset="-122"/>
                 </a:defRPr>
               </a:lvl4pPr>
               <a:lvl5pPr marL="2057400" indent="-228600" eaLnBrk="0" hangingPunct="0">
@@ -14583,8 +14498,8 @@
                   <a:solidFill>
                     <a:schemeClr val="tx1"/>
                   </a:solidFill>
-                  <a:latin typeface="Arial" panose="020B0604020202020204" pitchFamily="34" charset="0"/>
-                  <a:ea typeface="宋体" panose="02010600030101010101" pitchFamily="2" charset="-122"/>
+                  <a:latin typeface="Arial" panose="020B0604020202090204" pitchFamily="34" charset="0"/>
+                  <a:ea typeface="宋体" pitchFamily="2" charset="-122"/>
                 </a:defRPr>
               </a:lvl5pPr>
               <a:lvl6pPr marL="2514600" indent="-228600" eaLnBrk="0" fontAlgn="base" hangingPunct="0">
@@ -14594,13 +14509,13 @@
                 <a:spcAft>
                   <a:spcPct val="0"/>
                 </a:spcAft>
-                <a:buFont typeface="Arial" panose="020B0604020202020204" pitchFamily="34" charset="0"/>
+                <a:buFont typeface="Arial" panose="020B0604020202090204" pitchFamily="34" charset="0"/>
                 <a:defRPr>
                   <a:solidFill>
                     <a:schemeClr val="tx1"/>
                   </a:solidFill>
-                  <a:latin typeface="Arial" panose="020B0604020202020204" pitchFamily="34" charset="0"/>
-                  <a:ea typeface="宋体" panose="02010600030101010101" pitchFamily="2" charset="-122"/>
+                  <a:latin typeface="Arial" panose="020B0604020202090204" pitchFamily="34" charset="0"/>
+                  <a:ea typeface="宋体" pitchFamily="2" charset="-122"/>
                 </a:defRPr>
               </a:lvl6pPr>
               <a:lvl7pPr marL="2971800" indent="-228600" eaLnBrk="0" fontAlgn="base" hangingPunct="0">
@@ -14610,13 +14525,13 @@
                 <a:spcAft>
                   <a:spcPct val="0"/>
                 </a:spcAft>
-                <a:buFont typeface="Arial" panose="020B0604020202020204" pitchFamily="34" charset="0"/>
+                <a:buFont typeface="Arial" panose="020B0604020202090204" pitchFamily="34" charset="0"/>
                 <a:defRPr>
                   <a:solidFill>
                     <a:schemeClr val="tx1"/>
                   </a:solidFill>
-                  <a:latin typeface="Arial" panose="020B0604020202020204" pitchFamily="34" charset="0"/>
-                  <a:ea typeface="宋体" panose="02010600030101010101" pitchFamily="2" charset="-122"/>
+                  <a:latin typeface="Arial" panose="020B0604020202090204" pitchFamily="34" charset="0"/>
+                  <a:ea typeface="宋体" pitchFamily="2" charset="-122"/>
                 </a:defRPr>
               </a:lvl7pPr>
               <a:lvl8pPr marL="3429000" indent="-228600" eaLnBrk="0" fontAlgn="base" hangingPunct="0">
@@ -14626,13 +14541,13 @@
                 <a:spcAft>
                   <a:spcPct val="0"/>
                 </a:spcAft>
-                <a:buFont typeface="Arial" panose="020B0604020202020204" pitchFamily="34" charset="0"/>
+                <a:buFont typeface="Arial" panose="020B0604020202090204" pitchFamily="34" charset="0"/>
                 <a:defRPr>
                   <a:solidFill>
                     <a:schemeClr val="tx1"/>
                   </a:solidFill>
-                  <a:latin typeface="Arial" panose="020B0604020202020204" pitchFamily="34" charset="0"/>
-                  <a:ea typeface="宋体" panose="02010600030101010101" pitchFamily="2" charset="-122"/>
+                  <a:latin typeface="Arial" panose="020B0604020202090204" pitchFamily="34" charset="0"/>
+                  <a:ea typeface="宋体" pitchFamily="2" charset="-122"/>
                 </a:defRPr>
               </a:lvl8pPr>
               <a:lvl9pPr marL="3886200" indent="-228600" eaLnBrk="0" fontAlgn="base" hangingPunct="0">
@@ -14642,13 +14557,13 @@
                 <a:spcAft>
                   <a:spcPct val="0"/>
                 </a:spcAft>
-                <a:buFont typeface="Arial" panose="020B0604020202020204" pitchFamily="34" charset="0"/>
+                <a:buFont typeface="Arial" panose="020B0604020202090204" pitchFamily="34" charset="0"/>
                 <a:defRPr>
                   <a:solidFill>
                     <a:schemeClr val="tx1"/>
                   </a:solidFill>
-                  <a:latin typeface="Arial" panose="020B0604020202020204" pitchFamily="34" charset="0"/>
-                  <a:ea typeface="宋体" panose="02010600030101010101" pitchFamily="2" charset="-122"/>
+                  <a:latin typeface="Arial" panose="020B0604020202090204" pitchFamily="34" charset="0"/>
+                  <a:ea typeface="宋体" pitchFamily="2" charset="-122"/>
                 </a:defRPr>
               </a:lvl9pPr>
             </a:lstStyle>
@@ -15356,8 +15271,8 @@
                   <a:solidFill>
                     <a:schemeClr val="tx1"/>
                   </a:solidFill>
-                  <a:latin typeface="Arial" panose="020B0604020202020204" pitchFamily="34" charset="0"/>
-                  <a:ea typeface="宋体" panose="02010600030101010101" pitchFamily="2" charset="-122"/>
+                  <a:latin typeface="Arial" panose="020B0604020202090204" pitchFamily="34" charset="0"/>
+                  <a:ea typeface="宋体" pitchFamily="2" charset="-122"/>
                 </a:defRPr>
               </a:lvl1pPr>
               <a:lvl2pPr marL="742950" indent="-285750" eaLnBrk="0" hangingPunct="0">
@@ -15365,8 +15280,8 @@
                   <a:solidFill>
                     <a:schemeClr val="tx1"/>
                   </a:solidFill>
-                  <a:latin typeface="Arial" panose="020B0604020202020204" pitchFamily="34" charset="0"/>
-                  <a:ea typeface="宋体" panose="02010600030101010101" pitchFamily="2" charset="-122"/>
+                  <a:latin typeface="Arial" panose="020B0604020202090204" pitchFamily="34" charset="0"/>
+                  <a:ea typeface="宋体" pitchFamily="2" charset="-122"/>
                 </a:defRPr>
               </a:lvl2pPr>
               <a:lvl3pPr marL="1143000" indent="-228600" eaLnBrk="0" hangingPunct="0">
@@ -15374,8 +15289,8 @@
                   <a:solidFill>
                     <a:schemeClr val="tx1"/>
                   </a:solidFill>
-                  <a:latin typeface="Arial" panose="020B0604020202020204" pitchFamily="34" charset="0"/>
-                  <a:ea typeface="宋体" panose="02010600030101010101" pitchFamily="2" charset="-122"/>
+                  <a:latin typeface="Arial" panose="020B0604020202090204" pitchFamily="34" charset="0"/>
+                  <a:ea typeface="宋体" pitchFamily="2" charset="-122"/>
                 </a:defRPr>
               </a:lvl3pPr>
               <a:lvl4pPr marL="1600200" indent="-228600" eaLnBrk="0" hangingPunct="0">
@@ -15383,8 +15298,8 @@
                   <a:solidFill>
                     <a:schemeClr val="tx1"/>
                   </a:solidFill>
-                  <a:latin typeface="Arial" panose="020B0604020202020204" pitchFamily="34" charset="0"/>
-                  <a:ea typeface="宋体" panose="02010600030101010101" pitchFamily="2" charset="-122"/>
+                  <a:latin typeface="Arial" panose="020B0604020202090204" pitchFamily="34" charset="0"/>
+                  <a:ea typeface="宋体" pitchFamily="2" charset="-122"/>
                 </a:defRPr>
               </a:lvl4pPr>
               <a:lvl5pPr marL="2057400" indent="-228600" eaLnBrk="0" hangingPunct="0">
@@ -15392,8 +15307,8 @@
                   <a:solidFill>
                     <a:schemeClr val="tx1"/>
                   </a:solidFill>
-                  <a:latin typeface="Arial" panose="020B0604020202020204" pitchFamily="34" charset="0"/>
-                  <a:ea typeface="宋体" panose="02010600030101010101" pitchFamily="2" charset="-122"/>
+                  <a:latin typeface="Arial" panose="020B0604020202090204" pitchFamily="34" charset="0"/>
+                  <a:ea typeface="宋体" pitchFamily="2" charset="-122"/>
                 </a:defRPr>
               </a:lvl5pPr>
               <a:lvl6pPr marL="2514600" indent="-228600" eaLnBrk="0" fontAlgn="base" hangingPunct="0">
@@ -15403,13 +15318,13 @@
                 <a:spcAft>
                   <a:spcPct val="0"/>
                 </a:spcAft>
-                <a:buFont typeface="Arial" panose="020B0604020202020204" pitchFamily="34" charset="0"/>
+                <a:buFont typeface="Arial" panose="020B0604020202090204" pitchFamily="34" charset="0"/>
                 <a:defRPr>
                   <a:solidFill>
                     <a:schemeClr val="tx1"/>
                   </a:solidFill>
-                  <a:latin typeface="Arial" panose="020B0604020202020204" pitchFamily="34" charset="0"/>
-                  <a:ea typeface="宋体" panose="02010600030101010101" pitchFamily="2" charset="-122"/>
+                  <a:latin typeface="Arial" panose="020B0604020202090204" pitchFamily="34" charset="0"/>
+                  <a:ea typeface="宋体" pitchFamily="2" charset="-122"/>
                 </a:defRPr>
               </a:lvl6pPr>
               <a:lvl7pPr marL="2971800" indent="-228600" eaLnBrk="0" fontAlgn="base" hangingPunct="0">
@@ -15419,13 +15334,13 @@
                 <a:spcAft>
                   <a:spcPct val="0"/>
                 </a:spcAft>
-                <a:buFont typeface="Arial" panose="020B0604020202020204" pitchFamily="34" charset="0"/>
+                <a:buFont typeface="Arial" panose="020B0604020202090204" pitchFamily="34" charset="0"/>
                 <a:defRPr>
                   <a:solidFill>
                     <a:schemeClr val="tx1"/>
                   </a:solidFill>
-                  <a:latin typeface="Arial" panose="020B0604020202020204" pitchFamily="34" charset="0"/>
-                  <a:ea typeface="宋体" panose="02010600030101010101" pitchFamily="2" charset="-122"/>
+                  <a:latin typeface="Arial" panose="020B0604020202090204" pitchFamily="34" charset="0"/>
+                  <a:ea typeface="宋体" pitchFamily="2" charset="-122"/>
                 </a:defRPr>
               </a:lvl7pPr>
               <a:lvl8pPr marL="3429000" indent="-228600" eaLnBrk="0" fontAlgn="base" hangingPunct="0">
@@ -15435,13 +15350,13 @@
                 <a:spcAft>
                   <a:spcPct val="0"/>
                 </a:spcAft>
-                <a:buFont typeface="Arial" panose="020B0604020202020204" pitchFamily="34" charset="0"/>
+                <a:buFont typeface="Arial" panose="020B0604020202090204" pitchFamily="34" charset="0"/>
                 <a:defRPr>
                   <a:solidFill>
                     <a:schemeClr val="tx1"/>
                   </a:solidFill>
-                  <a:latin typeface="Arial" panose="020B0604020202020204" pitchFamily="34" charset="0"/>
-                  <a:ea typeface="宋体" panose="02010600030101010101" pitchFamily="2" charset="-122"/>
+                  <a:latin typeface="Arial" panose="020B0604020202090204" pitchFamily="34" charset="0"/>
+                  <a:ea typeface="宋体" pitchFamily="2" charset="-122"/>
                 </a:defRPr>
               </a:lvl8pPr>
               <a:lvl9pPr marL="3886200" indent="-228600" eaLnBrk="0" fontAlgn="base" hangingPunct="0">
@@ -15451,13 +15366,13 @@
                 <a:spcAft>
                   <a:spcPct val="0"/>
                 </a:spcAft>
-                <a:buFont typeface="Arial" panose="020B0604020202020204" pitchFamily="34" charset="0"/>
+                <a:buFont typeface="Arial" panose="020B0604020202090204" pitchFamily="34" charset="0"/>
                 <a:defRPr>
                   <a:solidFill>
                     <a:schemeClr val="tx1"/>
                   </a:solidFill>
-                  <a:latin typeface="Arial" panose="020B0604020202020204" pitchFamily="34" charset="0"/>
-                  <a:ea typeface="宋体" panose="02010600030101010101" pitchFamily="2" charset="-122"/>
+                  <a:latin typeface="Arial" panose="020B0604020202090204" pitchFamily="34" charset="0"/>
+                  <a:ea typeface="宋体" pitchFamily="2" charset="-122"/>
                 </a:defRPr>
               </a:lvl9pPr>
             </a:lstStyle>
@@ -16021,8 +15936,8 @@
                   <a:solidFill>
                     <a:schemeClr val="tx1"/>
                   </a:solidFill>
-                  <a:latin typeface="Arial" panose="020B0604020202020204" pitchFamily="34" charset="0"/>
-                  <a:ea typeface="宋体" panose="02010600030101010101" pitchFamily="2" charset="-122"/>
+                  <a:latin typeface="Arial" panose="020B0604020202090204" pitchFamily="34" charset="0"/>
+                  <a:ea typeface="宋体" pitchFamily="2" charset="-122"/>
                 </a:defRPr>
               </a:lvl1pPr>
               <a:lvl2pPr marL="742950" indent="-285750" eaLnBrk="0" hangingPunct="0">
@@ -16030,8 +15945,8 @@
                   <a:solidFill>
                     <a:schemeClr val="tx1"/>
                   </a:solidFill>
-                  <a:latin typeface="Arial" panose="020B0604020202020204" pitchFamily="34" charset="0"/>
-                  <a:ea typeface="宋体" panose="02010600030101010101" pitchFamily="2" charset="-122"/>
+                  <a:latin typeface="Arial" panose="020B0604020202090204" pitchFamily="34" charset="0"/>
+                  <a:ea typeface="宋体" pitchFamily="2" charset="-122"/>
                 </a:defRPr>
               </a:lvl2pPr>
               <a:lvl3pPr marL="1143000" indent="-228600" eaLnBrk="0" hangingPunct="0">
@@ -16039,8 +15954,8 @@
                   <a:solidFill>
                     <a:schemeClr val="tx1"/>
                   </a:solidFill>
-                  <a:latin typeface="Arial" panose="020B0604020202020204" pitchFamily="34" charset="0"/>
-                  <a:ea typeface="宋体" panose="02010600030101010101" pitchFamily="2" charset="-122"/>
+                  <a:latin typeface="Arial" panose="020B0604020202090204" pitchFamily="34" charset="0"/>
+                  <a:ea typeface="宋体" pitchFamily="2" charset="-122"/>
                 </a:defRPr>
               </a:lvl3pPr>
               <a:lvl4pPr marL="1600200" indent="-228600" eaLnBrk="0" hangingPunct="0">
@@ -16048,8 +15963,8 @@
                   <a:solidFill>
                     <a:schemeClr val="tx1"/>
                   </a:solidFill>
-                  <a:latin typeface="Arial" panose="020B0604020202020204" pitchFamily="34" charset="0"/>
-                  <a:ea typeface="宋体" panose="02010600030101010101" pitchFamily="2" charset="-122"/>
+                  <a:latin typeface="Arial" panose="020B0604020202090204" pitchFamily="34" charset="0"/>
+                  <a:ea typeface="宋体" pitchFamily="2" charset="-122"/>
                 </a:defRPr>
               </a:lvl4pPr>
               <a:lvl5pPr marL="2057400" indent="-228600" eaLnBrk="0" hangingPunct="0">
@@ -16057,8 +15972,8 @@
                   <a:solidFill>
                     <a:schemeClr val="tx1"/>
                   </a:solidFill>
-                  <a:latin typeface="Arial" panose="020B0604020202020204" pitchFamily="34" charset="0"/>
-                  <a:ea typeface="宋体" panose="02010600030101010101" pitchFamily="2" charset="-122"/>
+                  <a:latin typeface="Arial" panose="020B0604020202090204" pitchFamily="34" charset="0"/>
+                  <a:ea typeface="宋体" pitchFamily="2" charset="-122"/>
                 </a:defRPr>
               </a:lvl5pPr>
               <a:lvl6pPr marL="2514600" indent="-228600" eaLnBrk="0" fontAlgn="base" hangingPunct="0">
@@ -16068,13 +15983,13 @@
                 <a:spcAft>
                   <a:spcPct val="0"/>
                 </a:spcAft>
-                <a:buFont typeface="Arial" panose="020B0604020202020204" pitchFamily="34" charset="0"/>
+                <a:buFont typeface="Arial" panose="020B0604020202090204" pitchFamily="34" charset="0"/>
                 <a:defRPr>
                   <a:solidFill>
                     <a:schemeClr val="tx1"/>
                   </a:solidFill>
-                  <a:latin typeface="Arial" panose="020B0604020202020204" pitchFamily="34" charset="0"/>
-                  <a:ea typeface="宋体" panose="02010600030101010101" pitchFamily="2" charset="-122"/>
+                  <a:latin typeface="Arial" panose="020B0604020202090204" pitchFamily="34" charset="0"/>
+                  <a:ea typeface="宋体" pitchFamily="2" charset="-122"/>
                 </a:defRPr>
               </a:lvl6pPr>
               <a:lvl7pPr marL="2971800" indent="-228600" eaLnBrk="0" fontAlgn="base" hangingPunct="0">
@@ -16084,13 +15999,13 @@
                 <a:spcAft>
                   <a:spcPct val="0"/>
                 </a:spcAft>
-                <a:buFont typeface="Arial" panose="020B0604020202020204" pitchFamily="34" charset="0"/>
+                <a:buFont typeface="Arial" panose="020B0604020202090204" pitchFamily="34" charset="0"/>
                 <a:defRPr>
                   <a:solidFill>
                     <a:schemeClr val="tx1"/>
                   </a:solidFill>
-                  <a:latin typeface="Arial" panose="020B0604020202020204" pitchFamily="34" charset="0"/>
-                  <a:ea typeface="宋体" panose="02010600030101010101" pitchFamily="2" charset="-122"/>
+                  <a:latin typeface="Arial" panose="020B0604020202090204" pitchFamily="34" charset="0"/>
+                  <a:ea typeface="宋体" pitchFamily="2" charset="-122"/>
                 </a:defRPr>
               </a:lvl7pPr>
               <a:lvl8pPr marL="3429000" indent="-228600" eaLnBrk="0" fontAlgn="base" hangingPunct="0">
@@ -16100,13 +16015,13 @@
                 <a:spcAft>
                   <a:spcPct val="0"/>
                 </a:spcAft>
-                <a:buFont typeface="Arial" panose="020B0604020202020204" pitchFamily="34" charset="0"/>
+                <a:buFont typeface="Arial" panose="020B0604020202090204" pitchFamily="34" charset="0"/>
                 <a:defRPr>
                   <a:solidFill>
                     <a:schemeClr val="tx1"/>
                   </a:solidFill>
-                  <a:latin typeface="Arial" panose="020B0604020202020204" pitchFamily="34" charset="0"/>
-                  <a:ea typeface="宋体" panose="02010600030101010101" pitchFamily="2" charset="-122"/>
+                  <a:latin typeface="Arial" panose="020B0604020202090204" pitchFamily="34" charset="0"/>
+                  <a:ea typeface="宋体" pitchFamily="2" charset="-122"/>
                 </a:defRPr>
               </a:lvl8pPr>
               <a:lvl9pPr marL="3886200" indent="-228600" eaLnBrk="0" fontAlgn="base" hangingPunct="0">
@@ -16116,13 +16031,13 @@
                 <a:spcAft>
                   <a:spcPct val="0"/>
                 </a:spcAft>
-                <a:buFont typeface="Arial" panose="020B0604020202020204" pitchFamily="34" charset="0"/>
+                <a:buFont typeface="Arial" panose="020B0604020202090204" pitchFamily="34" charset="0"/>
                 <a:defRPr>
                   <a:solidFill>
                     <a:schemeClr val="tx1"/>
                   </a:solidFill>
-                  <a:latin typeface="Arial" panose="020B0604020202020204" pitchFamily="34" charset="0"/>
-                  <a:ea typeface="宋体" panose="02010600030101010101" pitchFamily="2" charset="-122"/>
+                  <a:latin typeface="Arial" panose="020B0604020202090204" pitchFamily="34" charset="0"/>
+                  <a:ea typeface="宋体" pitchFamily="2" charset="-122"/>
                 </a:defRPr>
               </a:lvl9pPr>
             </a:lstStyle>
@@ -16707,7 +16622,7 @@
         <a:spcAft>
           <a:spcPts val="1000"/>
         </a:spcAft>
-        <a:buFont typeface="Arial" panose="020B0604020202020204" pitchFamily="34" charset="0"/>
+        <a:buFont typeface="Arial" panose="020B0604020202090204" pitchFamily="34" charset="0"/>
         <a:buChar char="•"/>
         <a:defRPr sz="1600" u="none" strike="noStrike" kern="1200" cap="none" spc="150" normalizeH="0" baseline="0">
           <a:solidFill>
@@ -16729,7 +16644,7 @@
         <a:spcAft>
           <a:spcPts val="1000"/>
         </a:spcAft>
-        <a:buFont typeface="Arial" panose="020B0604020202020204" pitchFamily="34" charset="0"/>
+        <a:buFont typeface="Arial" panose="020B0604020202090204" pitchFamily="34" charset="0"/>
         <a:buChar char="•"/>
         <a:tabLst>
           <a:tab pos="1609725" algn="l"/>
@@ -16754,7 +16669,7 @@
         <a:spcAft>
           <a:spcPts val="1000"/>
         </a:spcAft>
-        <a:buFont typeface="Arial" panose="020B0604020202020204" pitchFamily="34" charset="0"/>
+        <a:buFont typeface="Arial" panose="020B0604020202090204" pitchFamily="34" charset="0"/>
         <a:buChar char="•"/>
         <a:defRPr sz="1600" u="none" strike="noStrike" kern="1200" cap="none" spc="150" normalizeH="0" baseline="0">
           <a:solidFill>
@@ -16776,7 +16691,7 @@
         <a:spcAft>
           <a:spcPts val="1000"/>
         </a:spcAft>
-        <a:buFont typeface="Arial" panose="020B0604020202020204" pitchFamily="34" charset="0"/>
+        <a:buFont typeface="Arial" panose="020B0604020202090204" pitchFamily="34" charset="0"/>
         <a:buChar char="•"/>
         <a:defRPr sz="1600" u="none" strike="noStrike" kern="1200" cap="none" spc="150" normalizeH="0" baseline="0">
           <a:solidFill>
@@ -16798,7 +16713,7 @@
         <a:spcAft>
           <a:spcPts val="1000"/>
         </a:spcAft>
-        <a:buFont typeface="Arial" panose="020B0604020202020204" pitchFamily="34" charset="0"/>
+        <a:buFont typeface="Arial" panose="020B0604020202090204" pitchFamily="34" charset="0"/>
         <a:buChar char="•"/>
         <a:defRPr sz="1600" u="none" strike="noStrike" kern="1200" cap="none" spc="150" normalizeH="0" baseline="0">
           <a:solidFill>
@@ -16817,7 +16732,7 @@
         <a:spcBef>
           <a:spcPts val="500"/>
         </a:spcBef>
-        <a:buFont typeface="Arial" panose="020B0604020202020204" pitchFamily="34" charset="0"/>
+        <a:buFont typeface="Arial" panose="020B0604020202090204" pitchFamily="34" charset="0"/>
         <a:buChar char="•"/>
         <a:defRPr sz="1800" kern="1200">
           <a:solidFill>
@@ -16835,7 +16750,7 @@
         <a:spcBef>
           <a:spcPts val="500"/>
         </a:spcBef>
-        <a:buFont typeface="Arial" panose="020B0604020202020204" pitchFamily="34" charset="0"/>
+        <a:buFont typeface="Arial" panose="020B0604020202090204" pitchFamily="34" charset="0"/>
         <a:buChar char="•"/>
         <a:defRPr sz="1800" kern="1200">
           <a:solidFill>
@@ -16853,7 +16768,7 @@
         <a:spcBef>
           <a:spcPts val="500"/>
         </a:spcBef>
-        <a:buFont typeface="Arial" panose="020B0604020202020204" pitchFamily="34" charset="0"/>
+        <a:buFont typeface="Arial" panose="020B0604020202090204" pitchFamily="34" charset="0"/>
         <a:buChar char="•"/>
         <a:defRPr sz="1800" kern="1200">
           <a:solidFill>
@@ -16871,7 +16786,7 @@
         <a:spcBef>
           <a:spcPts val="500"/>
         </a:spcBef>
-        <a:buFont typeface="Arial" panose="020B0604020202020204" pitchFamily="34" charset="0"/>
+        <a:buFont typeface="Arial" panose="020B0604020202090204" pitchFamily="34" charset="0"/>
         <a:buChar char="•"/>
         <a:defRPr sz="1800" kern="1200">
           <a:solidFill>
@@ -17278,7 +17193,7 @@
         <a:spcBef>
           <a:spcPct val="20000"/>
         </a:spcBef>
-        <a:buFont typeface="Arial" panose="020B0604020202020204" pitchFamily="34" charset="0"/>
+        <a:buFont typeface="Arial" panose="020B0604020202090204" pitchFamily="34" charset="0"/>
         <a:buChar char="•"/>
         <a:defRPr sz="4300" kern="1200">
           <a:solidFill>
@@ -17293,7 +17208,7 @@
         <a:spcBef>
           <a:spcPct val="20000"/>
         </a:spcBef>
-        <a:buFont typeface="Arial" panose="020B0604020202020204" pitchFamily="34" charset="0"/>
+        <a:buFont typeface="Arial" panose="020B0604020202090204" pitchFamily="34" charset="0"/>
         <a:buChar char="–"/>
         <a:defRPr sz="3700" kern="1200">
           <a:solidFill>
@@ -17308,7 +17223,7 @@
         <a:spcBef>
           <a:spcPct val="20000"/>
         </a:spcBef>
-        <a:buFont typeface="Arial" panose="020B0604020202020204" pitchFamily="34" charset="0"/>
+        <a:buFont typeface="Arial" panose="020B0604020202090204" pitchFamily="34" charset="0"/>
         <a:buChar char="•"/>
         <a:defRPr sz="3200" kern="1200">
           <a:solidFill>
@@ -17323,7 +17238,7 @@
         <a:spcBef>
           <a:spcPct val="20000"/>
         </a:spcBef>
-        <a:buFont typeface="Arial" panose="020B0604020202020204" pitchFamily="34" charset="0"/>
+        <a:buFont typeface="Arial" panose="020B0604020202090204" pitchFamily="34" charset="0"/>
         <a:buChar char="–"/>
         <a:defRPr sz="2700" kern="1200">
           <a:solidFill>
@@ -17338,7 +17253,7 @@
         <a:spcBef>
           <a:spcPct val="20000"/>
         </a:spcBef>
-        <a:buFont typeface="Arial" panose="020B0604020202020204" pitchFamily="34" charset="0"/>
+        <a:buFont typeface="Arial" panose="020B0604020202090204" pitchFamily="34" charset="0"/>
         <a:buChar char="»"/>
         <a:defRPr sz="2700" kern="1200">
           <a:solidFill>
@@ -17353,7 +17268,7 @@
         <a:spcBef>
           <a:spcPct val="20000"/>
         </a:spcBef>
-        <a:buFont typeface="Arial" panose="020B0604020202020204" pitchFamily="34" charset="0"/>
+        <a:buFont typeface="Arial" panose="020B0604020202090204" pitchFamily="34" charset="0"/>
         <a:buChar char="•"/>
         <a:defRPr sz="2700" kern="1200">
           <a:solidFill>
@@ -17368,7 +17283,7 @@
         <a:spcBef>
           <a:spcPct val="20000"/>
         </a:spcBef>
-        <a:buFont typeface="Arial" panose="020B0604020202020204" pitchFamily="34" charset="0"/>
+        <a:buFont typeface="Arial" panose="020B0604020202090204" pitchFamily="34" charset="0"/>
         <a:buChar char="•"/>
         <a:defRPr sz="2700" kern="1200">
           <a:solidFill>
@@ -17383,7 +17298,7 @@
         <a:spcBef>
           <a:spcPct val="20000"/>
         </a:spcBef>
-        <a:buFont typeface="Arial" panose="020B0604020202020204" pitchFamily="34" charset="0"/>
+        <a:buFont typeface="Arial" panose="020B0604020202090204" pitchFamily="34" charset="0"/>
         <a:buChar char="•"/>
         <a:defRPr sz="2700" kern="1200">
           <a:solidFill>
@@ -17398,7 +17313,7 @@
         <a:spcBef>
           <a:spcPct val="20000"/>
         </a:spcBef>
-        <a:buFont typeface="Arial" panose="020B0604020202020204" pitchFamily="34" charset="0"/>
+        <a:buFont typeface="Arial" panose="020B0604020202090204" pitchFamily="34" charset="0"/>
         <a:buChar char="•"/>
         <a:defRPr sz="2700" kern="1200">
           <a:solidFill>
@@ -17599,7 +17514,7 @@
               <a:spcBef>
                 <a:spcPct val="20000"/>
               </a:spcBef>
-              <a:buFont typeface="Arial" panose="020B0604020202020204" pitchFamily="34" charset="0"/>
+              <a:buFont typeface="Arial" panose="020B0604020202090204" pitchFamily="34" charset="0"/>
               <a:buChar char="•"/>
               <a:defRPr sz="3200" kern="1200">
                 <a:solidFill>
@@ -17614,7 +17529,7 @@
               <a:spcBef>
                 <a:spcPct val="20000"/>
               </a:spcBef>
-              <a:buFont typeface="Arial" panose="020B0604020202020204" pitchFamily="34" charset="0"/>
+              <a:buFont typeface="Arial" panose="020B0604020202090204" pitchFamily="34" charset="0"/>
               <a:buChar char="–"/>
               <a:defRPr sz="2800" kern="1200">
                 <a:solidFill>
@@ -17629,7 +17544,7 @@
               <a:spcBef>
                 <a:spcPct val="20000"/>
               </a:spcBef>
-              <a:buFont typeface="Arial" panose="020B0604020202020204" pitchFamily="34" charset="0"/>
+              <a:buFont typeface="Arial" panose="020B0604020202090204" pitchFamily="34" charset="0"/>
               <a:buChar char="•"/>
               <a:defRPr sz="2400" kern="1200">
                 <a:solidFill>
@@ -17644,7 +17559,7 @@
               <a:spcBef>
                 <a:spcPct val="20000"/>
               </a:spcBef>
-              <a:buFont typeface="Arial" panose="020B0604020202020204" pitchFamily="34" charset="0"/>
+              <a:buFont typeface="Arial" panose="020B0604020202090204" pitchFamily="34" charset="0"/>
               <a:buChar char="–"/>
               <a:defRPr sz="2000" kern="1200">
                 <a:solidFill>
@@ -17659,7 +17574,7 @@
               <a:spcBef>
                 <a:spcPct val="20000"/>
               </a:spcBef>
-              <a:buFont typeface="Arial" panose="020B0604020202020204" pitchFamily="34" charset="0"/>
+              <a:buFont typeface="Arial" panose="020B0604020202090204" pitchFamily="34" charset="0"/>
               <a:buChar char="»"/>
               <a:defRPr sz="2000" kern="1200">
                 <a:solidFill>
@@ -17674,7 +17589,7 @@
               <a:spcBef>
                 <a:spcPct val="20000"/>
               </a:spcBef>
-              <a:buFont typeface="Arial" panose="020B0604020202020204" pitchFamily="34" charset="0"/>
+              <a:buFont typeface="Arial" panose="020B0604020202090204" pitchFamily="34" charset="0"/>
               <a:buChar char="•"/>
               <a:defRPr sz="2000" kern="1200">
                 <a:solidFill>
@@ -17689,7 +17604,7 @@
               <a:spcBef>
                 <a:spcPct val="20000"/>
               </a:spcBef>
-              <a:buFont typeface="Arial" panose="020B0604020202020204" pitchFamily="34" charset="0"/>
+              <a:buFont typeface="Arial" panose="020B0604020202090204" pitchFamily="34" charset="0"/>
               <a:buChar char="•"/>
               <a:defRPr sz="2000" kern="1200">
                 <a:solidFill>
@@ -17704,7 +17619,7 @@
               <a:spcBef>
                 <a:spcPct val="20000"/>
               </a:spcBef>
-              <a:buFont typeface="Arial" panose="020B0604020202020204" pitchFamily="34" charset="0"/>
+              <a:buFont typeface="Arial" panose="020B0604020202090204" pitchFamily="34" charset="0"/>
               <a:buChar char="•"/>
               <a:defRPr sz="2000" kern="1200">
                 <a:solidFill>
@@ -17719,7 +17634,7 @@
               <a:spcBef>
                 <a:spcPct val="20000"/>
               </a:spcBef>
-              <a:buFont typeface="Arial" panose="020B0604020202020204" pitchFamily="34" charset="0"/>
+              <a:buFont typeface="Arial" panose="020B0604020202090204" pitchFamily="34" charset="0"/>
               <a:buChar char="•"/>
               <a:defRPr sz="2000" kern="1200">
                 <a:solidFill>
@@ -17924,7 +17839,7 @@
                 </a:solidFill>
                 <a:latin typeface="微软雅黑" panose="020B0503020204020204" pitchFamily="34" charset="-122"/>
                 <a:ea typeface="微软雅黑" panose="020B0503020204020204" pitchFamily="34" charset="-122"/>
-                <a:cs typeface="Courier New" panose="02070309020205020404" pitchFamily="49" charset="0"/>
+                <a:cs typeface="Courier New" panose="02070409020205090404" pitchFamily="49" charset="0"/>
               </a:rPr>
               <a:t>@Param注解</a:t>
             </a:r>
@@ -17946,7 +17861,7 @@
                 </a:solidFill>
                 <a:latin typeface="微软雅黑" panose="020B0503020204020204" pitchFamily="34" charset="-122"/>
                 <a:ea typeface="微软雅黑" panose="020B0503020204020204" pitchFamily="34" charset="-122"/>
-                <a:cs typeface="Courier New" panose="02070309020205020404" pitchFamily="49" charset="0"/>
+                <a:cs typeface="Courier New" panose="02070409020205090404" pitchFamily="49" charset="0"/>
               </a:rPr>
               <a:t>方法参数</a:t>
             </a:r>
@@ -17968,7 +17883,7 @@
                 </a:solidFill>
                 <a:latin typeface="微软雅黑" panose="020B0503020204020204" pitchFamily="34" charset="-122"/>
                 <a:ea typeface="微软雅黑" panose="020B0503020204020204" pitchFamily="34" charset="-122"/>
-                <a:cs typeface="Courier New" panose="02070309020205020404" pitchFamily="49" charset="0"/>
+                <a:cs typeface="Courier New" panose="02070409020205090404" pitchFamily="49" charset="0"/>
               </a:rPr>
               <a:t>SQL语句中的占位符名称</a:t>
             </a:r>
@@ -18067,9 +17982,9 @@
                 <a:solidFill>
                   <a:schemeClr val="lt1"/>
                 </a:solidFill>
-                <a:latin typeface="Arial" panose="020B0604020202020204" pitchFamily="34" charset="0"/>
+                <a:latin typeface="Arial" panose="020B0604020202090204" pitchFamily="34" charset="0"/>
                 <a:ea typeface="思源黑体 CN Normal" panose="020B0400000000000000" pitchFamily="34" charset="-122"/>
-                <a:sym typeface="Arial" panose="020B0604020202020204" pitchFamily="34" charset="0"/>
+                <a:sym typeface="Arial" panose="020B0604020202090204" pitchFamily="34" charset="0"/>
               </a:endParaRPr>
             </a:p>
           </p:txBody>
@@ -18124,16 +18039,16 @@
             <a:p>
               <a:r>
                 <a:rPr sz="1700" dirty="0">
-                  <a:latin typeface="Arial" panose="020B0604020202020204" pitchFamily="34" charset="0"/>
+                  <a:latin typeface="Arial" panose="020B0604020202090204" pitchFamily="34" charset="0"/>
                   <a:ea typeface="思源黑体 CN Normal" panose="020B0400000000000000" pitchFamily="34" charset="-122"/>
-                  <a:sym typeface="Arial" panose="020B0604020202020204" pitchFamily="34" charset="0"/>
+                  <a:sym typeface="Arial" panose="020B0604020202090204" pitchFamily="34" charset="0"/>
                 </a:rPr>
                 <a:t>（2）@Param注解</a:t>
               </a:r>
               <a:endParaRPr sz="1700" dirty="0">
-                <a:latin typeface="Arial" panose="020B0604020202020204" pitchFamily="34" charset="0"/>
+                <a:latin typeface="Arial" panose="020B0604020202090204" pitchFamily="34" charset="0"/>
                 <a:ea typeface="思源黑体 CN Normal" panose="020B0400000000000000" pitchFamily="34" charset="-122"/>
-                <a:sym typeface="Arial" panose="020B0604020202020204" pitchFamily="34" charset="0"/>
+                <a:sym typeface="Arial" panose="020B0604020202090204" pitchFamily="34" charset="0"/>
               </a:endParaRPr>
             </a:p>
           </p:txBody>
@@ -18304,7 +18219,7 @@
                 </a:solidFill>
                 <a:latin typeface="微软雅黑" panose="020B0503020204020204" pitchFamily="34" charset="-122"/>
                 <a:ea typeface="微软雅黑" panose="020B0503020204020204" pitchFamily="34" charset="-122"/>
-                <a:cs typeface="Courier New" panose="02070309020205020404" pitchFamily="49" charset="0"/>
+                <a:cs typeface="Courier New" panose="02070409020205090404" pitchFamily="49" charset="0"/>
               </a:rPr>
               <a:t>@Update 注解</a:t>
             </a:r>
@@ -18326,7 +18241,7 @@
                 </a:solidFill>
                 <a:latin typeface="微软雅黑" panose="020B0503020204020204" pitchFamily="34" charset="-122"/>
                 <a:ea typeface="微软雅黑" panose="020B0503020204020204" pitchFamily="34" charset="-122"/>
-                <a:cs typeface="Courier New" panose="02070309020205020404" pitchFamily="49" charset="0"/>
+                <a:cs typeface="Courier New" panose="02070409020205090404" pitchFamily="49" charset="0"/>
               </a:rPr>
               <a:t>更新操作的方法</a:t>
             </a:r>
@@ -18348,7 +18263,7 @@
                 </a:solidFill>
                 <a:latin typeface="微软雅黑" panose="020B0503020204020204" pitchFamily="34" charset="-122"/>
                 <a:ea typeface="微软雅黑" panose="020B0503020204020204" pitchFamily="34" charset="-122"/>
-                <a:cs typeface="Courier New" panose="02070309020205020404" pitchFamily="49" charset="0"/>
+                <a:cs typeface="Courier New" panose="02070409020205090404" pitchFamily="49" charset="0"/>
               </a:rPr>
               <a:t> #{}占位符引用方法参数</a:t>
             </a:r>
@@ -18447,9 +18362,9 @@
                 <a:solidFill>
                   <a:schemeClr val="lt1"/>
                 </a:solidFill>
-                <a:latin typeface="Arial" panose="020B0604020202020204" pitchFamily="34" charset="0"/>
+                <a:latin typeface="Arial" panose="020B0604020202090204" pitchFamily="34" charset="0"/>
                 <a:ea typeface="思源黑体 CN Normal" panose="020B0400000000000000" pitchFamily="34" charset="-122"/>
-                <a:sym typeface="Arial" panose="020B0604020202020204" pitchFamily="34" charset="0"/>
+                <a:sym typeface="Arial" panose="020B0604020202090204" pitchFamily="34" charset="0"/>
               </a:endParaRPr>
             </a:p>
           </p:txBody>
@@ -18504,16 +18419,16 @@
             <a:p>
               <a:r>
                 <a:rPr sz="1700" dirty="0">
-                  <a:latin typeface="Arial" panose="020B0604020202020204" pitchFamily="34" charset="0"/>
+                  <a:latin typeface="Arial" panose="020B0604020202090204" pitchFamily="34" charset="0"/>
                   <a:ea typeface="思源黑体 CN Normal" panose="020B0400000000000000" pitchFamily="34" charset="-122"/>
-                  <a:sym typeface="Arial" panose="020B0604020202020204" pitchFamily="34" charset="0"/>
+                  <a:sym typeface="Arial" panose="020B0604020202090204" pitchFamily="34" charset="0"/>
                 </a:rPr>
                 <a:t>（3）@Update注解</a:t>
               </a:r>
               <a:endParaRPr sz="1700" dirty="0">
-                <a:latin typeface="Arial" panose="020B0604020202020204" pitchFamily="34" charset="0"/>
+                <a:latin typeface="Arial" panose="020B0604020202090204" pitchFamily="34" charset="0"/>
                 <a:ea typeface="思源黑体 CN Normal" panose="020B0400000000000000" pitchFamily="34" charset="-122"/>
-                <a:sym typeface="Arial" panose="020B0604020202020204" pitchFamily="34" charset="0"/>
+                <a:sym typeface="Arial" panose="020B0604020202090204" pitchFamily="34" charset="0"/>
               </a:endParaRPr>
             </a:p>
           </p:txBody>
@@ -18574,7 +18489,7 @@
               </a:solidFill>
               <a:latin typeface="微软雅黑" panose="020B0503020204020204" pitchFamily="34" charset="-122"/>
               <a:ea typeface="微软雅黑" panose="020B0503020204020204" pitchFamily="34" charset="-122"/>
-              <a:cs typeface="Courier New" panose="02070309020205020404" pitchFamily="49" charset="0"/>
+              <a:cs typeface="Courier New" panose="02070409020205090404" pitchFamily="49" charset="0"/>
               <a:sym typeface="+mn-ea"/>
             </a:endParaRPr>
           </a:p>
@@ -18612,13 +18527,13 @@
             </a:pPr>
             <a:r>
               <a:rPr sz="1800">
-                <a:latin typeface="Courier New" panose="02070309020205020404" pitchFamily="49" charset="0"/>
+                <a:latin typeface="Courier New" panose="02070409020205090404" pitchFamily="49" charset="0"/>
                 <a:sym typeface="+mn-ea"/>
               </a:rPr>
               <a:t>@Update("UPDATE users SET password=#{newPassword} WHERE id=#{id}")</a:t>
             </a:r>
             <a:endParaRPr sz="1800">
-              <a:latin typeface="Courier New" panose="02070309020205020404" pitchFamily="49" charset="0"/>
+              <a:latin typeface="Courier New" panose="02070409020205090404" pitchFamily="49" charset="0"/>
               <a:sym typeface="+mn-ea"/>
             </a:endParaRPr>
           </a:p>
@@ -18631,13 +18546,13 @@
             </a:pPr>
             <a:r>
               <a:rPr sz="1800">
-                <a:latin typeface="Courier New" panose="02070309020205020404" pitchFamily="49" charset="0"/>
+                <a:latin typeface="Courier New" panose="02070409020205090404" pitchFamily="49" charset="0"/>
                 <a:sym typeface="+mn-ea"/>
               </a:rPr>
               <a:t>void updateUserPassword(@Param("id") int userId,</a:t>
             </a:r>
             <a:endParaRPr sz="1800">
-              <a:latin typeface="Courier New" panose="02070309020205020404" pitchFamily="49" charset="0"/>
+              <a:latin typeface="Courier New" panose="02070409020205090404" pitchFamily="49" charset="0"/>
               <a:sym typeface="+mn-ea"/>
             </a:endParaRPr>
           </a:p>
@@ -18650,13 +18565,13 @@
             </a:pPr>
             <a:r>
               <a:rPr sz="1800">
-                <a:latin typeface="Courier New" panose="02070309020205020404" pitchFamily="49" charset="0"/>
+                <a:latin typeface="Courier New" panose="02070409020205090404" pitchFamily="49" charset="0"/>
                 <a:sym typeface="+mn-ea"/>
               </a:rPr>
               <a:t>      @Param("newPassword") String newPassword);</a:t>
             </a:r>
             <a:endParaRPr sz="1800">
-              <a:latin typeface="Courier New" panose="02070309020205020404" pitchFamily="49" charset="0"/>
+              <a:latin typeface="Courier New" panose="02070409020205090404" pitchFamily="49" charset="0"/>
               <a:sym typeface="+mn-ea"/>
             </a:endParaRPr>
           </a:p>
@@ -18827,7 +18742,7 @@
                 </a:solidFill>
                 <a:latin typeface="微软雅黑" panose="020B0503020204020204" pitchFamily="34" charset="-122"/>
                 <a:ea typeface="微软雅黑" panose="020B0503020204020204" pitchFamily="34" charset="-122"/>
-                <a:cs typeface="Courier New" panose="02070309020205020404" pitchFamily="49" charset="0"/>
+                <a:cs typeface="Courier New" panose="02070409020205090404" pitchFamily="49" charset="0"/>
               </a:rPr>
               <a:t>@Delete注解</a:t>
             </a:r>
@@ -18849,7 +18764,7 @@
                 </a:solidFill>
                 <a:latin typeface="微软雅黑" panose="020B0503020204020204" pitchFamily="34" charset="-122"/>
                 <a:ea typeface="微软雅黑" panose="020B0503020204020204" pitchFamily="34" charset="-122"/>
-                <a:cs typeface="Courier New" panose="02070309020205020404" pitchFamily="49" charset="0"/>
+                <a:cs typeface="Courier New" panose="02070409020205090404" pitchFamily="49" charset="0"/>
               </a:rPr>
               <a:t>删除操作的方法</a:t>
             </a:r>
@@ -18948,9 +18863,9 @@
                 <a:solidFill>
                   <a:schemeClr val="lt1"/>
                 </a:solidFill>
-                <a:latin typeface="Arial" panose="020B0604020202020204" pitchFamily="34" charset="0"/>
+                <a:latin typeface="Arial" panose="020B0604020202090204" pitchFamily="34" charset="0"/>
                 <a:ea typeface="思源黑体 CN Normal" panose="020B0400000000000000" pitchFamily="34" charset="-122"/>
-                <a:sym typeface="Arial" panose="020B0604020202020204" pitchFamily="34" charset="0"/>
+                <a:sym typeface="Arial" panose="020B0604020202090204" pitchFamily="34" charset="0"/>
               </a:endParaRPr>
             </a:p>
           </p:txBody>
@@ -19005,16 +18920,16 @@
             <a:p>
               <a:r>
                 <a:rPr sz="1700" dirty="0">
-                  <a:latin typeface="Arial" panose="020B0604020202020204" pitchFamily="34" charset="0"/>
+                  <a:latin typeface="Arial" panose="020B0604020202090204" pitchFamily="34" charset="0"/>
                   <a:ea typeface="思源黑体 CN Normal" panose="020B0400000000000000" pitchFamily="34" charset="-122"/>
-                  <a:sym typeface="Arial" panose="020B0604020202020204" pitchFamily="34" charset="0"/>
+                  <a:sym typeface="Arial" panose="020B0604020202090204" pitchFamily="34" charset="0"/>
                 </a:rPr>
                 <a:t>（4）@Delete注解</a:t>
               </a:r>
               <a:endParaRPr sz="1700" dirty="0">
-                <a:latin typeface="Arial" panose="020B0604020202020204" pitchFamily="34" charset="0"/>
+                <a:latin typeface="Arial" panose="020B0604020202090204" pitchFamily="34" charset="0"/>
                 <a:ea typeface="思源黑体 CN Normal" panose="020B0400000000000000" pitchFamily="34" charset="-122"/>
-                <a:sym typeface="Arial" panose="020B0604020202020204" pitchFamily="34" charset="0"/>
+                <a:sym typeface="Arial" panose="020B0604020202090204" pitchFamily="34" charset="0"/>
               </a:endParaRPr>
             </a:p>
           </p:txBody>
@@ -19075,7 +18990,7 @@
               </a:solidFill>
               <a:latin typeface="微软雅黑" panose="020B0503020204020204" pitchFamily="34" charset="-122"/>
               <a:ea typeface="微软雅黑" panose="020B0503020204020204" pitchFamily="34" charset="-122"/>
-              <a:cs typeface="Courier New" panose="02070309020205020404" pitchFamily="49" charset="0"/>
+              <a:cs typeface="Courier New" panose="02070409020205090404" pitchFamily="49" charset="0"/>
               <a:sym typeface="+mn-ea"/>
             </a:endParaRPr>
           </a:p>
@@ -19113,13 +19028,13 @@
             </a:pPr>
             <a:r>
               <a:rPr sz="1800">
-                <a:latin typeface="Courier New" panose="02070309020205020404" pitchFamily="49" charset="0"/>
+                <a:latin typeface="Courier New" panose="02070409020205090404" pitchFamily="49" charset="0"/>
                 <a:sym typeface="+mn-ea"/>
               </a:rPr>
               <a:t>@Delete("DELETE FROM users WHERE id=#{id}")</a:t>
             </a:r>
             <a:endParaRPr sz="1800">
-              <a:latin typeface="Courier New" panose="02070309020205020404" pitchFamily="49" charset="0"/>
+              <a:latin typeface="Courier New" panose="02070409020205090404" pitchFamily="49" charset="0"/>
               <a:sym typeface="+mn-ea"/>
             </a:endParaRPr>
           </a:p>
@@ -19132,13 +19047,13 @@
             </a:pPr>
             <a:r>
               <a:rPr sz="1800">
-                <a:latin typeface="Courier New" panose="02070309020205020404" pitchFamily="49" charset="0"/>
+                <a:latin typeface="Courier New" panose="02070409020205090404" pitchFamily="49" charset="0"/>
                 <a:sym typeface="+mn-ea"/>
               </a:rPr>
               <a:t>void deleteUser(@Param("id") int userId);</a:t>
             </a:r>
             <a:endParaRPr sz="1800">
-              <a:latin typeface="Courier New" panose="02070309020205020404" pitchFamily="49" charset="0"/>
+              <a:latin typeface="Courier New" panose="02070409020205090404" pitchFamily="49" charset="0"/>
               <a:sym typeface="+mn-ea"/>
             </a:endParaRPr>
           </a:p>
@@ -19309,7 +19224,7 @@
                 </a:solidFill>
                 <a:latin typeface="微软雅黑" panose="020B0503020204020204" pitchFamily="34" charset="-122"/>
                 <a:ea typeface="微软雅黑" panose="020B0503020204020204" pitchFamily="34" charset="-122"/>
-                <a:cs typeface="Courier New" panose="02070309020205020404" pitchFamily="49" charset="0"/>
+                <a:cs typeface="Courier New" panose="02070409020205090404" pitchFamily="49" charset="0"/>
               </a:rPr>
               <a:t>@Select 注解</a:t>
             </a:r>
@@ -19331,7 +19246,7 @@
                 </a:solidFill>
                 <a:latin typeface="微软雅黑" panose="020B0503020204020204" pitchFamily="34" charset="-122"/>
                 <a:ea typeface="微软雅黑" panose="020B0503020204020204" pitchFamily="34" charset="-122"/>
-                <a:cs typeface="Courier New" panose="02070309020205020404" pitchFamily="49" charset="0"/>
+                <a:cs typeface="Courier New" panose="02070409020205090404" pitchFamily="49" charset="0"/>
               </a:rPr>
               <a:t>查询操作的方法</a:t>
             </a:r>
@@ -19430,9 +19345,9 @@
                 <a:solidFill>
                   <a:schemeClr val="lt1"/>
                 </a:solidFill>
-                <a:latin typeface="Arial" panose="020B0604020202020204" pitchFamily="34" charset="0"/>
+                <a:latin typeface="Arial" panose="020B0604020202090204" pitchFamily="34" charset="0"/>
                 <a:ea typeface="思源黑体 CN Normal" panose="020B0400000000000000" pitchFamily="34" charset="-122"/>
-                <a:sym typeface="Arial" panose="020B0604020202020204" pitchFamily="34" charset="0"/>
+                <a:sym typeface="Arial" panose="020B0604020202090204" pitchFamily="34" charset="0"/>
               </a:endParaRPr>
             </a:p>
           </p:txBody>
@@ -19487,16 +19402,16 @@
             <a:p>
               <a:r>
                 <a:rPr sz="1700" dirty="0">
-                  <a:latin typeface="Arial" panose="020B0604020202020204" pitchFamily="34" charset="0"/>
+                  <a:latin typeface="Arial" panose="020B0604020202090204" pitchFamily="34" charset="0"/>
                   <a:ea typeface="思源黑体 CN Normal" panose="020B0400000000000000" pitchFamily="34" charset="-122"/>
-                  <a:sym typeface="Arial" panose="020B0604020202020204" pitchFamily="34" charset="0"/>
+                  <a:sym typeface="Arial" panose="020B0604020202090204" pitchFamily="34" charset="0"/>
                 </a:rPr>
                 <a:t>（5）@Select注解</a:t>
               </a:r>
               <a:endParaRPr sz="1700" dirty="0">
-                <a:latin typeface="Arial" panose="020B0604020202020204" pitchFamily="34" charset="0"/>
+                <a:latin typeface="Arial" panose="020B0604020202090204" pitchFamily="34" charset="0"/>
                 <a:ea typeface="思源黑体 CN Normal" panose="020B0400000000000000" pitchFamily="34" charset="-122"/>
-                <a:sym typeface="Arial" panose="020B0604020202020204" pitchFamily="34" charset="0"/>
+                <a:sym typeface="Arial" panose="020B0604020202090204" pitchFamily="34" charset="0"/>
               </a:endParaRPr>
             </a:p>
           </p:txBody>
@@ -19557,7 +19472,7 @@
               </a:solidFill>
               <a:latin typeface="微软雅黑" panose="020B0503020204020204" pitchFamily="34" charset="-122"/>
               <a:ea typeface="微软雅黑" panose="020B0503020204020204" pitchFamily="34" charset="-122"/>
-              <a:cs typeface="Courier New" panose="02070309020205020404" pitchFamily="49" charset="0"/>
+              <a:cs typeface="Courier New" panose="02070409020205090404" pitchFamily="49" charset="0"/>
               <a:sym typeface="+mn-ea"/>
             </a:endParaRPr>
           </a:p>
@@ -19595,13 +19510,13 @@
             </a:pPr>
             <a:r>
               <a:rPr sz="1800">
-                <a:latin typeface="Courier New" panose="02070309020205020404" pitchFamily="49" charset="0"/>
+                <a:latin typeface="Courier New" panose="02070409020205090404" pitchFamily="49" charset="0"/>
                 <a:sym typeface="+mn-ea"/>
               </a:rPr>
               <a:t>@Select("SELECT * FROM users WHERE id=#{id}")</a:t>
             </a:r>
             <a:endParaRPr sz="1800">
-              <a:latin typeface="Courier New" panose="02070309020205020404" pitchFamily="49" charset="0"/>
+              <a:latin typeface="Courier New" panose="02070409020205090404" pitchFamily="49" charset="0"/>
               <a:sym typeface="+mn-ea"/>
             </a:endParaRPr>
           </a:p>
@@ -19614,13 +19529,13 @@
             </a:pPr>
             <a:r>
               <a:rPr sz="1800">
-                <a:latin typeface="Courier New" panose="02070309020205020404" pitchFamily="49" charset="0"/>
+                <a:latin typeface="Courier New" panose="02070409020205090404" pitchFamily="49" charset="0"/>
                 <a:sym typeface="+mn-ea"/>
               </a:rPr>
               <a:t>User getUserById(@Param("id") int userId);</a:t>
             </a:r>
             <a:endParaRPr sz="1800">
-              <a:latin typeface="Courier New" panose="02070309020205020404" pitchFamily="49" charset="0"/>
+              <a:latin typeface="Courier New" panose="02070409020205090404" pitchFamily="49" charset="0"/>
               <a:sym typeface="+mn-ea"/>
             </a:endParaRPr>
           </a:p>
@@ -19842,7 +19757,7 @@
                 </a:solidFill>
                 <a:latin typeface="微软雅黑" panose="020B0503020204020204" pitchFamily="34" charset="-122"/>
                 <a:ea typeface="微软雅黑" panose="020B0503020204020204" pitchFamily="34" charset="-122"/>
-                <a:cs typeface="Courier New" panose="02070309020205020404" pitchFamily="49" charset="0"/>
+                <a:cs typeface="Courier New" panose="02070409020205090404" pitchFamily="49" charset="0"/>
               </a:rPr>
               <a:t>结果</a:t>
             </a:r>
@@ -19853,7 +19768,7 @@
                 </a:solidFill>
                 <a:latin typeface="微软雅黑" panose="020B0503020204020204" pitchFamily="34" charset="-122"/>
                 <a:ea typeface="微软雅黑" panose="020B0503020204020204" pitchFamily="34" charset="-122"/>
-                <a:cs typeface="Courier New" panose="02070309020205020404" pitchFamily="49" charset="0"/>
+                <a:cs typeface="Courier New" panose="02070409020205090404" pitchFamily="49" charset="0"/>
               </a:rPr>
               <a:t>集</a:t>
             </a:r>
@@ -19864,7 +19779,7 @@
                 </a:solidFill>
                 <a:latin typeface="微软雅黑" panose="020B0503020204020204" pitchFamily="34" charset="-122"/>
                 <a:ea typeface="微软雅黑" panose="020B0503020204020204" pitchFamily="34" charset="-122"/>
-                <a:cs typeface="Courier New" panose="02070309020205020404" pitchFamily="49" charset="0"/>
+                <a:cs typeface="Courier New" panose="02070409020205090404" pitchFamily="49" charset="0"/>
               </a:rPr>
               <a:t>映射注解</a:t>
             </a:r>
@@ -19886,7 +19801,7 @@
                 </a:solidFill>
                 <a:latin typeface="微软雅黑" panose="020B0503020204020204" pitchFamily="34" charset="-122"/>
                 <a:ea typeface="微软雅黑" panose="020B0503020204020204" pitchFamily="34" charset="-122"/>
-                <a:cs typeface="Courier New" panose="02070309020205020404" pitchFamily="49" charset="0"/>
+                <a:cs typeface="Courier New" panose="02070409020205090404" pitchFamily="49" charset="0"/>
               </a:rPr>
               <a:t>查询结果映射到Java对象的注解</a:t>
             </a:r>
@@ -19908,7 +19823,7 @@
                 </a:solidFill>
                 <a:latin typeface="微软雅黑" panose="020B0503020204020204" pitchFamily="34" charset="-122"/>
                 <a:ea typeface="微软雅黑" panose="020B0503020204020204" pitchFamily="34" charset="-122"/>
-                <a:cs typeface="Courier New" panose="02070309020205020404" pitchFamily="49" charset="0"/>
+                <a:cs typeface="Courier New" panose="02070409020205090404" pitchFamily="49" charset="0"/>
               </a:rPr>
               <a:t>@Results</a:t>
             </a:r>
@@ -19930,7 +19845,7 @@
                 </a:solidFill>
                 <a:latin typeface="微软雅黑" panose="020B0503020204020204" pitchFamily="34" charset="-122"/>
                 <a:ea typeface="微软雅黑" panose="020B0503020204020204" pitchFamily="34" charset="-122"/>
-                <a:cs typeface="Courier New" panose="02070309020205020404" pitchFamily="49" charset="0"/>
+                <a:cs typeface="Courier New" panose="02070409020205090404" pitchFamily="49" charset="0"/>
               </a:rPr>
               <a:t>@Result注解</a:t>
             </a:r>
@@ -19952,7 +19867,7 @@
                 </a:solidFill>
                 <a:latin typeface="微软雅黑" panose="020B0503020204020204" pitchFamily="34" charset="-122"/>
                 <a:ea typeface="微软雅黑" panose="020B0503020204020204" pitchFamily="34" charset="-122"/>
-                <a:cs typeface="Courier New" panose="02070309020205020404" pitchFamily="49" charset="0"/>
+                <a:cs typeface="Courier New" panose="02070409020205090404" pitchFamily="49" charset="0"/>
               </a:rPr>
               <a:t>结果映射</a:t>
             </a:r>
@@ -19974,7 +19889,7 @@
                 </a:solidFill>
                 <a:latin typeface="微软雅黑" panose="020B0503020204020204" pitchFamily="34" charset="-122"/>
                 <a:ea typeface="微软雅黑" panose="020B0503020204020204" pitchFamily="34" charset="-122"/>
-                <a:cs typeface="Courier New" panose="02070309020205020404" pitchFamily="49" charset="0"/>
+                <a:cs typeface="Courier New" panose="02070409020205090404" pitchFamily="49" charset="0"/>
               </a:rPr>
               <a:t>多个结果映射规则</a:t>
             </a:r>
@@ -19996,7 +19911,7 @@
                 </a:solidFill>
                 <a:latin typeface="微软雅黑" panose="020B0503020204020204" pitchFamily="34" charset="-122"/>
                 <a:ea typeface="微软雅黑" panose="020B0503020204020204" pitchFamily="34" charset="-122"/>
-                <a:cs typeface="Courier New" panose="02070309020205020404" pitchFamily="49" charset="0"/>
+                <a:cs typeface="Courier New" panose="02070409020205090404" pitchFamily="49" charset="0"/>
               </a:rPr>
               <a:t>多个 @Result 注解</a:t>
             </a:r>
@@ -20018,7 +19933,7 @@
                 </a:solidFill>
                 <a:latin typeface="微软雅黑" panose="020B0503020204020204" pitchFamily="34" charset="-122"/>
                 <a:ea typeface="微软雅黑" panose="020B0503020204020204" pitchFamily="34" charset="-122"/>
-                <a:cs typeface="Courier New" panose="02070309020205020404" pitchFamily="49" charset="0"/>
+                <a:cs typeface="Courier New" panose="02070409020205090404" pitchFamily="49" charset="0"/>
               </a:rPr>
               <a:t>义单个Java对象属性与数据表字段的映射关系</a:t>
             </a:r>
@@ -20058,7 +19973,7 @@
                 </a:solidFill>
                 <a:latin typeface="微软雅黑" panose="020B0503020204020204" pitchFamily="34" charset="-122"/>
                 <a:ea typeface="微软雅黑" panose="020B0503020204020204" pitchFamily="34" charset="-122"/>
-                <a:cs typeface="Courier New" panose="02070309020205020404" pitchFamily="49" charset="0"/>
+                <a:cs typeface="Courier New" panose="02070409020205090404" pitchFamily="49" charset="0"/>
               </a:rPr>
               <a:t>@Result 注解</a:t>
             </a:r>
@@ -20080,7 +19995,7 @@
                 </a:solidFill>
                 <a:latin typeface="微软雅黑" panose="020B0503020204020204" pitchFamily="34" charset="-122"/>
                 <a:ea typeface="微软雅黑" panose="020B0503020204020204" pitchFamily="34" charset="-122"/>
-                <a:cs typeface="Courier New" panose="02070309020205020404" pitchFamily="49" charset="0"/>
+                <a:cs typeface="Courier New" panose="02070409020205090404" pitchFamily="49" charset="0"/>
               </a:rPr>
               <a:t>属性</a:t>
             </a:r>
@@ -20131,7 +20046,7 @@
                 </a:solidFill>
                 <a:latin typeface="微软雅黑" panose="020B0503020204020204" pitchFamily="34" charset="-122"/>
                 <a:ea typeface="微软雅黑" panose="020B0503020204020204" pitchFamily="34" charset="-122"/>
-                <a:cs typeface="Courier New" panose="02070309020205020404" pitchFamily="49" charset="0"/>
+                <a:cs typeface="Courier New" panose="02070409020205090404" pitchFamily="49" charset="0"/>
               </a:rPr>
               <a:t>属性名</a:t>
             </a:r>
@@ -20182,7 +20097,7 @@
                 </a:solidFill>
                 <a:latin typeface="微软雅黑" panose="020B0503020204020204" pitchFamily="34" charset="-122"/>
                 <a:ea typeface="微软雅黑" panose="020B0503020204020204" pitchFamily="34" charset="-122"/>
-                <a:cs typeface="Courier New" panose="02070309020205020404" pitchFamily="49" charset="0"/>
+                <a:cs typeface="Courier New" panose="02070409020205090404" pitchFamily="49" charset="0"/>
               </a:rPr>
               <a:t>字段名</a:t>
             </a:r>
@@ -20233,7 +20148,7 @@
                 </a:solidFill>
                 <a:latin typeface="微软雅黑" panose="020B0503020204020204" pitchFamily="34" charset="-122"/>
                 <a:ea typeface="微软雅黑" panose="020B0503020204020204" pitchFamily="34" charset="-122"/>
-                <a:cs typeface="Courier New" panose="02070309020205020404" pitchFamily="49" charset="0"/>
+                <a:cs typeface="Courier New" panose="02070409020205090404" pitchFamily="49" charset="0"/>
               </a:rPr>
               <a:t>一对一关联关系</a:t>
             </a:r>
@@ -20255,7 +20170,7 @@
                 </a:solidFill>
                 <a:latin typeface="微软雅黑" panose="020B0503020204020204" pitchFamily="34" charset="-122"/>
                 <a:ea typeface="微软雅黑" panose="020B0503020204020204" pitchFamily="34" charset="-122"/>
-                <a:cs typeface="Courier New" panose="02070309020205020404" pitchFamily="49" charset="0"/>
+                <a:cs typeface="Courier New" panose="02070409020205090404" pitchFamily="49" charset="0"/>
               </a:rPr>
               <a:t>@One注解</a:t>
             </a:r>
@@ -20306,7 +20221,7 @@
                 </a:solidFill>
                 <a:latin typeface="微软雅黑" panose="020B0503020204020204" pitchFamily="34" charset="-122"/>
                 <a:ea typeface="微软雅黑" panose="020B0503020204020204" pitchFamily="34" charset="-122"/>
-                <a:cs typeface="Courier New" panose="02070309020205020404" pitchFamily="49" charset="0"/>
+                <a:cs typeface="Courier New" panose="02070409020205090404" pitchFamily="49" charset="0"/>
               </a:rPr>
               <a:t>一对多关联关系</a:t>
             </a:r>
@@ -20328,7 +20243,7 @@
                 </a:solidFill>
                 <a:latin typeface="微软雅黑" panose="020B0503020204020204" pitchFamily="34" charset="-122"/>
                 <a:ea typeface="微软雅黑" panose="020B0503020204020204" pitchFamily="34" charset="-122"/>
-                <a:cs typeface="Courier New" panose="02070309020205020404" pitchFamily="49" charset="0"/>
+                <a:cs typeface="Courier New" panose="02070409020205090404" pitchFamily="49" charset="0"/>
               </a:rPr>
               <a:t>@Many 注解</a:t>
             </a:r>
@@ -20589,7 +20504,7 @@
               </a:solidFill>
               <a:latin typeface="微软雅黑" panose="020B0503020204020204" pitchFamily="34" charset="-122"/>
               <a:ea typeface="微软雅黑" panose="020B0503020204020204" pitchFamily="34" charset="-122"/>
-              <a:cs typeface="Courier New" panose="02070309020205020404" pitchFamily="49" charset="0"/>
+              <a:cs typeface="Courier New" panose="02070409020205090404" pitchFamily="49" charset="0"/>
               <a:sym typeface="+mn-ea"/>
             </a:endParaRPr>
           </a:p>
@@ -20627,13 +20542,13 @@
             </a:pPr>
             <a:r>
               <a:rPr sz="1800">
-                <a:latin typeface="Courier New" panose="02070309020205020404" pitchFamily="49" charset="0"/>
+                <a:latin typeface="Courier New" panose="02070409020205090404" pitchFamily="49" charset="0"/>
                 <a:sym typeface="+mn-ea"/>
               </a:rPr>
               <a:t>@Select("SELECT * FROM users WHERE id=#{id}")</a:t>
             </a:r>
             <a:endParaRPr sz="1800">
-              <a:latin typeface="Courier New" panose="02070309020205020404" pitchFamily="49" charset="0"/>
+              <a:latin typeface="Courier New" panose="02070409020205090404" pitchFamily="49" charset="0"/>
               <a:sym typeface="+mn-ea"/>
             </a:endParaRPr>
           </a:p>
@@ -20646,13 +20561,13 @@
             </a:pPr>
             <a:r>
               <a:rPr sz="1800">
-                <a:latin typeface="Courier New" panose="02070309020205020404" pitchFamily="49" charset="0"/>
+                <a:latin typeface="Courier New" panose="02070409020205090404" pitchFamily="49" charset="0"/>
                 <a:sym typeface="+mn-ea"/>
               </a:rPr>
               <a:t>@Results({</a:t>
             </a:r>
             <a:endParaRPr sz="1800">
-              <a:latin typeface="Courier New" panose="02070309020205020404" pitchFamily="49" charset="0"/>
+              <a:latin typeface="Courier New" panose="02070409020205090404" pitchFamily="49" charset="0"/>
               <a:sym typeface="+mn-ea"/>
             </a:endParaRPr>
           </a:p>
@@ -20665,13 +20580,13 @@
             </a:pPr>
             <a:r>
               <a:rPr sz="1800">
-                <a:latin typeface="Courier New" panose="02070309020205020404" pitchFamily="49" charset="0"/>
+                <a:latin typeface="Courier New" panose="02070409020205090404" pitchFamily="49" charset="0"/>
                 <a:sym typeface="+mn-ea"/>
               </a:rPr>
               <a:t>    @Result(property = "id", column = "id"),</a:t>
             </a:r>
             <a:endParaRPr sz="1800">
-              <a:latin typeface="Courier New" panose="02070309020205020404" pitchFamily="49" charset="0"/>
+              <a:latin typeface="Courier New" panose="02070409020205090404" pitchFamily="49" charset="0"/>
               <a:sym typeface="+mn-ea"/>
             </a:endParaRPr>
           </a:p>
@@ -20684,13 +20599,13 @@
             </a:pPr>
             <a:r>
               <a:rPr sz="1800">
-                <a:latin typeface="Courier New" panose="02070309020205020404" pitchFamily="49" charset="0"/>
+                <a:latin typeface="Courier New" panose="02070409020205090404" pitchFamily="49" charset="0"/>
                 <a:sym typeface="+mn-ea"/>
               </a:rPr>
               <a:t>    @Result(property = "username", column = "username"),</a:t>
             </a:r>
             <a:endParaRPr sz="1800">
-              <a:latin typeface="Courier New" panose="02070309020205020404" pitchFamily="49" charset="0"/>
+              <a:latin typeface="Courier New" panose="02070409020205090404" pitchFamily="49" charset="0"/>
               <a:sym typeface="+mn-ea"/>
             </a:endParaRPr>
           </a:p>
@@ -20703,13 +20618,13 @@
             </a:pPr>
             <a:r>
               <a:rPr sz="1800">
-                <a:latin typeface="Courier New" panose="02070309020205020404" pitchFamily="49" charset="0"/>
+                <a:latin typeface="Courier New" panose="02070409020205090404" pitchFamily="49" charset="0"/>
                 <a:sym typeface="+mn-ea"/>
               </a:rPr>
               <a:t>    @Result(property = "password", column = "password"),</a:t>
             </a:r>
             <a:endParaRPr sz="1800">
-              <a:latin typeface="Courier New" panose="02070309020205020404" pitchFamily="49" charset="0"/>
+              <a:latin typeface="Courier New" panose="02070409020205090404" pitchFamily="49" charset="0"/>
               <a:sym typeface="+mn-ea"/>
             </a:endParaRPr>
           </a:p>
@@ -20722,13 +20637,13 @@
             </a:pPr>
             <a:r>
               <a:rPr sz="1800">
-                <a:latin typeface="Courier New" panose="02070309020205020404" pitchFamily="49" charset="0"/>
+                <a:latin typeface="Courier New" panose="02070409020205090404" pitchFamily="49" charset="0"/>
                 <a:sym typeface="+mn-ea"/>
               </a:rPr>
               <a:t>    @Result(property = "email", column = "email")</a:t>
             </a:r>
             <a:endParaRPr sz="1800">
-              <a:latin typeface="Courier New" panose="02070309020205020404" pitchFamily="49" charset="0"/>
+              <a:latin typeface="Courier New" panose="02070409020205090404" pitchFamily="49" charset="0"/>
               <a:sym typeface="+mn-ea"/>
             </a:endParaRPr>
           </a:p>
@@ -20741,13 +20656,13 @@
             </a:pPr>
             <a:r>
               <a:rPr sz="1800">
-                <a:latin typeface="Courier New" panose="02070309020205020404" pitchFamily="49" charset="0"/>
+                <a:latin typeface="Courier New" panose="02070409020205090404" pitchFamily="49" charset="0"/>
                 <a:sym typeface="+mn-ea"/>
               </a:rPr>
               <a:t>})</a:t>
             </a:r>
             <a:endParaRPr sz="1800">
-              <a:latin typeface="Courier New" panose="02070309020205020404" pitchFamily="49" charset="0"/>
+              <a:latin typeface="Courier New" panose="02070409020205090404" pitchFamily="49" charset="0"/>
               <a:sym typeface="+mn-ea"/>
             </a:endParaRPr>
           </a:p>
@@ -20760,13 +20675,13 @@
             </a:pPr>
             <a:r>
               <a:rPr sz="1800">
-                <a:latin typeface="Courier New" panose="02070309020205020404" pitchFamily="49" charset="0"/>
+                <a:latin typeface="Courier New" panose="02070409020205090404" pitchFamily="49" charset="0"/>
                 <a:sym typeface="+mn-ea"/>
               </a:rPr>
               <a:t>User getUserById(@Param("id") int userId);</a:t>
             </a:r>
             <a:endParaRPr sz="1800">
-              <a:latin typeface="Courier New" panose="02070309020205020404" pitchFamily="49" charset="0"/>
+              <a:latin typeface="Courier New" panose="02070409020205090404" pitchFamily="49" charset="0"/>
               <a:sym typeface="+mn-ea"/>
             </a:endParaRPr>
           </a:p>
@@ -20988,7 +20903,7 @@
                 </a:solidFill>
                 <a:latin typeface="微软雅黑" panose="020B0503020204020204" pitchFamily="34" charset="-122"/>
                 <a:ea typeface="微软雅黑" panose="020B0503020204020204" pitchFamily="34" charset="-122"/>
-                <a:cs typeface="Courier New" panose="02070309020205020404" pitchFamily="49" charset="0"/>
+                <a:cs typeface="Courier New" panose="02070409020205090404" pitchFamily="49" charset="0"/>
               </a:rPr>
               <a:t>@Options注解</a:t>
             </a:r>
@@ -21010,7 +20925,7 @@
                 </a:solidFill>
                 <a:latin typeface="微软雅黑" panose="020B0503020204020204" pitchFamily="34" charset="-122"/>
                 <a:ea typeface="微软雅黑" panose="020B0503020204020204" pitchFamily="34" charset="-122"/>
-                <a:cs typeface="Courier New" panose="02070309020205020404" pitchFamily="49" charset="0"/>
+                <a:cs typeface="Courier New" panose="02070409020205090404" pitchFamily="49" charset="0"/>
               </a:rPr>
               <a:t>配置</a:t>
             </a:r>
@@ -21032,7 +20947,7 @@
                 </a:solidFill>
                 <a:latin typeface="微软雅黑" panose="020B0503020204020204" pitchFamily="34" charset="-122"/>
                 <a:ea typeface="微软雅黑" panose="020B0503020204020204" pitchFamily="34" charset="-122"/>
-                <a:cs typeface="Courier New" panose="02070309020205020404" pitchFamily="49" charset="0"/>
+                <a:cs typeface="Courier New" panose="02070409020205090404" pitchFamily="49" charset="0"/>
               </a:rPr>
               <a:t>高级选项的注解</a:t>
             </a:r>
@@ -21054,7 +20969,7 @@
                 </a:solidFill>
                 <a:latin typeface="微软雅黑" panose="020B0503020204020204" pitchFamily="34" charset="-122"/>
                 <a:ea typeface="微软雅黑" panose="020B0503020204020204" pitchFamily="34" charset="-122"/>
-                <a:cs typeface="Courier New" panose="02070309020205020404" pitchFamily="49" charset="0"/>
+                <a:cs typeface="Courier New" panose="02070409020205090404" pitchFamily="49" charset="0"/>
               </a:rPr>
               <a:t>常见的配置</a:t>
             </a:r>
@@ -21105,7 +21020,7 @@
                 </a:solidFill>
                 <a:latin typeface="微软雅黑" panose="020B0503020204020204" pitchFamily="34" charset="-122"/>
                 <a:ea typeface="微软雅黑" panose="020B0503020204020204" pitchFamily="34" charset="-122"/>
-                <a:cs typeface="Courier New" panose="02070309020205020404" pitchFamily="49" charset="0"/>
+                <a:cs typeface="Courier New" panose="02070409020205090404" pitchFamily="49" charset="0"/>
               </a:rPr>
               <a:t>是否使用自动生成的主键</a:t>
             </a:r>
@@ -21156,7 +21071,7 @@
                 </a:solidFill>
                 <a:latin typeface="微软雅黑" panose="020B0503020204020204" pitchFamily="34" charset="-122"/>
                 <a:ea typeface="微软雅黑" panose="020B0503020204020204" pitchFamily="34" charset="-122"/>
-                <a:cs typeface="Courier New" panose="02070309020205020404" pitchFamily="49" charset="0"/>
+                <a:cs typeface="Courier New" panose="02070409020205090404" pitchFamily="49" charset="0"/>
               </a:rPr>
               <a:t>生成的键</a:t>
             </a:r>
@@ -21178,7 +21093,7 @@
                 </a:solidFill>
                 <a:latin typeface="微软雅黑" panose="020B0503020204020204" pitchFamily="34" charset="-122"/>
                 <a:ea typeface="微软雅黑" panose="020B0503020204020204" pitchFamily="34" charset="-122"/>
-                <a:cs typeface="Courier New" panose="02070309020205020404" pitchFamily="49" charset="0"/>
+                <a:cs typeface="Courier New" panose="02070409020205090404" pitchFamily="49" charset="0"/>
               </a:rPr>
               <a:t>设置到哪个属性上</a:t>
             </a:r>
@@ -21229,7 +21144,7 @@
                 </a:solidFill>
                 <a:latin typeface="微软雅黑" panose="020B0503020204020204" pitchFamily="34" charset="-122"/>
                 <a:ea typeface="微软雅黑" panose="020B0503020204020204" pitchFamily="34" charset="-122"/>
-                <a:cs typeface="Courier New" panose="02070309020205020404" pitchFamily="49" charset="0"/>
+                <a:cs typeface="Courier New" panose="02070409020205090404" pitchFamily="49" charset="0"/>
               </a:rPr>
               <a:t>超时时间</a:t>
             </a:r>
@@ -21280,7 +21195,7 @@
                 </a:solidFill>
                 <a:latin typeface="微软雅黑" panose="020B0503020204020204" pitchFamily="34" charset="-122"/>
                 <a:ea typeface="微软雅黑" panose="020B0503020204020204" pitchFamily="34" charset="-122"/>
-                <a:cs typeface="Courier New" panose="02070309020205020404" pitchFamily="49" charset="0"/>
+                <a:cs typeface="Courier New" panose="02070409020205090404" pitchFamily="49" charset="0"/>
               </a:rPr>
               <a:t>刷新缓存</a:t>
             </a:r>
@@ -21471,7 +21386,7 @@
                 </a:solidFill>
                 <a:latin typeface="微软雅黑" panose="020B0503020204020204" pitchFamily="34" charset="-122"/>
                 <a:ea typeface="微软雅黑" panose="020B0503020204020204" pitchFamily="34" charset="-122"/>
-                <a:cs typeface="Courier New" panose="02070309020205020404" pitchFamily="49" charset="0"/>
+                <a:cs typeface="Courier New" panose="02070409020205090404" pitchFamily="49" charset="0"/>
               </a:rPr>
               <a:t>@Options注解</a:t>
             </a:r>
@@ -21493,7 +21408,7 @@
                 </a:solidFill>
                 <a:latin typeface="微软雅黑" panose="020B0503020204020204" pitchFamily="34" charset="-122"/>
                 <a:ea typeface="微软雅黑" panose="020B0503020204020204" pitchFamily="34" charset="-122"/>
-                <a:cs typeface="Courier New" panose="02070309020205020404" pitchFamily="49" charset="0"/>
+                <a:cs typeface="Courier New" panose="02070409020205090404" pitchFamily="49" charset="0"/>
               </a:rPr>
               <a:t>与@Select、@Insert、@Update、@Delete等注解一起使用</a:t>
             </a:r>
@@ -21526,7 +21441,7 @@
                 </a:solidFill>
                 <a:latin typeface="微软雅黑" panose="020B0503020204020204" pitchFamily="34" charset="-122"/>
                 <a:ea typeface="微软雅黑" panose="020B0503020204020204" pitchFamily="34" charset="-122"/>
-                <a:cs typeface="Courier New" panose="02070309020205020404" pitchFamily="49" charset="0"/>
+                <a:cs typeface="Courier New" panose="02070409020205090404" pitchFamily="49" charset="0"/>
               </a:rPr>
               <a:t>附加的执行选项</a:t>
             </a:r>
@@ -21607,7 +21522,7 @@
               </a:solidFill>
               <a:latin typeface="微软雅黑" panose="020B0503020204020204" pitchFamily="34" charset="-122"/>
               <a:ea typeface="微软雅黑" panose="020B0503020204020204" pitchFamily="34" charset="-122"/>
-              <a:cs typeface="Courier New" panose="02070309020205020404" pitchFamily="49" charset="0"/>
+              <a:cs typeface="Courier New" panose="02070409020205090404" pitchFamily="49" charset="0"/>
               <a:sym typeface="+mn-ea"/>
             </a:endParaRPr>
           </a:p>
@@ -21645,13 +21560,13 @@
             </a:pPr>
             <a:r>
               <a:rPr sz="1800">
-                <a:latin typeface="Courier New" panose="02070309020205020404" pitchFamily="49" charset="0"/>
+                <a:latin typeface="Courier New" panose="02070409020205090404" pitchFamily="49" charset="0"/>
                 <a:sym typeface="+mn-ea"/>
               </a:rPr>
               <a:t>@Insert("INSERT INTO user (username, password) </a:t>
             </a:r>
             <a:endParaRPr sz="1800">
-              <a:latin typeface="Courier New" panose="02070309020205020404" pitchFamily="49" charset="0"/>
+              <a:latin typeface="Courier New" panose="02070409020205090404" pitchFamily="49" charset="0"/>
               <a:sym typeface="+mn-ea"/>
             </a:endParaRPr>
           </a:p>
@@ -21664,13 +21579,13 @@
             </a:pPr>
             <a:r>
               <a:rPr sz="1800">
-                <a:latin typeface="Courier New" panose="02070309020205020404" pitchFamily="49" charset="0"/>
+                <a:latin typeface="Courier New" panose="02070409020205090404" pitchFamily="49" charset="0"/>
                 <a:sym typeface="+mn-ea"/>
               </a:rPr>
               <a:t>   VALUES (#{username}, #{password})")</a:t>
             </a:r>
             <a:endParaRPr sz="1800">
-              <a:latin typeface="Courier New" panose="02070309020205020404" pitchFamily="49" charset="0"/>
+              <a:latin typeface="Courier New" panose="02070409020205090404" pitchFamily="49" charset="0"/>
               <a:sym typeface="+mn-ea"/>
             </a:endParaRPr>
           </a:p>
@@ -21683,13 +21598,13 @@
             </a:pPr>
             <a:r>
               <a:rPr sz="1800">
-                <a:latin typeface="Courier New" panose="02070309020205020404" pitchFamily="49" charset="0"/>
+                <a:latin typeface="Courier New" panose="02070409020205090404" pitchFamily="49" charset="0"/>
                 <a:sym typeface="+mn-ea"/>
               </a:rPr>
               <a:t>@Options(useGeneratedKeys = true, keyProperty = "id", </a:t>
             </a:r>
             <a:endParaRPr sz="1800">
-              <a:latin typeface="Courier New" panose="02070309020205020404" pitchFamily="49" charset="0"/>
+              <a:latin typeface="Courier New" panose="02070409020205090404" pitchFamily="49" charset="0"/>
               <a:sym typeface="+mn-ea"/>
             </a:endParaRPr>
           </a:p>
@@ -21702,13 +21617,13 @@
             </a:pPr>
             <a:r>
               <a:rPr sz="1800">
-                <a:latin typeface="Courier New" panose="02070309020205020404" pitchFamily="49" charset="0"/>
+                <a:latin typeface="Courier New" panose="02070409020205090404" pitchFamily="49" charset="0"/>
                 <a:sym typeface="+mn-ea"/>
               </a:rPr>
               <a:t>    timeout = 30, flushCache = Options.FlushCachePolicy.TRUE)</a:t>
             </a:r>
             <a:endParaRPr sz="1800">
-              <a:latin typeface="Courier New" panose="02070309020205020404" pitchFamily="49" charset="0"/>
+              <a:latin typeface="Courier New" panose="02070409020205090404" pitchFamily="49" charset="0"/>
               <a:sym typeface="+mn-ea"/>
             </a:endParaRPr>
           </a:p>
@@ -21721,13 +21636,13 @@
             </a:pPr>
             <a:r>
               <a:rPr sz="1800">
-                <a:latin typeface="Courier New" panose="02070309020205020404" pitchFamily="49" charset="0"/>
+                <a:latin typeface="Courier New" panose="02070409020205090404" pitchFamily="49" charset="0"/>
                 <a:sym typeface="+mn-ea"/>
               </a:rPr>
               <a:t>int insertUser(User user);</a:t>
             </a:r>
             <a:endParaRPr sz="1800">
-              <a:latin typeface="Courier New" panose="02070309020205020404" pitchFamily="49" charset="0"/>
+              <a:latin typeface="Courier New" panose="02070409020205090404" pitchFamily="49" charset="0"/>
               <a:sym typeface="+mn-ea"/>
             </a:endParaRPr>
           </a:p>
@@ -21958,7 +21873,7 @@
                   <a:schemeClr val="tx1"/>
                 </a:solidFill>
                 <a:latin typeface="Calibri" panose="020F0502020204030204" pitchFamily="34" charset="0"/>
-                <a:ea typeface="宋体" panose="02010600030101010101" pitchFamily="2" charset="-122"/>
+                <a:ea typeface="宋体" pitchFamily="2" charset="-122"/>
               </a:defRPr>
             </a:lvl1pPr>
             <a:lvl2pPr marL="742950" indent="-285750">
@@ -21967,7 +21882,7 @@
                   <a:schemeClr val="tx1"/>
                 </a:solidFill>
                 <a:latin typeface="Calibri" panose="020F0502020204030204" pitchFamily="34" charset="0"/>
-                <a:ea typeface="宋体" panose="02010600030101010101" pitchFamily="2" charset="-122"/>
+                <a:ea typeface="宋体" pitchFamily="2" charset="-122"/>
               </a:defRPr>
             </a:lvl2pPr>
             <a:lvl3pPr marL="1143000" indent="-228600">
@@ -21976,7 +21891,7 @@
                   <a:schemeClr val="tx1"/>
                 </a:solidFill>
                 <a:latin typeface="Calibri" panose="020F0502020204030204" pitchFamily="34" charset="0"/>
-                <a:ea typeface="宋体" panose="02010600030101010101" pitchFamily="2" charset="-122"/>
+                <a:ea typeface="宋体" pitchFamily="2" charset="-122"/>
               </a:defRPr>
             </a:lvl3pPr>
             <a:lvl4pPr marL="1600200" indent="-228600">
@@ -21985,7 +21900,7 @@
                   <a:schemeClr val="tx1"/>
                 </a:solidFill>
                 <a:latin typeface="Calibri" panose="020F0502020204030204" pitchFamily="34" charset="0"/>
-                <a:ea typeface="宋体" panose="02010600030101010101" pitchFamily="2" charset="-122"/>
+                <a:ea typeface="宋体" pitchFamily="2" charset="-122"/>
               </a:defRPr>
             </a:lvl4pPr>
             <a:lvl5pPr marL="2057400" indent="-228600">
@@ -21994,7 +21909,7 @@
                   <a:schemeClr val="tx1"/>
                 </a:solidFill>
                 <a:latin typeface="Calibri" panose="020F0502020204030204" pitchFamily="34" charset="0"/>
-                <a:ea typeface="宋体" panose="02010600030101010101" pitchFamily="2" charset="-122"/>
+                <a:ea typeface="宋体" pitchFamily="2" charset="-122"/>
               </a:defRPr>
             </a:lvl5pPr>
             <a:lvl6pPr marL="2514600" indent="-228600" eaLnBrk="0" fontAlgn="base" hangingPunct="0">
@@ -22009,7 +21924,7 @@
                   <a:schemeClr val="tx1"/>
                 </a:solidFill>
                 <a:latin typeface="Calibri" panose="020F0502020204030204" pitchFamily="34" charset="0"/>
-                <a:ea typeface="宋体" panose="02010600030101010101" pitchFamily="2" charset="-122"/>
+                <a:ea typeface="宋体" pitchFamily="2" charset="-122"/>
               </a:defRPr>
             </a:lvl6pPr>
             <a:lvl7pPr marL="2971800" indent="-228600" eaLnBrk="0" fontAlgn="base" hangingPunct="0">
@@ -22024,7 +21939,7 @@
                   <a:schemeClr val="tx1"/>
                 </a:solidFill>
                 <a:latin typeface="Calibri" panose="020F0502020204030204" pitchFamily="34" charset="0"/>
-                <a:ea typeface="宋体" panose="02010600030101010101" pitchFamily="2" charset="-122"/>
+                <a:ea typeface="宋体" pitchFamily="2" charset="-122"/>
               </a:defRPr>
             </a:lvl7pPr>
             <a:lvl8pPr marL="3429000" indent="-228600" eaLnBrk="0" fontAlgn="base" hangingPunct="0">
@@ -22039,7 +21954,7 @@
                   <a:schemeClr val="tx1"/>
                 </a:solidFill>
                 <a:latin typeface="Calibri" panose="020F0502020204030204" pitchFamily="34" charset="0"/>
-                <a:ea typeface="宋体" panose="02010600030101010101" pitchFamily="2" charset="-122"/>
+                <a:ea typeface="宋体" pitchFamily="2" charset="-122"/>
               </a:defRPr>
             </a:lvl8pPr>
             <a:lvl9pPr marL="3886200" indent="-228600" eaLnBrk="0" fontAlgn="base" hangingPunct="0">
@@ -22054,7 +21969,7 @@
                   <a:schemeClr val="tx1"/>
                 </a:solidFill>
                 <a:latin typeface="Calibri" panose="020F0502020204030204" pitchFamily="34" charset="0"/>
-                <a:ea typeface="宋体" panose="02010600030101010101" pitchFamily="2" charset="-122"/>
+                <a:ea typeface="宋体" pitchFamily="2" charset="-122"/>
               </a:defRPr>
             </a:lvl9pPr>
           </a:lstStyle>
@@ -22209,7 +22124,7 @@
                   <a:schemeClr val="tx1"/>
                 </a:solidFill>
                 <a:latin typeface="Calibri" panose="020F0502020204030204" pitchFamily="34" charset="0"/>
-                <a:ea typeface="宋体" panose="02010600030101010101" pitchFamily="2" charset="-122"/>
+                <a:ea typeface="宋体" pitchFamily="2" charset="-122"/>
               </a:defRPr>
             </a:lvl1pPr>
             <a:lvl2pPr marL="742950" indent="-285750">
@@ -22218,7 +22133,7 @@
                   <a:schemeClr val="tx1"/>
                 </a:solidFill>
                 <a:latin typeface="Calibri" panose="020F0502020204030204" pitchFamily="34" charset="0"/>
-                <a:ea typeface="宋体" panose="02010600030101010101" pitchFamily="2" charset="-122"/>
+                <a:ea typeface="宋体" pitchFamily="2" charset="-122"/>
               </a:defRPr>
             </a:lvl2pPr>
             <a:lvl3pPr marL="1143000" indent="-228600">
@@ -22227,7 +22142,7 @@
                   <a:schemeClr val="tx1"/>
                 </a:solidFill>
                 <a:latin typeface="Calibri" panose="020F0502020204030204" pitchFamily="34" charset="0"/>
-                <a:ea typeface="宋体" panose="02010600030101010101" pitchFamily="2" charset="-122"/>
+                <a:ea typeface="宋体" pitchFamily="2" charset="-122"/>
               </a:defRPr>
             </a:lvl3pPr>
             <a:lvl4pPr marL="1600200" indent="-228600">
@@ -22236,7 +22151,7 @@
                   <a:schemeClr val="tx1"/>
                 </a:solidFill>
                 <a:latin typeface="Calibri" panose="020F0502020204030204" pitchFamily="34" charset="0"/>
-                <a:ea typeface="宋体" panose="02010600030101010101" pitchFamily="2" charset="-122"/>
+                <a:ea typeface="宋体" pitchFamily="2" charset="-122"/>
               </a:defRPr>
             </a:lvl4pPr>
             <a:lvl5pPr marL="2057400" indent="-228600">
@@ -22245,7 +22160,7 @@
                   <a:schemeClr val="tx1"/>
                 </a:solidFill>
                 <a:latin typeface="Calibri" panose="020F0502020204030204" pitchFamily="34" charset="0"/>
-                <a:ea typeface="宋体" panose="02010600030101010101" pitchFamily="2" charset="-122"/>
+                <a:ea typeface="宋体" pitchFamily="2" charset="-122"/>
               </a:defRPr>
             </a:lvl5pPr>
             <a:lvl6pPr marL="2514600" indent="-228600" eaLnBrk="0" fontAlgn="base" hangingPunct="0">
@@ -22260,7 +22175,7 @@
                   <a:schemeClr val="tx1"/>
                 </a:solidFill>
                 <a:latin typeface="Calibri" panose="020F0502020204030204" pitchFamily="34" charset="0"/>
-                <a:ea typeface="宋体" panose="02010600030101010101" pitchFamily="2" charset="-122"/>
+                <a:ea typeface="宋体" pitchFamily="2" charset="-122"/>
               </a:defRPr>
             </a:lvl6pPr>
             <a:lvl7pPr marL="2971800" indent="-228600" eaLnBrk="0" fontAlgn="base" hangingPunct="0">
@@ -22275,7 +22190,7 @@
                   <a:schemeClr val="tx1"/>
                 </a:solidFill>
                 <a:latin typeface="Calibri" panose="020F0502020204030204" pitchFamily="34" charset="0"/>
-                <a:ea typeface="宋体" panose="02010600030101010101" pitchFamily="2" charset="-122"/>
+                <a:ea typeface="宋体" pitchFamily="2" charset="-122"/>
               </a:defRPr>
             </a:lvl7pPr>
             <a:lvl8pPr marL="3429000" indent="-228600" eaLnBrk="0" fontAlgn="base" hangingPunct="0">
@@ -22290,7 +22205,7 @@
                   <a:schemeClr val="tx1"/>
                 </a:solidFill>
                 <a:latin typeface="Calibri" panose="020F0502020204030204" pitchFamily="34" charset="0"/>
-                <a:ea typeface="宋体" panose="02010600030101010101" pitchFamily="2" charset="-122"/>
+                <a:ea typeface="宋体" pitchFamily="2" charset="-122"/>
               </a:defRPr>
             </a:lvl8pPr>
             <a:lvl9pPr marL="3886200" indent="-228600" eaLnBrk="0" fontAlgn="base" hangingPunct="0">
@@ -22305,7 +22220,7 @@
                   <a:schemeClr val="tx1"/>
                 </a:solidFill>
                 <a:latin typeface="Calibri" panose="020F0502020204030204" pitchFamily="34" charset="0"/>
-                <a:ea typeface="宋体" panose="02010600030101010101" pitchFamily="2" charset="-122"/>
+                <a:ea typeface="宋体" pitchFamily="2" charset="-122"/>
               </a:defRPr>
             </a:lvl9pPr>
           </a:lstStyle>
@@ -22400,7 +22315,7 @@
                   <a:schemeClr val="tx1"/>
                 </a:solidFill>
                 <a:latin typeface="Calibri" panose="020F0502020204030204" pitchFamily="34" charset="0"/>
-                <a:ea typeface="宋体" panose="02010600030101010101" pitchFamily="2" charset="-122"/>
+                <a:ea typeface="宋体" pitchFamily="2" charset="-122"/>
               </a:defRPr>
             </a:lvl1pPr>
             <a:lvl2pPr marL="742950" indent="-285750">
@@ -22409,7 +22324,7 @@
                   <a:schemeClr val="tx1"/>
                 </a:solidFill>
                 <a:latin typeface="Calibri" panose="020F0502020204030204" pitchFamily="34" charset="0"/>
-                <a:ea typeface="宋体" panose="02010600030101010101" pitchFamily="2" charset="-122"/>
+                <a:ea typeface="宋体" pitchFamily="2" charset="-122"/>
               </a:defRPr>
             </a:lvl2pPr>
             <a:lvl3pPr marL="1143000" indent="-228600">
@@ -22418,7 +22333,7 @@
                   <a:schemeClr val="tx1"/>
                 </a:solidFill>
                 <a:latin typeface="Calibri" panose="020F0502020204030204" pitchFamily="34" charset="0"/>
-                <a:ea typeface="宋体" panose="02010600030101010101" pitchFamily="2" charset="-122"/>
+                <a:ea typeface="宋体" pitchFamily="2" charset="-122"/>
               </a:defRPr>
             </a:lvl3pPr>
             <a:lvl4pPr marL="1600200" indent="-228600">
@@ -22427,7 +22342,7 @@
                   <a:schemeClr val="tx1"/>
                 </a:solidFill>
                 <a:latin typeface="Calibri" panose="020F0502020204030204" pitchFamily="34" charset="0"/>
-                <a:ea typeface="宋体" panose="02010600030101010101" pitchFamily="2" charset="-122"/>
+                <a:ea typeface="宋体" pitchFamily="2" charset="-122"/>
               </a:defRPr>
             </a:lvl4pPr>
             <a:lvl5pPr marL="2057400" indent="-228600">
@@ -22436,7 +22351,7 @@
                   <a:schemeClr val="tx1"/>
                 </a:solidFill>
                 <a:latin typeface="Calibri" panose="020F0502020204030204" pitchFamily="34" charset="0"/>
-                <a:ea typeface="宋体" panose="02010600030101010101" pitchFamily="2" charset="-122"/>
+                <a:ea typeface="宋体" pitchFamily="2" charset="-122"/>
               </a:defRPr>
             </a:lvl5pPr>
             <a:lvl6pPr marL="2514600" indent="-228600" eaLnBrk="0" fontAlgn="base" hangingPunct="0">
@@ -22451,7 +22366,7 @@
                   <a:schemeClr val="tx1"/>
                 </a:solidFill>
                 <a:latin typeface="Calibri" panose="020F0502020204030204" pitchFamily="34" charset="0"/>
-                <a:ea typeface="宋体" panose="02010600030101010101" pitchFamily="2" charset="-122"/>
+                <a:ea typeface="宋体" pitchFamily="2" charset="-122"/>
               </a:defRPr>
             </a:lvl6pPr>
             <a:lvl7pPr marL="2971800" indent="-228600" eaLnBrk="0" fontAlgn="base" hangingPunct="0">
@@ -22466,7 +22381,7 @@
                   <a:schemeClr val="tx1"/>
                 </a:solidFill>
                 <a:latin typeface="Calibri" panose="020F0502020204030204" pitchFamily="34" charset="0"/>
-                <a:ea typeface="宋体" panose="02010600030101010101" pitchFamily="2" charset="-122"/>
+                <a:ea typeface="宋体" pitchFamily="2" charset="-122"/>
               </a:defRPr>
             </a:lvl7pPr>
             <a:lvl8pPr marL="3429000" indent="-228600" eaLnBrk="0" fontAlgn="base" hangingPunct="0">
@@ -22481,7 +22396,7 @@
                   <a:schemeClr val="tx1"/>
                 </a:solidFill>
                 <a:latin typeface="Calibri" panose="020F0502020204030204" pitchFamily="34" charset="0"/>
-                <a:ea typeface="宋体" panose="02010600030101010101" pitchFamily="2" charset="-122"/>
+                <a:ea typeface="宋体" pitchFamily="2" charset="-122"/>
               </a:defRPr>
             </a:lvl8pPr>
             <a:lvl9pPr marL="3886200" indent="-228600" eaLnBrk="0" fontAlgn="base" hangingPunct="0">
@@ -22496,7 +22411,7 @@
                   <a:schemeClr val="tx1"/>
                 </a:solidFill>
                 <a:latin typeface="Calibri" panose="020F0502020204030204" pitchFamily="34" charset="0"/>
-                <a:ea typeface="宋体" panose="02010600030101010101" pitchFamily="2" charset="-122"/>
+                <a:ea typeface="宋体" pitchFamily="2" charset="-122"/>
               </a:defRPr>
             </a:lvl9pPr>
           </a:lstStyle>
@@ -22745,9 +22660,9 @@
                 <a:solidFill>
                   <a:schemeClr val="lt1"/>
                 </a:solidFill>
-                <a:latin typeface="Arial" panose="020B0604020202020204" pitchFamily="34" charset="0"/>
+                <a:latin typeface="Arial" panose="020B0604020202090204" pitchFamily="34" charset="0"/>
                 <a:ea typeface="思源黑体 CN Normal" panose="020B0400000000000000" pitchFamily="34" charset="-122"/>
-                <a:sym typeface="Arial" panose="020B0604020202020204" pitchFamily="34" charset="0"/>
+                <a:sym typeface="Arial" panose="020B0604020202090204" pitchFamily="34" charset="0"/>
               </a:endParaRPr>
             </a:p>
           </p:txBody>
@@ -22802,16 +22717,16 @@
             <a:p>
               <a:r>
                 <a:rPr sz="1700" dirty="0">
-                  <a:latin typeface="Arial" panose="020B0604020202020204" pitchFamily="34" charset="0"/>
+                  <a:latin typeface="Arial" panose="020B0604020202090204" pitchFamily="34" charset="0"/>
                   <a:ea typeface="思源黑体 CN Normal" panose="020B0400000000000000" pitchFamily="34" charset="-122"/>
-                  <a:sym typeface="Arial" panose="020B0604020202020204" pitchFamily="34" charset="0"/>
+                  <a:sym typeface="Arial" panose="020B0604020202090204" pitchFamily="34" charset="0"/>
                 </a:rPr>
                 <a:t>1.创建项目</a:t>
               </a:r>
               <a:endParaRPr sz="1700" dirty="0">
-                <a:latin typeface="Arial" panose="020B0604020202020204" pitchFamily="34" charset="0"/>
+                <a:latin typeface="Arial" panose="020B0604020202090204" pitchFamily="34" charset="0"/>
                 <a:ea typeface="思源黑体 CN Normal" panose="020B0400000000000000" pitchFamily="34" charset="-122"/>
-                <a:sym typeface="Arial" panose="020B0604020202020204" pitchFamily="34" charset="0"/>
+                <a:sym typeface="Arial" panose="020B0604020202090204" pitchFamily="34" charset="0"/>
               </a:endParaRPr>
             </a:p>
           </p:txBody>
@@ -22871,7 +22786,7 @@
                 </a:solidFill>
                 <a:latin typeface="微软雅黑" panose="020B0503020204020204" pitchFamily="34" charset="-122"/>
                 <a:ea typeface="微软雅黑" panose="020B0503020204020204" pitchFamily="34" charset="-122"/>
-                <a:cs typeface="Courier New" panose="02070309020205020404" pitchFamily="49" charset="0"/>
+                <a:cs typeface="Courier New" panose="02070409020205090404" pitchFamily="49" charset="0"/>
               </a:rPr>
               <a:t>创建</a:t>
             </a:r>
@@ -22893,7 +22808,7 @@
                 </a:solidFill>
                 <a:latin typeface="微软雅黑" panose="020B0503020204020204" pitchFamily="34" charset="-122"/>
                 <a:ea typeface="微软雅黑" panose="020B0503020204020204" pitchFamily="34" charset="-122"/>
-                <a:cs typeface="Courier New" panose="02070309020205020404" pitchFamily="49" charset="0"/>
+                <a:cs typeface="Courier New" panose="02070409020205090404" pitchFamily="49" charset="0"/>
               </a:rPr>
               <a:t>Maven项目</a:t>
             </a:r>
@@ -22915,7 +22830,7 @@
                 </a:solidFill>
                 <a:latin typeface="微软雅黑" panose="020B0503020204020204" pitchFamily="34" charset="-122"/>
                 <a:ea typeface="微软雅黑" panose="020B0503020204020204" pitchFamily="34" charset="-122"/>
-                <a:cs typeface="Courier New" panose="02070309020205020404" pitchFamily="49" charset="0"/>
+                <a:cs typeface="Courier New" panose="02070409020205090404" pitchFamily="49" charset="0"/>
               </a:rPr>
               <a:t>引入</a:t>
             </a:r>
@@ -22937,7 +22852,7 @@
                 </a:solidFill>
                 <a:latin typeface="微软雅黑" panose="020B0503020204020204" pitchFamily="34" charset="-122"/>
                 <a:ea typeface="微软雅黑" panose="020B0503020204020204" pitchFamily="34" charset="-122"/>
-                <a:cs typeface="Courier New" panose="02070309020205020404" pitchFamily="49" charset="0"/>
+                <a:cs typeface="Courier New" panose="02070409020205090404" pitchFamily="49" charset="0"/>
               </a:rPr>
               <a:t>依赖</a:t>
             </a:r>
@@ -22988,7 +22903,7 @@
                 </a:solidFill>
                 <a:latin typeface="微软雅黑" panose="020B0503020204020204" pitchFamily="34" charset="-122"/>
                 <a:ea typeface="微软雅黑" panose="020B0503020204020204" pitchFamily="34" charset="-122"/>
-                <a:cs typeface="Courier New" panose="02070309020205020404" pitchFamily="49" charset="0"/>
+                <a:cs typeface="Courier New" panose="02070409020205090404" pitchFamily="49" charset="0"/>
               </a:rPr>
               <a:t>对比</a:t>
             </a:r>
@@ -23010,7 +22925,7 @@
                 </a:solidFill>
                 <a:latin typeface="微软雅黑" panose="020B0503020204020204" pitchFamily="34" charset="-122"/>
                 <a:ea typeface="微软雅黑" panose="020B0503020204020204" pitchFamily="34" charset="-122"/>
-                <a:cs typeface="Courier New" panose="02070309020205020404" pitchFamily="49" charset="0"/>
+                <a:cs typeface="Courier New" panose="02070409020205090404" pitchFamily="49" charset="0"/>
               </a:rPr>
               <a:t>效果</a:t>
             </a:r>
@@ -23032,7 +22947,7 @@
                 </a:solidFill>
                 <a:latin typeface="微软雅黑" panose="020B0503020204020204" pitchFamily="34" charset="-122"/>
                 <a:ea typeface="微软雅黑" panose="020B0503020204020204" pitchFamily="34" charset="-122"/>
-                <a:cs typeface="Courier New" panose="02070309020205020404" pitchFamily="49" charset="0"/>
+                <a:cs typeface="Courier New" panose="02070409020205090404" pitchFamily="49" charset="0"/>
               </a:rPr>
               <a:t>基于第8章8.6节的代码演示</a:t>
             </a:r>
@@ -23054,7 +22969,7 @@
                 </a:solidFill>
                 <a:latin typeface="微软雅黑" panose="020B0503020204020204" pitchFamily="34" charset="-122"/>
                 <a:ea typeface="微软雅黑" panose="020B0503020204020204" pitchFamily="34" charset="-122"/>
-                <a:cs typeface="Courier New" panose="02070309020205020404" pitchFamily="49" charset="0"/>
+                <a:cs typeface="Courier New" panose="02070409020205090404" pitchFamily="49" charset="0"/>
               </a:rPr>
               <a:t>注解的单表增删改查操作</a:t>
             </a:r>
@@ -23156,7 +23071,7 @@
                 </a:solidFill>
                 <a:latin typeface="微软雅黑" panose="020B0503020204020204" pitchFamily="34" charset="-122"/>
                 <a:ea typeface="微软雅黑" panose="020B0503020204020204" pitchFamily="34" charset="-122"/>
-                <a:cs typeface="Courier New" panose="02070309020205020404" pitchFamily="49" charset="0"/>
+                <a:cs typeface="Courier New" panose="02070409020205090404" pitchFamily="49" charset="0"/>
               </a:rPr>
               <a:t>案例</a:t>
             </a:r>
@@ -23178,7 +23093,7 @@
                 </a:solidFill>
                 <a:latin typeface="微软雅黑" panose="020B0503020204020204" pitchFamily="34" charset="-122"/>
                 <a:ea typeface="微软雅黑" panose="020B0503020204020204" pitchFamily="34" charset="-122"/>
-                <a:cs typeface="Courier New" panose="02070309020205020404" pitchFamily="49" charset="0"/>
+                <a:cs typeface="Courier New" panose="02070409020205090404" pitchFamily="49" charset="0"/>
               </a:rPr>
               <a:t>基于注解的单表增删改查操作</a:t>
             </a:r>
@@ -23293,7 +23208,7 @@
               <a:spcBef>
                 <a:spcPct val="20000"/>
               </a:spcBef>
-              <a:buFont typeface="Arial" panose="020B0604020202020204" pitchFamily="34" charset="0"/>
+              <a:buFont typeface="Arial" panose="020B0604020202090204" pitchFamily="34" charset="0"/>
               <a:buChar char="•"/>
               <a:defRPr sz="3200" kern="1200">
                 <a:solidFill>
@@ -23308,7 +23223,7 @@
               <a:spcBef>
                 <a:spcPct val="20000"/>
               </a:spcBef>
-              <a:buFont typeface="Arial" panose="020B0604020202020204" pitchFamily="34" charset="0"/>
+              <a:buFont typeface="Arial" panose="020B0604020202090204" pitchFamily="34" charset="0"/>
               <a:buChar char="–"/>
               <a:defRPr sz="2800" kern="1200">
                 <a:solidFill>
@@ -23323,7 +23238,7 @@
               <a:spcBef>
                 <a:spcPct val="20000"/>
               </a:spcBef>
-              <a:buFont typeface="Arial" panose="020B0604020202020204" pitchFamily="34" charset="0"/>
+              <a:buFont typeface="Arial" panose="020B0604020202090204" pitchFamily="34" charset="0"/>
               <a:buChar char="•"/>
               <a:defRPr sz="2400" kern="1200">
                 <a:solidFill>
@@ -23338,7 +23253,7 @@
               <a:spcBef>
                 <a:spcPct val="20000"/>
               </a:spcBef>
-              <a:buFont typeface="Arial" panose="020B0604020202020204" pitchFamily="34" charset="0"/>
+              <a:buFont typeface="Arial" panose="020B0604020202090204" pitchFamily="34" charset="0"/>
               <a:buChar char="–"/>
               <a:defRPr sz="2000" kern="1200">
                 <a:solidFill>
@@ -23353,7 +23268,7 @@
               <a:spcBef>
                 <a:spcPct val="20000"/>
               </a:spcBef>
-              <a:buFont typeface="Arial" panose="020B0604020202020204" pitchFamily="34" charset="0"/>
+              <a:buFont typeface="Arial" panose="020B0604020202090204" pitchFamily="34" charset="0"/>
               <a:buChar char="»"/>
               <a:defRPr sz="2000" kern="1200">
                 <a:solidFill>
@@ -23368,7 +23283,7 @@
               <a:spcBef>
                 <a:spcPct val="20000"/>
               </a:spcBef>
-              <a:buFont typeface="Arial" panose="020B0604020202020204" pitchFamily="34" charset="0"/>
+              <a:buFont typeface="Arial" panose="020B0604020202090204" pitchFamily="34" charset="0"/>
               <a:buChar char="•"/>
               <a:defRPr sz="2000" kern="1200">
                 <a:solidFill>
@@ -23383,7 +23298,7 @@
               <a:spcBef>
                 <a:spcPct val="20000"/>
               </a:spcBef>
-              <a:buFont typeface="Arial" panose="020B0604020202020204" pitchFamily="34" charset="0"/>
+              <a:buFont typeface="Arial" panose="020B0604020202090204" pitchFamily="34" charset="0"/>
               <a:buChar char="•"/>
               <a:defRPr sz="2000" kern="1200">
                 <a:solidFill>
@@ -23398,7 +23313,7 @@
               <a:spcBef>
                 <a:spcPct val="20000"/>
               </a:spcBef>
-              <a:buFont typeface="Arial" panose="020B0604020202020204" pitchFamily="34" charset="0"/>
+              <a:buFont typeface="Arial" panose="020B0604020202090204" pitchFamily="34" charset="0"/>
               <a:buChar char="•"/>
               <a:defRPr sz="2000" kern="1200">
                 <a:solidFill>
@@ -23413,7 +23328,7 @@
               <a:spcBef>
                 <a:spcPct val="20000"/>
               </a:spcBef>
-              <a:buFont typeface="Arial" panose="020B0604020202020204" pitchFamily="34" charset="0"/>
+              <a:buFont typeface="Arial" panose="020B0604020202090204" pitchFamily="34" charset="0"/>
               <a:buChar char="•"/>
               <a:defRPr sz="2000" kern="1200">
                 <a:solidFill>
@@ -25693,9 +25608,9 @@
                 <a:solidFill>
                   <a:schemeClr val="lt1"/>
                 </a:solidFill>
-                <a:latin typeface="Arial" panose="020B0604020202020204" pitchFamily="34" charset="0"/>
+                <a:latin typeface="Arial" panose="020B0604020202090204" pitchFamily="34" charset="0"/>
                 <a:ea typeface="思源黑体 CN Normal" panose="020B0400000000000000" pitchFamily="34" charset="-122"/>
-                <a:sym typeface="Arial" panose="020B0604020202020204" pitchFamily="34" charset="0"/>
+                <a:sym typeface="Arial" panose="020B0604020202090204" pitchFamily="34" charset="0"/>
               </a:endParaRPr>
             </a:p>
           </p:txBody>
@@ -25750,16 +25665,16 @@
             <a:p>
               <a:r>
                 <a:rPr sz="1700" dirty="0">
-                  <a:latin typeface="Arial" panose="020B0604020202020204" pitchFamily="34" charset="0"/>
+                  <a:latin typeface="Arial" panose="020B0604020202090204" pitchFamily="34" charset="0"/>
                   <a:ea typeface="思源黑体 CN Normal" panose="020B0400000000000000" pitchFamily="34" charset="-122"/>
-                  <a:sym typeface="Arial" panose="020B0604020202020204" pitchFamily="34" charset="0"/>
+                  <a:sym typeface="Arial" panose="020B0604020202090204" pitchFamily="34" charset="0"/>
                 </a:rPr>
                 <a:t>2.修改Mapper接口</a:t>
               </a:r>
               <a:endParaRPr sz="1700" dirty="0">
-                <a:latin typeface="Arial" panose="020B0604020202020204" pitchFamily="34" charset="0"/>
+                <a:latin typeface="Arial" panose="020B0604020202090204" pitchFamily="34" charset="0"/>
                 <a:ea typeface="思源黑体 CN Normal" panose="020B0400000000000000" pitchFamily="34" charset="-122"/>
-                <a:sym typeface="Arial" panose="020B0604020202020204" pitchFamily="34" charset="0"/>
+                <a:sym typeface="Arial" panose="020B0604020202090204" pitchFamily="34" charset="0"/>
               </a:endParaRPr>
             </a:p>
           </p:txBody>
@@ -25819,7 +25734,7 @@
                 </a:solidFill>
                 <a:latin typeface="微软雅黑" panose="020B0503020204020204" pitchFamily="34" charset="-122"/>
                 <a:ea typeface="微软雅黑" panose="020B0503020204020204" pitchFamily="34" charset="-122"/>
-                <a:cs typeface="Courier New" panose="02070309020205020404" pitchFamily="49" charset="0"/>
+                <a:cs typeface="Courier New" panose="02070409020205090404" pitchFamily="49" charset="0"/>
               </a:rPr>
               <a:t>UserMapper接口</a:t>
             </a:r>
@@ -25841,7 +25756,7 @@
                 </a:solidFill>
                 <a:latin typeface="微软雅黑" panose="020B0503020204020204" pitchFamily="34" charset="-122"/>
                 <a:ea typeface="微软雅黑" panose="020B0503020204020204" pitchFamily="34" charset="-122"/>
-                <a:cs typeface="Courier New" panose="02070309020205020404" pitchFamily="49" charset="0"/>
+                <a:cs typeface="Courier New" panose="02070409020205090404" pitchFamily="49" charset="0"/>
               </a:rPr>
               <a:t>增删改查方法上，</a:t>
             </a:r>
@@ -25863,7 +25778,7 @@
                 </a:solidFill>
                 <a:latin typeface="微软雅黑" panose="020B0503020204020204" pitchFamily="34" charset="-122"/>
                 <a:ea typeface="微软雅黑" panose="020B0503020204020204" pitchFamily="34" charset="-122"/>
-                <a:cs typeface="Courier New" panose="02070309020205020404" pitchFamily="49" charset="0"/>
+                <a:cs typeface="Courier New" panose="02070409020205090404" pitchFamily="49" charset="0"/>
               </a:rPr>
               <a:t>注解</a:t>
             </a:r>
@@ -25885,7 +25800,7 @@
                 </a:solidFill>
                 <a:latin typeface="微软雅黑" panose="020B0503020204020204" pitchFamily="34" charset="-122"/>
                 <a:ea typeface="微软雅黑" panose="020B0503020204020204" pitchFamily="34" charset="-122"/>
-                <a:cs typeface="Courier New" panose="02070309020205020404" pitchFamily="49" charset="0"/>
+                <a:cs typeface="Courier New" panose="02070409020205090404" pitchFamily="49" charset="0"/>
               </a:rPr>
               <a:t>标注</a:t>
             </a:r>
@@ -25907,7 +25822,7 @@
                 </a:solidFill>
                 <a:latin typeface="微软雅黑" panose="020B0503020204020204" pitchFamily="34" charset="-122"/>
                 <a:ea typeface="微软雅黑" panose="020B0503020204020204" pitchFamily="34" charset="-122"/>
-                <a:cs typeface="Courier New" panose="02070309020205020404" pitchFamily="49" charset="0"/>
+                <a:cs typeface="Courier New" panose="02070409020205090404" pitchFamily="49" charset="0"/>
               </a:rPr>
               <a:t>字段名</a:t>
             </a:r>
@@ -25929,7 +25844,7 @@
                 </a:solidFill>
                 <a:latin typeface="微软雅黑" panose="020B0503020204020204" pitchFamily="34" charset="-122"/>
                 <a:ea typeface="微软雅黑" panose="020B0503020204020204" pitchFamily="34" charset="-122"/>
-                <a:cs typeface="Courier New" panose="02070309020205020404" pitchFamily="49" charset="0"/>
+                <a:cs typeface="Courier New" panose="02070409020205090404" pitchFamily="49" charset="0"/>
               </a:rPr>
               <a:t>属性名一致</a:t>
             </a:r>
@@ -25951,7 +25866,7 @@
                 </a:solidFill>
                 <a:latin typeface="微软雅黑" panose="020B0503020204020204" pitchFamily="34" charset="-122"/>
                 <a:ea typeface="微软雅黑" panose="020B0503020204020204" pitchFamily="34" charset="-122"/>
-                <a:cs typeface="Courier New" panose="02070309020205020404" pitchFamily="49" charset="0"/>
+                <a:cs typeface="Courier New" panose="02070409020205090404" pitchFamily="49" charset="0"/>
               </a:rPr>
               <a:t>省略@Results注解</a:t>
             </a:r>
@@ -25973,7 +25888,7 @@
                 </a:solidFill>
                 <a:latin typeface="微软雅黑" panose="020B0503020204020204" pitchFamily="34" charset="-122"/>
                 <a:ea typeface="微软雅黑" panose="020B0503020204020204" pitchFamily="34" charset="-122"/>
-                <a:cs typeface="Courier New" panose="02070309020205020404" pitchFamily="49" charset="0"/>
+                <a:cs typeface="Courier New" panose="02070409020205090404" pitchFamily="49" charset="0"/>
               </a:rPr>
               <a:t>SQL语句占位符中</a:t>
             </a:r>
@@ -25995,7 +25910,7 @@
                 </a:solidFill>
                 <a:latin typeface="微软雅黑" panose="020B0503020204020204" pitchFamily="34" charset="-122"/>
                 <a:ea typeface="微软雅黑" panose="020B0503020204020204" pitchFamily="34" charset="-122"/>
-                <a:cs typeface="Courier New" panose="02070309020205020404" pitchFamily="49" charset="0"/>
+                <a:cs typeface="Courier New" panose="02070409020205090404" pitchFamily="49" charset="0"/>
               </a:rPr>
               <a:t>参数名称一致的标记</a:t>
             </a:r>
@@ -26486,9 +26401,9 @@
                 <a:solidFill>
                   <a:schemeClr val="lt1"/>
                 </a:solidFill>
-                <a:latin typeface="Arial" panose="020B0604020202020204" pitchFamily="34" charset="0"/>
+                <a:latin typeface="Arial" panose="020B0604020202090204" pitchFamily="34" charset="0"/>
                 <a:ea typeface="思源黑体 CN Normal" panose="020B0400000000000000" pitchFamily="34" charset="-122"/>
-                <a:sym typeface="Arial" panose="020B0604020202020204" pitchFamily="34" charset="0"/>
+                <a:sym typeface="Arial" panose="020B0604020202090204" pitchFamily="34" charset="0"/>
               </a:endParaRPr>
             </a:p>
           </p:txBody>
@@ -26543,16 +26458,16 @@
             <a:p>
               <a:r>
                 <a:rPr sz="1700" dirty="0">
-                  <a:latin typeface="Arial" panose="020B0604020202020204" pitchFamily="34" charset="0"/>
+                  <a:latin typeface="Arial" panose="020B0604020202090204" pitchFamily="34" charset="0"/>
                   <a:ea typeface="思源黑体 CN Normal" panose="020B0400000000000000" pitchFamily="34" charset="-122"/>
-                  <a:sym typeface="Arial" panose="020B0604020202020204" pitchFamily="34" charset="0"/>
+                  <a:sym typeface="Arial" panose="020B0604020202090204" pitchFamily="34" charset="0"/>
                 </a:rPr>
                 <a:t>3.测试效果</a:t>
               </a:r>
               <a:endParaRPr sz="1700" dirty="0">
-                <a:latin typeface="Arial" panose="020B0604020202020204" pitchFamily="34" charset="0"/>
+                <a:latin typeface="Arial" panose="020B0604020202090204" pitchFamily="34" charset="0"/>
                 <a:ea typeface="思源黑体 CN Normal" panose="020B0400000000000000" pitchFamily="34" charset="-122"/>
-                <a:sym typeface="Arial" panose="020B0604020202020204" pitchFamily="34" charset="0"/>
+                <a:sym typeface="Arial" panose="020B0604020202090204" pitchFamily="34" charset="0"/>
               </a:endParaRPr>
             </a:p>
           </p:txBody>
@@ -26601,7 +26516,7 @@
                 </a:solidFill>
                 <a:latin typeface="微软雅黑" panose="020B0503020204020204" pitchFamily="34" charset="-122"/>
                 <a:ea typeface="微软雅黑" panose="020B0503020204020204" pitchFamily="34" charset="-122"/>
-                <a:cs typeface="Courier New" panose="02070309020205020404" pitchFamily="49" charset="0"/>
+                <a:cs typeface="Courier New" panose="02070409020205090404" pitchFamily="49" charset="0"/>
               </a:rPr>
               <a:t>运行</a:t>
             </a:r>
@@ -26623,7 +26538,7 @@
                 </a:solidFill>
                 <a:latin typeface="微软雅黑" panose="020B0503020204020204" pitchFamily="34" charset="-122"/>
                 <a:ea typeface="微软雅黑" panose="020B0503020204020204" pitchFamily="34" charset="-122"/>
-                <a:cs typeface="Courier New" panose="02070309020205020404" pitchFamily="49" charset="0"/>
+                <a:cs typeface="Courier New" panose="02070409020205090404" pitchFamily="49" charset="0"/>
               </a:rPr>
               <a:t>insertTest()方法</a:t>
             </a:r>
@@ -26645,7 +26560,7 @@
                 </a:solidFill>
                 <a:latin typeface="微软雅黑" panose="020B0503020204020204" pitchFamily="34" charset="-122"/>
                 <a:ea typeface="微软雅黑" panose="020B0503020204020204" pitchFamily="34" charset="-122"/>
-                <a:cs typeface="Courier New" panose="02070309020205020404" pitchFamily="49" charset="0"/>
+                <a:cs typeface="Courier New" panose="02070409020205090404" pitchFamily="49" charset="0"/>
               </a:rPr>
               <a:t>添加用户信息</a:t>
             </a:r>
@@ -26898,9 +26813,9 @@
                 <a:solidFill>
                   <a:schemeClr val="lt1"/>
                 </a:solidFill>
-                <a:latin typeface="Arial" panose="020B0604020202020204" pitchFamily="34" charset="0"/>
+                <a:latin typeface="Arial" panose="020B0604020202090204" pitchFamily="34" charset="0"/>
                 <a:ea typeface="思源黑体 CN Normal" panose="020B0400000000000000" pitchFamily="34" charset="-122"/>
-                <a:sym typeface="Arial" panose="020B0604020202020204" pitchFamily="34" charset="0"/>
+                <a:sym typeface="Arial" panose="020B0604020202090204" pitchFamily="34" charset="0"/>
               </a:endParaRPr>
             </a:p>
           </p:txBody>
@@ -26955,16 +26870,16 @@
             <a:p>
               <a:r>
                 <a:rPr sz="1700" dirty="0">
-                  <a:latin typeface="Arial" panose="020B0604020202020204" pitchFamily="34" charset="0"/>
+                  <a:latin typeface="Arial" panose="020B0604020202090204" pitchFamily="34" charset="0"/>
                   <a:ea typeface="思源黑体 CN Normal" panose="020B0400000000000000" pitchFamily="34" charset="-122"/>
-                  <a:sym typeface="Arial" panose="020B0604020202020204" pitchFamily="34" charset="0"/>
+                  <a:sym typeface="Arial" panose="020B0604020202090204" pitchFamily="34" charset="0"/>
                 </a:rPr>
                 <a:t>3.测试效果</a:t>
               </a:r>
               <a:endParaRPr sz="1700" dirty="0">
-                <a:latin typeface="Arial" panose="020B0604020202020204" pitchFamily="34" charset="0"/>
+                <a:latin typeface="Arial" panose="020B0604020202090204" pitchFamily="34" charset="0"/>
                 <a:ea typeface="思源黑体 CN Normal" panose="020B0400000000000000" pitchFamily="34" charset="-122"/>
-                <a:sym typeface="Arial" panose="020B0604020202020204" pitchFamily="34" charset="0"/>
+                <a:sym typeface="Arial" panose="020B0604020202090204" pitchFamily="34" charset="0"/>
               </a:endParaRPr>
             </a:p>
           </p:txBody>
@@ -27024,7 +26939,7 @@
                 </a:solidFill>
                 <a:latin typeface="微软雅黑" panose="020B0503020204020204" pitchFamily="34" charset="-122"/>
                 <a:ea typeface="微软雅黑" panose="020B0503020204020204" pitchFamily="34" charset="-122"/>
-                <a:cs typeface="Courier New" panose="02070309020205020404" pitchFamily="49" charset="0"/>
+                <a:cs typeface="Courier New" panose="02070409020205090404" pitchFamily="49" charset="0"/>
               </a:rPr>
               <a:t>selectTest()方法</a:t>
             </a:r>
@@ -27046,7 +26961,7 @@
                 </a:solidFill>
                 <a:latin typeface="微软雅黑" panose="020B0503020204020204" pitchFamily="34" charset="-122"/>
                 <a:ea typeface="微软雅黑" panose="020B0503020204020204" pitchFamily="34" charset="-122"/>
-                <a:cs typeface="Courier New" panose="02070309020205020404" pitchFamily="49" charset="0"/>
+                <a:cs typeface="Courier New" panose="02070409020205090404" pitchFamily="49" charset="0"/>
               </a:rPr>
               <a:t>查找id为2的用户信息</a:t>
             </a:r>
@@ -27299,9 +27214,9 @@
                 <a:solidFill>
                   <a:schemeClr val="lt1"/>
                 </a:solidFill>
-                <a:latin typeface="Arial" panose="020B0604020202020204" pitchFamily="34" charset="0"/>
+                <a:latin typeface="Arial" panose="020B0604020202090204" pitchFamily="34" charset="0"/>
                 <a:ea typeface="思源黑体 CN Normal" panose="020B0400000000000000" pitchFamily="34" charset="-122"/>
-                <a:sym typeface="Arial" panose="020B0604020202020204" pitchFamily="34" charset="0"/>
+                <a:sym typeface="Arial" panose="020B0604020202090204" pitchFamily="34" charset="0"/>
               </a:endParaRPr>
             </a:p>
           </p:txBody>
@@ -27356,16 +27271,16 @@
             <a:p>
               <a:r>
                 <a:rPr sz="1700" dirty="0">
-                  <a:latin typeface="Arial" panose="020B0604020202020204" pitchFamily="34" charset="0"/>
+                  <a:latin typeface="Arial" panose="020B0604020202090204" pitchFamily="34" charset="0"/>
                   <a:ea typeface="思源黑体 CN Normal" panose="020B0400000000000000" pitchFamily="34" charset="-122"/>
-                  <a:sym typeface="Arial" panose="020B0604020202020204" pitchFamily="34" charset="0"/>
+                  <a:sym typeface="Arial" panose="020B0604020202090204" pitchFamily="34" charset="0"/>
                 </a:rPr>
                 <a:t>3.测试效果</a:t>
               </a:r>
               <a:endParaRPr sz="1700" dirty="0">
-                <a:latin typeface="Arial" panose="020B0604020202020204" pitchFamily="34" charset="0"/>
+                <a:latin typeface="Arial" panose="020B0604020202090204" pitchFamily="34" charset="0"/>
                 <a:ea typeface="思源黑体 CN Normal" panose="020B0400000000000000" pitchFamily="34" charset="-122"/>
-                <a:sym typeface="Arial" panose="020B0604020202020204" pitchFamily="34" charset="0"/>
+                <a:sym typeface="Arial" panose="020B0604020202090204" pitchFamily="34" charset="0"/>
               </a:endParaRPr>
             </a:p>
           </p:txBody>
@@ -27425,7 +27340,7 @@
                 </a:solidFill>
                 <a:latin typeface="微软雅黑" panose="020B0503020204020204" pitchFamily="34" charset="-122"/>
                 <a:ea typeface="微软雅黑" panose="020B0503020204020204" pitchFamily="34" charset="-122"/>
-                <a:cs typeface="Courier New" panose="02070309020205020404" pitchFamily="49" charset="0"/>
+                <a:cs typeface="Courier New" panose="02070409020205090404" pitchFamily="49" charset="0"/>
               </a:rPr>
               <a:t>updateUser()方法</a:t>
             </a:r>
@@ -27447,7 +27362,7 @@
                 </a:solidFill>
                 <a:latin typeface="微软雅黑" panose="020B0503020204020204" pitchFamily="34" charset="-122"/>
                 <a:ea typeface="微软雅黑" panose="020B0503020204020204" pitchFamily="34" charset="-122"/>
-                <a:cs typeface="Courier New" panose="02070309020205020404" pitchFamily="49" charset="0"/>
+                <a:cs typeface="Courier New" panose="02070409020205090404" pitchFamily="49" charset="0"/>
               </a:rPr>
               <a:t>更新用户信息</a:t>
             </a:r>
@@ -27469,7 +27384,7 @@
                 </a:solidFill>
                 <a:latin typeface="微软雅黑" panose="020B0503020204020204" pitchFamily="34" charset="-122"/>
                 <a:ea typeface="微软雅黑" panose="020B0503020204020204" pitchFamily="34" charset="-122"/>
-                <a:cs typeface="Courier New" panose="02070309020205020404" pitchFamily="49" charset="0"/>
+                <a:cs typeface="Courier New" panose="02070409020205090404" pitchFamily="49" charset="0"/>
               </a:rPr>
               <a:t>更新用户信息后</a:t>
             </a:r>
@@ -27491,7 +27406,7 @@
                 </a:solidFill>
                 <a:latin typeface="微软雅黑" panose="020B0503020204020204" pitchFamily="34" charset="-122"/>
                 <a:ea typeface="微软雅黑" panose="020B0503020204020204" pitchFamily="34" charset="-122"/>
-                <a:cs typeface="Courier New" panose="02070309020205020404" pitchFamily="49" charset="0"/>
+                <a:cs typeface="Courier New" panose="02070409020205090404" pitchFamily="49" charset="0"/>
               </a:rPr>
               <a:t>查找id为4的用户信息</a:t>
             </a:r>
@@ -27744,9 +27659,9 @@
                 <a:solidFill>
                   <a:schemeClr val="lt1"/>
                 </a:solidFill>
-                <a:latin typeface="Arial" panose="020B0604020202020204" pitchFamily="34" charset="0"/>
+                <a:latin typeface="Arial" panose="020B0604020202090204" pitchFamily="34" charset="0"/>
                 <a:ea typeface="思源黑体 CN Normal" panose="020B0400000000000000" pitchFamily="34" charset="-122"/>
-                <a:sym typeface="Arial" panose="020B0604020202020204" pitchFamily="34" charset="0"/>
+                <a:sym typeface="Arial" panose="020B0604020202090204" pitchFamily="34" charset="0"/>
               </a:endParaRPr>
             </a:p>
           </p:txBody>
@@ -27801,16 +27716,16 @@
             <a:p>
               <a:r>
                 <a:rPr sz="1700" dirty="0">
-                  <a:latin typeface="Arial" panose="020B0604020202020204" pitchFamily="34" charset="0"/>
+                  <a:latin typeface="Arial" panose="020B0604020202090204" pitchFamily="34" charset="0"/>
                   <a:ea typeface="思源黑体 CN Normal" panose="020B0400000000000000" pitchFamily="34" charset="-122"/>
-                  <a:sym typeface="Arial" panose="020B0604020202020204" pitchFamily="34" charset="0"/>
+                  <a:sym typeface="Arial" panose="020B0604020202090204" pitchFamily="34" charset="0"/>
                 </a:rPr>
                 <a:t>3.测试效果</a:t>
               </a:r>
               <a:endParaRPr sz="1700" dirty="0">
-                <a:latin typeface="Arial" panose="020B0604020202020204" pitchFamily="34" charset="0"/>
+                <a:latin typeface="Arial" panose="020B0604020202090204" pitchFamily="34" charset="0"/>
                 <a:ea typeface="思源黑体 CN Normal" panose="020B0400000000000000" pitchFamily="34" charset="-122"/>
-                <a:sym typeface="Arial" panose="020B0604020202020204" pitchFamily="34" charset="0"/>
+                <a:sym typeface="Arial" panose="020B0604020202090204" pitchFamily="34" charset="0"/>
               </a:endParaRPr>
             </a:p>
           </p:txBody>
@@ -27870,7 +27785,7 @@
                 </a:solidFill>
                 <a:latin typeface="微软雅黑" panose="020B0503020204020204" pitchFamily="34" charset="-122"/>
                 <a:ea typeface="微软雅黑" panose="020B0503020204020204" pitchFamily="34" charset="-122"/>
-                <a:cs typeface="Courier New" panose="02070309020205020404" pitchFamily="49" charset="0"/>
+                <a:cs typeface="Courier New" panose="02070409020205090404" pitchFamily="49" charset="0"/>
               </a:rPr>
               <a:t>deleteTest()方法</a:t>
             </a:r>
@@ -27892,7 +27807,7 @@
                 </a:solidFill>
                 <a:latin typeface="微软雅黑" panose="020B0503020204020204" pitchFamily="34" charset="-122"/>
                 <a:ea typeface="微软雅黑" panose="020B0503020204020204" pitchFamily="34" charset="-122"/>
-                <a:cs typeface="Courier New" panose="02070309020205020404" pitchFamily="49" charset="0"/>
+                <a:cs typeface="Courier New" panose="02070409020205090404" pitchFamily="49" charset="0"/>
               </a:rPr>
               <a:t>删除id为4的用户信息</a:t>
             </a:r>
@@ -27914,7 +27829,7 @@
                 </a:solidFill>
                 <a:latin typeface="微软雅黑" panose="020B0503020204020204" pitchFamily="34" charset="-122"/>
                 <a:ea typeface="微软雅黑" panose="020B0503020204020204" pitchFamily="34" charset="-122"/>
-                <a:cs typeface="Courier New" panose="02070309020205020404" pitchFamily="49" charset="0"/>
+                <a:cs typeface="Courier New" panose="02070409020205090404" pitchFamily="49" charset="0"/>
               </a:rPr>
               <a:t>调用findById()方法查找id为4的用户信息</a:t>
             </a:r>
@@ -28288,7 +28203,7 @@
                   <a:schemeClr val="tx1"/>
                 </a:solidFill>
                 <a:latin typeface="Calibri" panose="020F0502020204030204" pitchFamily="34" charset="0"/>
-                <a:ea typeface="宋体" panose="02010600030101010101" pitchFamily="2" charset="-122"/>
+                <a:ea typeface="宋体" pitchFamily="2" charset="-122"/>
               </a:defRPr>
             </a:lvl1pPr>
             <a:lvl2pPr marL="742950" indent="-285750">
@@ -28297,7 +28212,7 @@
                   <a:schemeClr val="tx1"/>
                 </a:solidFill>
                 <a:latin typeface="Calibri" panose="020F0502020204030204" pitchFamily="34" charset="0"/>
-                <a:ea typeface="宋体" panose="02010600030101010101" pitchFamily="2" charset="-122"/>
+                <a:ea typeface="宋体" pitchFamily="2" charset="-122"/>
               </a:defRPr>
             </a:lvl2pPr>
             <a:lvl3pPr marL="1143000" indent="-228600">
@@ -28306,7 +28221,7 @@
                   <a:schemeClr val="tx1"/>
                 </a:solidFill>
                 <a:latin typeface="Calibri" panose="020F0502020204030204" pitchFamily="34" charset="0"/>
-                <a:ea typeface="宋体" panose="02010600030101010101" pitchFamily="2" charset="-122"/>
+                <a:ea typeface="宋体" pitchFamily="2" charset="-122"/>
               </a:defRPr>
             </a:lvl3pPr>
             <a:lvl4pPr marL="1600200" indent="-228600">
@@ -28315,7 +28230,7 @@
                   <a:schemeClr val="tx1"/>
                 </a:solidFill>
                 <a:latin typeface="Calibri" panose="020F0502020204030204" pitchFamily="34" charset="0"/>
-                <a:ea typeface="宋体" panose="02010600030101010101" pitchFamily="2" charset="-122"/>
+                <a:ea typeface="宋体" pitchFamily="2" charset="-122"/>
               </a:defRPr>
             </a:lvl4pPr>
             <a:lvl5pPr marL="2057400" indent="-228600">
@@ -28324,7 +28239,7 @@
                   <a:schemeClr val="tx1"/>
                 </a:solidFill>
                 <a:latin typeface="Calibri" panose="020F0502020204030204" pitchFamily="34" charset="0"/>
-                <a:ea typeface="宋体" panose="02010600030101010101" pitchFamily="2" charset="-122"/>
+                <a:ea typeface="宋体" pitchFamily="2" charset="-122"/>
               </a:defRPr>
             </a:lvl5pPr>
             <a:lvl6pPr marL="2514600" indent="-228600" eaLnBrk="0" fontAlgn="base" hangingPunct="0">
@@ -28339,7 +28254,7 @@
                   <a:schemeClr val="tx1"/>
                 </a:solidFill>
                 <a:latin typeface="Calibri" panose="020F0502020204030204" pitchFamily="34" charset="0"/>
-                <a:ea typeface="宋体" panose="02010600030101010101" pitchFamily="2" charset="-122"/>
+                <a:ea typeface="宋体" pitchFamily="2" charset="-122"/>
               </a:defRPr>
             </a:lvl6pPr>
             <a:lvl7pPr marL="2971800" indent="-228600" eaLnBrk="0" fontAlgn="base" hangingPunct="0">
@@ -28354,7 +28269,7 @@
                   <a:schemeClr val="tx1"/>
                 </a:solidFill>
                 <a:latin typeface="Calibri" panose="020F0502020204030204" pitchFamily="34" charset="0"/>
-                <a:ea typeface="宋体" panose="02010600030101010101" pitchFamily="2" charset="-122"/>
+                <a:ea typeface="宋体" pitchFamily="2" charset="-122"/>
               </a:defRPr>
             </a:lvl7pPr>
             <a:lvl8pPr marL="3429000" indent="-228600" eaLnBrk="0" fontAlgn="base" hangingPunct="0">
@@ -28369,7 +28284,7 @@
                   <a:schemeClr val="tx1"/>
                 </a:solidFill>
                 <a:latin typeface="Calibri" panose="020F0502020204030204" pitchFamily="34" charset="0"/>
-                <a:ea typeface="宋体" panose="02010600030101010101" pitchFamily="2" charset="-122"/>
+                <a:ea typeface="宋体" pitchFamily="2" charset="-122"/>
               </a:defRPr>
             </a:lvl8pPr>
             <a:lvl9pPr marL="3886200" indent="-228600" eaLnBrk="0" fontAlgn="base" hangingPunct="0">
@@ -28384,7 +28299,7 @@
                   <a:schemeClr val="tx1"/>
                 </a:solidFill>
                 <a:latin typeface="Calibri" panose="020F0502020204030204" pitchFamily="34" charset="0"/>
-                <a:ea typeface="宋体" panose="02010600030101010101" pitchFamily="2" charset="-122"/>
+                <a:ea typeface="宋体" pitchFamily="2" charset="-122"/>
               </a:defRPr>
             </a:lvl9pPr>
           </a:lstStyle>
@@ -28893,7 +28808,7 @@
                   <a:schemeClr val="tx1"/>
                 </a:solidFill>
                 <a:latin typeface="Calibri" panose="020F0502020204030204" pitchFamily="34" charset="0"/>
-                <a:ea typeface="宋体" panose="02010600030101010101" pitchFamily="2" charset="-122"/>
+                <a:ea typeface="宋体" pitchFamily="2" charset="-122"/>
               </a:defRPr>
             </a:lvl1pPr>
             <a:lvl2pPr marL="742950" indent="-285750">
@@ -28902,7 +28817,7 @@
                   <a:schemeClr val="tx1"/>
                 </a:solidFill>
                 <a:latin typeface="Calibri" panose="020F0502020204030204" pitchFamily="34" charset="0"/>
-                <a:ea typeface="宋体" panose="02010600030101010101" pitchFamily="2" charset="-122"/>
+                <a:ea typeface="宋体" pitchFamily="2" charset="-122"/>
               </a:defRPr>
             </a:lvl2pPr>
             <a:lvl3pPr marL="1143000" indent="-228600">
@@ -28911,7 +28826,7 @@
                   <a:schemeClr val="tx1"/>
                 </a:solidFill>
                 <a:latin typeface="Calibri" panose="020F0502020204030204" pitchFamily="34" charset="0"/>
-                <a:ea typeface="宋体" panose="02010600030101010101" pitchFamily="2" charset="-122"/>
+                <a:ea typeface="宋体" pitchFamily="2" charset="-122"/>
               </a:defRPr>
             </a:lvl3pPr>
             <a:lvl4pPr marL="1600200" indent="-228600">
@@ -28920,7 +28835,7 @@
                   <a:schemeClr val="tx1"/>
                 </a:solidFill>
                 <a:latin typeface="Calibri" panose="020F0502020204030204" pitchFamily="34" charset="0"/>
-                <a:ea typeface="宋体" panose="02010600030101010101" pitchFamily="2" charset="-122"/>
+                <a:ea typeface="宋体" pitchFamily="2" charset="-122"/>
               </a:defRPr>
             </a:lvl4pPr>
             <a:lvl5pPr marL="2057400" indent="-228600">
@@ -28929,7 +28844,7 @@
                   <a:schemeClr val="tx1"/>
                 </a:solidFill>
                 <a:latin typeface="Calibri" panose="020F0502020204030204" pitchFamily="34" charset="0"/>
-                <a:ea typeface="宋体" panose="02010600030101010101" pitchFamily="2" charset="-122"/>
+                <a:ea typeface="宋体" pitchFamily="2" charset="-122"/>
               </a:defRPr>
             </a:lvl5pPr>
             <a:lvl6pPr marL="2514600" indent="-228600" eaLnBrk="0" fontAlgn="base" hangingPunct="0">
@@ -28944,7 +28859,7 @@
                   <a:schemeClr val="tx1"/>
                 </a:solidFill>
                 <a:latin typeface="Calibri" panose="020F0502020204030204" pitchFamily="34" charset="0"/>
-                <a:ea typeface="宋体" panose="02010600030101010101" pitchFamily="2" charset="-122"/>
+                <a:ea typeface="宋体" pitchFamily="2" charset="-122"/>
               </a:defRPr>
             </a:lvl6pPr>
             <a:lvl7pPr marL="2971800" indent="-228600" eaLnBrk="0" fontAlgn="base" hangingPunct="0">
@@ -28959,7 +28874,7 @@
                   <a:schemeClr val="tx1"/>
                 </a:solidFill>
                 <a:latin typeface="Calibri" panose="020F0502020204030204" pitchFamily="34" charset="0"/>
-                <a:ea typeface="宋体" panose="02010600030101010101" pitchFamily="2" charset="-122"/>
+                <a:ea typeface="宋体" pitchFamily="2" charset="-122"/>
               </a:defRPr>
             </a:lvl7pPr>
             <a:lvl8pPr marL="3429000" indent="-228600" eaLnBrk="0" fontAlgn="base" hangingPunct="0">
@@ -28974,7 +28889,7 @@
                   <a:schemeClr val="tx1"/>
                 </a:solidFill>
                 <a:latin typeface="Calibri" panose="020F0502020204030204" pitchFamily="34" charset="0"/>
-                <a:ea typeface="宋体" panose="02010600030101010101" pitchFamily="2" charset="-122"/>
+                <a:ea typeface="宋体" pitchFamily="2" charset="-122"/>
               </a:defRPr>
             </a:lvl8pPr>
             <a:lvl9pPr marL="3886200" indent="-228600" eaLnBrk="0" fontAlgn="base" hangingPunct="0">
@@ -28989,7 +28904,7 @@
                   <a:schemeClr val="tx1"/>
                 </a:solidFill>
                 <a:latin typeface="Calibri" panose="020F0502020204030204" pitchFamily="34" charset="0"/>
-                <a:ea typeface="宋体" panose="02010600030101010101" pitchFamily="2" charset="-122"/>
+                <a:ea typeface="宋体" pitchFamily="2" charset="-122"/>
               </a:defRPr>
             </a:lvl9pPr>
           </a:lstStyle>
@@ -29144,7 +29059,7 @@
                   <a:schemeClr val="tx1"/>
                 </a:solidFill>
                 <a:latin typeface="Calibri" panose="020F0502020204030204" pitchFamily="34" charset="0"/>
-                <a:ea typeface="宋体" panose="02010600030101010101" pitchFamily="2" charset="-122"/>
+                <a:ea typeface="宋体" pitchFamily="2" charset="-122"/>
               </a:defRPr>
             </a:lvl1pPr>
             <a:lvl2pPr marL="742950" indent="-285750">
@@ -29153,7 +29068,7 @@
                   <a:schemeClr val="tx1"/>
                 </a:solidFill>
                 <a:latin typeface="Calibri" panose="020F0502020204030204" pitchFamily="34" charset="0"/>
-                <a:ea typeface="宋体" panose="02010600030101010101" pitchFamily="2" charset="-122"/>
+                <a:ea typeface="宋体" pitchFamily="2" charset="-122"/>
               </a:defRPr>
             </a:lvl2pPr>
             <a:lvl3pPr marL="1143000" indent="-228600">
@@ -29162,7 +29077,7 @@
                   <a:schemeClr val="tx1"/>
                 </a:solidFill>
                 <a:latin typeface="Calibri" panose="020F0502020204030204" pitchFamily="34" charset="0"/>
-                <a:ea typeface="宋体" panose="02010600030101010101" pitchFamily="2" charset="-122"/>
+                <a:ea typeface="宋体" pitchFamily="2" charset="-122"/>
               </a:defRPr>
             </a:lvl3pPr>
             <a:lvl4pPr marL="1600200" indent="-228600">
@@ -29171,7 +29086,7 @@
                   <a:schemeClr val="tx1"/>
                 </a:solidFill>
                 <a:latin typeface="Calibri" panose="020F0502020204030204" pitchFamily="34" charset="0"/>
-                <a:ea typeface="宋体" panose="02010600030101010101" pitchFamily="2" charset="-122"/>
+                <a:ea typeface="宋体" pitchFamily="2" charset="-122"/>
               </a:defRPr>
             </a:lvl4pPr>
             <a:lvl5pPr marL="2057400" indent="-228600">
@@ -29180,7 +29095,7 @@
                   <a:schemeClr val="tx1"/>
                 </a:solidFill>
                 <a:latin typeface="Calibri" panose="020F0502020204030204" pitchFamily="34" charset="0"/>
-                <a:ea typeface="宋体" panose="02010600030101010101" pitchFamily="2" charset="-122"/>
+                <a:ea typeface="宋体" pitchFamily="2" charset="-122"/>
               </a:defRPr>
             </a:lvl5pPr>
             <a:lvl6pPr marL="2514600" indent="-228600" eaLnBrk="0" fontAlgn="base" hangingPunct="0">
@@ -29195,7 +29110,7 @@
                   <a:schemeClr val="tx1"/>
                 </a:solidFill>
                 <a:latin typeface="Calibri" panose="020F0502020204030204" pitchFamily="34" charset="0"/>
-                <a:ea typeface="宋体" panose="02010600030101010101" pitchFamily="2" charset="-122"/>
+                <a:ea typeface="宋体" pitchFamily="2" charset="-122"/>
               </a:defRPr>
             </a:lvl6pPr>
             <a:lvl7pPr marL="2971800" indent="-228600" eaLnBrk="0" fontAlgn="base" hangingPunct="0">
@@ -29210,7 +29125,7 @@
                   <a:schemeClr val="tx1"/>
                 </a:solidFill>
                 <a:latin typeface="Calibri" panose="020F0502020204030204" pitchFamily="34" charset="0"/>
-                <a:ea typeface="宋体" panose="02010600030101010101" pitchFamily="2" charset="-122"/>
+                <a:ea typeface="宋体" pitchFamily="2" charset="-122"/>
               </a:defRPr>
             </a:lvl7pPr>
             <a:lvl8pPr marL="3429000" indent="-228600" eaLnBrk="0" fontAlgn="base" hangingPunct="0">
@@ -29225,7 +29140,7 @@
                   <a:schemeClr val="tx1"/>
                 </a:solidFill>
                 <a:latin typeface="Calibri" panose="020F0502020204030204" pitchFamily="34" charset="0"/>
-                <a:ea typeface="宋体" panose="02010600030101010101" pitchFamily="2" charset="-122"/>
+                <a:ea typeface="宋体" pitchFamily="2" charset="-122"/>
               </a:defRPr>
             </a:lvl8pPr>
             <a:lvl9pPr marL="3886200" indent="-228600" eaLnBrk="0" fontAlgn="base" hangingPunct="0">
@@ -29240,7 +29155,7 @@
                   <a:schemeClr val="tx1"/>
                 </a:solidFill>
                 <a:latin typeface="Calibri" panose="020F0502020204030204" pitchFamily="34" charset="0"/>
-                <a:ea typeface="宋体" panose="02010600030101010101" pitchFamily="2" charset="-122"/>
+                <a:ea typeface="宋体" pitchFamily="2" charset="-122"/>
               </a:defRPr>
             </a:lvl9pPr>
           </a:lstStyle>
@@ -29335,7 +29250,7 @@
                   <a:schemeClr val="tx1"/>
                 </a:solidFill>
                 <a:latin typeface="Calibri" panose="020F0502020204030204" pitchFamily="34" charset="0"/>
-                <a:ea typeface="宋体" panose="02010600030101010101" pitchFamily="2" charset="-122"/>
+                <a:ea typeface="宋体" pitchFamily="2" charset="-122"/>
               </a:defRPr>
             </a:lvl1pPr>
             <a:lvl2pPr marL="742950" indent="-285750">
@@ -29344,7 +29259,7 @@
                   <a:schemeClr val="tx1"/>
                 </a:solidFill>
                 <a:latin typeface="Calibri" panose="020F0502020204030204" pitchFamily="34" charset="0"/>
-                <a:ea typeface="宋体" panose="02010600030101010101" pitchFamily="2" charset="-122"/>
+                <a:ea typeface="宋体" pitchFamily="2" charset="-122"/>
               </a:defRPr>
             </a:lvl2pPr>
             <a:lvl3pPr marL="1143000" indent="-228600">
@@ -29353,7 +29268,7 @@
                   <a:schemeClr val="tx1"/>
                 </a:solidFill>
                 <a:latin typeface="Calibri" panose="020F0502020204030204" pitchFamily="34" charset="0"/>
-                <a:ea typeface="宋体" panose="02010600030101010101" pitchFamily="2" charset="-122"/>
+                <a:ea typeface="宋体" pitchFamily="2" charset="-122"/>
               </a:defRPr>
             </a:lvl3pPr>
             <a:lvl4pPr marL="1600200" indent="-228600">
@@ -29362,7 +29277,7 @@
                   <a:schemeClr val="tx1"/>
                 </a:solidFill>
                 <a:latin typeface="Calibri" panose="020F0502020204030204" pitchFamily="34" charset="0"/>
-                <a:ea typeface="宋体" panose="02010600030101010101" pitchFamily="2" charset="-122"/>
+                <a:ea typeface="宋体" pitchFamily="2" charset="-122"/>
               </a:defRPr>
             </a:lvl4pPr>
             <a:lvl5pPr marL="2057400" indent="-228600">
@@ -29371,7 +29286,7 @@
                   <a:schemeClr val="tx1"/>
                 </a:solidFill>
                 <a:latin typeface="Calibri" panose="020F0502020204030204" pitchFamily="34" charset="0"/>
-                <a:ea typeface="宋体" panose="02010600030101010101" pitchFamily="2" charset="-122"/>
+                <a:ea typeface="宋体" pitchFamily="2" charset="-122"/>
               </a:defRPr>
             </a:lvl5pPr>
             <a:lvl6pPr marL="2514600" indent="-228600" eaLnBrk="0" fontAlgn="base" hangingPunct="0">
@@ -29386,7 +29301,7 @@
                   <a:schemeClr val="tx1"/>
                 </a:solidFill>
                 <a:latin typeface="Calibri" panose="020F0502020204030204" pitchFamily="34" charset="0"/>
-                <a:ea typeface="宋体" panose="02010600030101010101" pitchFamily="2" charset="-122"/>
+                <a:ea typeface="宋体" pitchFamily="2" charset="-122"/>
               </a:defRPr>
             </a:lvl6pPr>
             <a:lvl7pPr marL="2971800" indent="-228600" eaLnBrk="0" fontAlgn="base" hangingPunct="0">
@@ -29401,7 +29316,7 @@
                   <a:schemeClr val="tx1"/>
                 </a:solidFill>
                 <a:latin typeface="Calibri" panose="020F0502020204030204" pitchFamily="34" charset="0"/>
-                <a:ea typeface="宋体" panose="02010600030101010101" pitchFamily="2" charset="-122"/>
+                <a:ea typeface="宋体" pitchFamily="2" charset="-122"/>
               </a:defRPr>
             </a:lvl7pPr>
             <a:lvl8pPr marL="3429000" indent="-228600" eaLnBrk="0" fontAlgn="base" hangingPunct="0">
@@ -29416,7 +29331,7 @@
                   <a:schemeClr val="tx1"/>
                 </a:solidFill>
                 <a:latin typeface="Calibri" panose="020F0502020204030204" pitchFamily="34" charset="0"/>
-                <a:ea typeface="宋体" panose="02010600030101010101" pitchFamily="2" charset="-122"/>
+                <a:ea typeface="宋体" pitchFamily="2" charset="-122"/>
               </a:defRPr>
             </a:lvl8pPr>
             <a:lvl9pPr marL="3886200" indent="-228600" eaLnBrk="0" fontAlgn="base" hangingPunct="0">
@@ -29431,7 +29346,7 @@
                   <a:schemeClr val="tx1"/>
                 </a:solidFill>
                 <a:latin typeface="Calibri" panose="020F0502020204030204" pitchFamily="34" charset="0"/>
-                <a:ea typeface="宋体" panose="02010600030101010101" pitchFamily="2" charset="-122"/>
+                <a:ea typeface="宋体" pitchFamily="2" charset="-122"/>
               </a:defRPr>
             </a:lvl9pPr>
           </a:lstStyle>
@@ -29661,7 +29576,7 @@
                 </a:solidFill>
                 <a:latin typeface="微软雅黑" panose="020B0503020204020204" pitchFamily="34" charset="-122"/>
                 <a:ea typeface="微软雅黑" panose="020B0503020204020204" pitchFamily="34" charset="-122"/>
-                <a:cs typeface="Courier New" panose="02070309020205020404" pitchFamily="49" charset="0"/>
+                <a:cs typeface="Courier New" panose="02070409020205090404" pitchFamily="49" charset="0"/>
               </a:rPr>
               <a:t>@One注解实现数据表的一对一关联查询</a:t>
             </a:r>
@@ -29683,7 +29598,7 @@
                 </a:solidFill>
                 <a:latin typeface="微软雅黑" panose="020B0503020204020204" pitchFamily="34" charset="-122"/>
                 <a:ea typeface="微软雅黑" panose="020B0503020204020204" pitchFamily="34" charset="-122"/>
-                <a:cs typeface="Courier New" panose="02070309020205020404" pitchFamily="49" charset="0"/>
+                <a:cs typeface="Courier New" panose="02070409020205090404" pitchFamily="49" charset="0"/>
               </a:rPr>
               <a:t>与@Results注解一起使用</a:t>
             </a:r>
@@ -29705,7 +29620,7 @@
                 </a:solidFill>
                 <a:latin typeface="微软雅黑" panose="020B0503020204020204" pitchFamily="34" charset="-122"/>
                 <a:ea typeface="微软雅黑" panose="020B0503020204020204" pitchFamily="34" charset="-122"/>
-                <a:cs typeface="Courier New" panose="02070309020205020404" pitchFamily="49" charset="0"/>
+                <a:cs typeface="Courier New" panose="02070409020205090404" pitchFamily="49" charset="0"/>
               </a:rPr>
               <a:t>常见的属性</a:t>
             </a:r>
@@ -29756,7 +29671,7 @@
                 </a:solidFill>
                 <a:latin typeface="微软雅黑" panose="020B0503020204020204" pitchFamily="34" charset="-122"/>
                 <a:ea typeface="微软雅黑" panose="020B0503020204020204" pitchFamily="34" charset="-122"/>
-                <a:cs typeface="Courier New" panose="02070309020205020404" pitchFamily="49" charset="0"/>
+                <a:cs typeface="Courier New" panose="02070409020205090404" pitchFamily="49" charset="0"/>
               </a:rPr>
               <a:t>加载策略</a:t>
             </a:r>
@@ -29807,7 +29722,7 @@
                 </a:solidFill>
                 <a:latin typeface="微软雅黑" panose="020B0503020204020204" pitchFamily="34" charset="-122"/>
                 <a:ea typeface="微软雅黑" panose="020B0503020204020204" pitchFamily="34" charset="-122"/>
-                <a:cs typeface="Courier New" panose="02070309020205020404" pitchFamily="49" charset="0"/>
+                <a:cs typeface="Courier New" panose="02070409020205090404" pitchFamily="49" charset="0"/>
               </a:rPr>
               <a:t>关联查询的SQL语句或方法</a:t>
             </a:r>
@@ -30028,9 +29943,9 @@
                 <a:solidFill>
                   <a:schemeClr val="lt1"/>
                 </a:solidFill>
-                <a:latin typeface="Arial" panose="020B0604020202020204" pitchFamily="34" charset="0"/>
+                <a:latin typeface="Arial" panose="020B0604020202090204" pitchFamily="34" charset="0"/>
                 <a:ea typeface="思源黑体 CN Normal" panose="020B0400000000000000" pitchFamily="34" charset="-122"/>
-                <a:sym typeface="Arial" panose="020B0604020202020204" pitchFamily="34" charset="0"/>
+                <a:sym typeface="Arial" panose="020B0604020202090204" pitchFamily="34" charset="0"/>
               </a:endParaRPr>
             </a:p>
           </p:txBody>
@@ -30085,16 +30000,16 @@
             <a:p>
               <a:r>
                 <a:rPr sz="1700" dirty="0">
-                  <a:latin typeface="Arial" panose="020B0604020202020204" pitchFamily="34" charset="0"/>
+                  <a:latin typeface="Arial" panose="020B0604020202090204" pitchFamily="34" charset="0"/>
                   <a:ea typeface="思源黑体 CN Normal" panose="020B0400000000000000" pitchFamily="34" charset="-122"/>
-                  <a:sym typeface="Arial" panose="020B0604020202020204" pitchFamily="34" charset="0"/>
+                  <a:sym typeface="Arial" panose="020B0604020202090204" pitchFamily="34" charset="0"/>
                 </a:rPr>
                 <a:t>1.修改Mapper接口</a:t>
               </a:r>
               <a:endParaRPr sz="1700" dirty="0">
-                <a:latin typeface="Arial" panose="020B0604020202020204" pitchFamily="34" charset="0"/>
+                <a:latin typeface="Arial" panose="020B0604020202090204" pitchFamily="34" charset="0"/>
                 <a:ea typeface="思源黑体 CN Normal" panose="020B0400000000000000" pitchFamily="34" charset="-122"/>
-                <a:sym typeface="Arial" panose="020B0604020202020204" pitchFamily="34" charset="0"/>
+                <a:sym typeface="Arial" panose="020B0604020202090204" pitchFamily="34" charset="0"/>
               </a:endParaRPr>
             </a:p>
           </p:txBody>
@@ -30154,7 +30069,7 @@
                 </a:solidFill>
                 <a:latin typeface="微软雅黑" panose="020B0503020204020204" pitchFamily="34" charset="-122"/>
                 <a:ea typeface="微软雅黑" panose="020B0503020204020204" pitchFamily="34" charset="-122"/>
-                <a:cs typeface="Courier New" panose="02070309020205020404" pitchFamily="49" charset="0"/>
+                <a:cs typeface="Courier New" panose="02070409020205090404" pitchFamily="49" charset="0"/>
               </a:rPr>
               <a:t>PersonMapper接口</a:t>
             </a:r>
@@ -30176,7 +30091,7 @@
                 </a:solidFill>
                 <a:latin typeface="微软雅黑" panose="020B0503020204020204" pitchFamily="34" charset="-122"/>
                 <a:ea typeface="微软雅黑" panose="020B0503020204020204" pitchFamily="34" charset="-122"/>
-                <a:cs typeface="Courier New" panose="02070309020205020404" pitchFamily="49" charset="0"/>
+                <a:cs typeface="Courier New" panose="02070409020205090404" pitchFamily="49" charset="0"/>
               </a:rPr>
               <a:t>getIDCardByCardId()的方法</a:t>
             </a:r>
@@ -30198,7 +30113,7 @@
                 </a:solidFill>
                 <a:latin typeface="微软雅黑" panose="020B0503020204020204" pitchFamily="34" charset="-122"/>
                 <a:ea typeface="微软雅黑" panose="020B0503020204020204" pitchFamily="34" charset="-122"/>
-                <a:cs typeface="Courier New" panose="02070309020205020404" pitchFamily="49" charset="0"/>
+                <a:cs typeface="Courier New" panose="02070409020205090404" pitchFamily="49" charset="0"/>
               </a:rPr>
               <a:t>注解的方式修改</a:t>
             </a:r>
@@ -30220,7 +30135,7 @@
                 </a:solidFill>
                 <a:latin typeface="微软雅黑" panose="020B0503020204020204" pitchFamily="34" charset="-122"/>
                 <a:ea typeface="微软雅黑" panose="020B0503020204020204" pitchFamily="34" charset="-122"/>
-                <a:cs typeface="Courier New" panose="02070309020205020404" pitchFamily="49" charset="0"/>
+                <a:cs typeface="Courier New" panose="02070409020205090404" pitchFamily="49" charset="0"/>
               </a:rPr>
               <a:t>方法getPersonById()</a:t>
             </a:r>
@@ -30242,7 +30157,7 @@
                 </a:solidFill>
                 <a:latin typeface="微软雅黑" panose="020B0503020204020204" pitchFamily="34" charset="-122"/>
                 <a:ea typeface="微软雅黑" panose="020B0503020204020204" pitchFamily="34" charset="-122"/>
-                <a:cs typeface="Courier New" panose="02070309020205020404" pitchFamily="49" charset="0"/>
+                <a:cs typeface="Courier New" panose="02070409020205090404" pitchFamily="49" charset="0"/>
               </a:rPr>
               <a:t>@Select注解指定查询的SQL语句</a:t>
             </a:r>
@@ -30264,7 +30179,7 @@
                 </a:solidFill>
                 <a:latin typeface="微软雅黑" panose="020B0503020204020204" pitchFamily="34" charset="-122"/>
                 <a:ea typeface="微软雅黑" panose="020B0503020204020204" pitchFamily="34" charset="-122"/>
-                <a:cs typeface="Courier New" panose="02070309020205020404" pitchFamily="49" charset="0"/>
+                <a:cs typeface="Courier New" panose="02070409020205090404" pitchFamily="49" charset="0"/>
               </a:rPr>
               <a:t>@Results注解</a:t>
             </a:r>
@@ -30286,7 +30201,7 @@
                 </a:solidFill>
                 <a:latin typeface="微软雅黑" panose="020B0503020204020204" pitchFamily="34" charset="-122"/>
                 <a:ea typeface="微软雅黑" panose="020B0503020204020204" pitchFamily="34" charset="-122"/>
-                <a:cs typeface="Courier New" panose="02070309020205020404" pitchFamily="49" charset="0"/>
+                <a:cs typeface="Courier New" panose="02070409020205090404" pitchFamily="49" charset="0"/>
               </a:rPr>
               <a:t>@One注解中的select属性</a:t>
             </a:r>
@@ -30308,7 +30223,7 @@
                 </a:solidFill>
                 <a:latin typeface="微软雅黑" panose="020B0503020204020204" pitchFamily="34" charset="-122"/>
                 <a:ea typeface="微软雅黑" panose="020B0503020204020204" pitchFamily="34" charset="-122"/>
-                <a:cs typeface="Courier New" panose="02070309020205020404" pitchFamily="49" charset="0"/>
+                <a:cs typeface="Courier New" panose="02070409020205090404" pitchFamily="49" charset="0"/>
               </a:rPr>
               <a:t>指定</a:t>
             </a:r>
@@ -30330,7 +30245,7 @@
                 </a:solidFill>
                 <a:latin typeface="微软雅黑" panose="020B0503020204020204" pitchFamily="34" charset="-122"/>
                 <a:ea typeface="微软雅黑" panose="020B0503020204020204" pitchFamily="34" charset="-122"/>
-                <a:cs typeface="Courier New" panose="02070309020205020404" pitchFamily="49" charset="0"/>
+                <a:cs typeface="Courier New" panose="02070409020205090404" pitchFamily="49" charset="0"/>
               </a:rPr>
               <a:t>getIDCardByCardId()，从而进行关联查询</a:t>
             </a:r>
@@ -30680,7 +30595,7 @@
                 </a:solidFill>
                 <a:latin typeface="微软雅黑" panose="020B0503020204020204" pitchFamily="34" charset="-122"/>
                 <a:ea typeface="微软雅黑" panose="020B0503020204020204" pitchFamily="34" charset="-122"/>
-                <a:cs typeface="Courier New" panose="02070309020205020404" pitchFamily="49" charset="0"/>
+                <a:cs typeface="Courier New" panose="02070409020205090404" pitchFamily="49" charset="0"/>
               </a:rPr>
               <a:t>基于注解实现查询人员信息时，关联查询对应的身份证信息</a:t>
             </a:r>
@@ -30763,7 +30678,7 @@
               <a:spcBef>
                 <a:spcPct val="20000"/>
               </a:spcBef>
-              <a:buFont typeface="Arial" panose="020B0604020202020204" pitchFamily="34" charset="0"/>
+              <a:buFont typeface="Arial" panose="020B0604020202090204" pitchFamily="34" charset="0"/>
               <a:buChar char="•"/>
               <a:defRPr sz="3200" kern="1200">
                 <a:solidFill>
@@ -30778,7 +30693,7 @@
               <a:spcBef>
                 <a:spcPct val="20000"/>
               </a:spcBef>
-              <a:buFont typeface="Arial" panose="020B0604020202020204" pitchFamily="34" charset="0"/>
+              <a:buFont typeface="Arial" panose="020B0604020202090204" pitchFamily="34" charset="0"/>
               <a:buChar char="–"/>
               <a:defRPr sz="2800" kern="1200">
                 <a:solidFill>
@@ -30793,7 +30708,7 @@
               <a:spcBef>
                 <a:spcPct val="20000"/>
               </a:spcBef>
-              <a:buFont typeface="Arial" panose="020B0604020202020204" pitchFamily="34" charset="0"/>
+              <a:buFont typeface="Arial" panose="020B0604020202090204" pitchFamily="34" charset="0"/>
               <a:buChar char="•"/>
               <a:defRPr sz="2400" kern="1200">
                 <a:solidFill>
@@ -30808,7 +30723,7 @@
               <a:spcBef>
                 <a:spcPct val="20000"/>
               </a:spcBef>
-              <a:buFont typeface="Arial" panose="020B0604020202020204" pitchFamily="34" charset="0"/>
+              <a:buFont typeface="Arial" panose="020B0604020202090204" pitchFamily="34" charset="0"/>
               <a:buChar char="–"/>
               <a:defRPr sz="2000" kern="1200">
                 <a:solidFill>
@@ -30823,7 +30738,7 @@
               <a:spcBef>
                 <a:spcPct val="20000"/>
               </a:spcBef>
-              <a:buFont typeface="Arial" panose="020B0604020202020204" pitchFamily="34" charset="0"/>
+              <a:buFont typeface="Arial" panose="020B0604020202090204" pitchFamily="34" charset="0"/>
               <a:buChar char="»"/>
               <a:defRPr sz="2000" kern="1200">
                 <a:solidFill>
@@ -30838,7 +30753,7 @@
               <a:spcBef>
                 <a:spcPct val="20000"/>
               </a:spcBef>
-              <a:buFont typeface="Arial" panose="020B0604020202020204" pitchFamily="34" charset="0"/>
+              <a:buFont typeface="Arial" panose="020B0604020202090204" pitchFamily="34" charset="0"/>
               <a:buChar char="•"/>
               <a:defRPr sz="2000" kern="1200">
                 <a:solidFill>
@@ -30853,7 +30768,7 @@
               <a:spcBef>
                 <a:spcPct val="20000"/>
               </a:spcBef>
-              <a:buFont typeface="Arial" panose="020B0604020202020204" pitchFamily="34" charset="0"/>
+              <a:buFont typeface="Arial" panose="020B0604020202090204" pitchFamily="34" charset="0"/>
               <a:buChar char="•"/>
               <a:defRPr sz="2000" kern="1200">
                 <a:solidFill>
@@ -30868,7 +30783,7 @@
               <a:spcBef>
                 <a:spcPct val="20000"/>
               </a:spcBef>
-              <a:buFont typeface="Arial" panose="020B0604020202020204" pitchFamily="34" charset="0"/>
+              <a:buFont typeface="Arial" panose="020B0604020202090204" pitchFamily="34" charset="0"/>
               <a:buChar char="•"/>
               <a:defRPr sz="2000" kern="1200">
                 <a:solidFill>
@@ -30883,7 +30798,7 @@
               <a:spcBef>
                 <a:spcPct val="20000"/>
               </a:spcBef>
-              <a:buFont typeface="Arial" panose="020B0604020202020204" pitchFamily="34" charset="0"/>
+              <a:buFont typeface="Arial" panose="020B0604020202090204" pitchFamily="34" charset="0"/>
               <a:buChar char="•"/>
               <a:defRPr sz="2000" kern="1200">
                 <a:solidFill>
@@ -30998,7 +30913,7 @@
                   <a:schemeClr val="tx1"/>
                 </a:solidFill>
                 <a:latin typeface="Calibri" panose="020F0502020204030204" pitchFamily="34" charset="0"/>
-                <a:ea typeface="宋体" panose="02010600030101010101" pitchFamily="2" charset="-122"/>
+                <a:ea typeface="宋体" pitchFamily="2" charset="-122"/>
               </a:defRPr>
             </a:lvl1pPr>
             <a:lvl2pPr marL="742950" indent="-285750">
@@ -31007,7 +30922,7 @@
                   <a:schemeClr val="tx1"/>
                 </a:solidFill>
                 <a:latin typeface="Calibri" panose="020F0502020204030204" pitchFamily="34" charset="0"/>
-                <a:ea typeface="宋体" panose="02010600030101010101" pitchFamily="2" charset="-122"/>
+                <a:ea typeface="宋体" pitchFamily="2" charset="-122"/>
               </a:defRPr>
             </a:lvl2pPr>
             <a:lvl3pPr marL="1143000" indent="-228600">
@@ -31016,7 +30931,7 @@
                   <a:schemeClr val="tx1"/>
                 </a:solidFill>
                 <a:latin typeface="Calibri" panose="020F0502020204030204" pitchFamily="34" charset="0"/>
-                <a:ea typeface="宋体" panose="02010600030101010101" pitchFamily="2" charset="-122"/>
+                <a:ea typeface="宋体" pitchFamily="2" charset="-122"/>
               </a:defRPr>
             </a:lvl3pPr>
             <a:lvl4pPr marL="1600200" indent="-228600">
@@ -31025,7 +30940,7 @@
                   <a:schemeClr val="tx1"/>
                 </a:solidFill>
                 <a:latin typeface="Calibri" panose="020F0502020204030204" pitchFamily="34" charset="0"/>
-                <a:ea typeface="宋体" panose="02010600030101010101" pitchFamily="2" charset="-122"/>
+                <a:ea typeface="宋体" pitchFamily="2" charset="-122"/>
               </a:defRPr>
             </a:lvl4pPr>
             <a:lvl5pPr marL="2057400" indent="-228600">
@@ -31034,7 +30949,7 @@
                   <a:schemeClr val="tx1"/>
                 </a:solidFill>
                 <a:latin typeface="Calibri" panose="020F0502020204030204" pitchFamily="34" charset="0"/>
-                <a:ea typeface="宋体" panose="02010600030101010101" pitchFamily="2" charset="-122"/>
+                <a:ea typeface="宋体" pitchFamily="2" charset="-122"/>
               </a:defRPr>
             </a:lvl5pPr>
             <a:lvl6pPr marL="2514600" indent="-228600" eaLnBrk="0" fontAlgn="base" hangingPunct="0">
@@ -31049,7 +30964,7 @@
                   <a:schemeClr val="tx1"/>
                 </a:solidFill>
                 <a:latin typeface="Calibri" panose="020F0502020204030204" pitchFamily="34" charset="0"/>
-                <a:ea typeface="宋体" panose="02010600030101010101" pitchFamily="2" charset="-122"/>
+                <a:ea typeface="宋体" pitchFamily="2" charset="-122"/>
               </a:defRPr>
             </a:lvl6pPr>
             <a:lvl7pPr marL="2971800" indent="-228600" eaLnBrk="0" fontAlgn="base" hangingPunct="0">
@@ -31064,7 +30979,7 @@
                   <a:schemeClr val="tx1"/>
                 </a:solidFill>
                 <a:latin typeface="Calibri" panose="020F0502020204030204" pitchFamily="34" charset="0"/>
-                <a:ea typeface="宋体" panose="02010600030101010101" pitchFamily="2" charset="-122"/>
+                <a:ea typeface="宋体" pitchFamily="2" charset="-122"/>
               </a:defRPr>
             </a:lvl7pPr>
             <a:lvl8pPr marL="3429000" indent="-228600" eaLnBrk="0" fontAlgn="base" hangingPunct="0">
@@ -31079,7 +30994,7 @@
                   <a:schemeClr val="tx1"/>
                 </a:solidFill>
                 <a:latin typeface="Calibri" panose="020F0502020204030204" pitchFamily="34" charset="0"/>
-                <a:ea typeface="宋体" panose="02010600030101010101" pitchFamily="2" charset="-122"/>
+                <a:ea typeface="宋体" pitchFamily="2" charset="-122"/>
               </a:defRPr>
             </a:lvl8pPr>
             <a:lvl9pPr marL="3886200" indent="-228600" eaLnBrk="0" fontAlgn="base" hangingPunct="0">
@@ -31094,7 +31009,7 @@
                   <a:schemeClr val="tx1"/>
                 </a:solidFill>
                 <a:latin typeface="Calibri" panose="020F0502020204030204" pitchFamily="34" charset="0"/>
-                <a:ea typeface="宋体" panose="02010600030101010101" pitchFamily="2" charset="-122"/>
+                <a:ea typeface="宋体" pitchFamily="2" charset="-122"/>
               </a:defRPr>
             </a:lvl9pPr>
           </a:lstStyle>
@@ -31713,9 +31628,9 @@
                 <a:solidFill>
                   <a:schemeClr val="lt1"/>
                 </a:solidFill>
-                <a:latin typeface="Arial" panose="020B0604020202020204" pitchFamily="34" charset="0"/>
+                <a:latin typeface="Arial" panose="020B0604020202090204" pitchFamily="34" charset="0"/>
                 <a:ea typeface="思源黑体 CN Normal" panose="020B0400000000000000" pitchFamily="34" charset="-122"/>
-                <a:sym typeface="Arial" panose="020B0604020202020204" pitchFamily="34" charset="0"/>
+                <a:sym typeface="Arial" panose="020B0604020202090204" pitchFamily="34" charset="0"/>
               </a:endParaRPr>
             </a:p>
           </p:txBody>
@@ -31770,16 +31685,16 @@
             <a:p>
               <a:r>
                 <a:rPr sz="1700" dirty="0">
-                  <a:latin typeface="Arial" panose="020B0604020202020204" pitchFamily="34" charset="0"/>
+                  <a:latin typeface="Arial" panose="020B0604020202090204" pitchFamily="34" charset="0"/>
                   <a:ea typeface="思源黑体 CN Normal" panose="020B0400000000000000" pitchFamily="34" charset="-122"/>
-                  <a:sym typeface="Arial" panose="020B0604020202020204" pitchFamily="34" charset="0"/>
+                  <a:sym typeface="Arial" panose="020B0604020202090204" pitchFamily="34" charset="0"/>
                 </a:rPr>
                 <a:t>2.测试效果</a:t>
               </a:r>
               <a:endParaRPr sz="1700" dirty="0">
-                <a:latin typeface="Arial" panose="020B0604020202020204" pitchFamily="34" charset="0"/>
+                <a:latin typeface="Arial" panose="020B0604020202090204" pitchFamily="34" charset="0"/>
                 <a:ea typeface="思源黑体 CN Normal" panose="020B0400000000000000" pitchFamily="34" charset="-122"/>
-                <a:sym typeface="Arial" panose="020B0604020202020204" pitchFamily="34" charset="0"/>
+                <a:sym typeface="Arial" panose="020B0604020202090204" pitchFamily="34" charset="0"/>
               </a:endParaRPr>
             </a:p>
           </p:txBody>
@@ -31828,7 +31743,7 @@
                 </a:solidFill>
                 <a:latin typeface="微软雅黑" panose="020B0503020204020204" pitchFamily="34" charset="-122"/>
                 <a:ea typeface="微软雅黑" panose="020B0503020204020204" pitchFamily="34" charset="-122"/>
-                <a:cs typeface="Courier New" panose="02070309020205020404" pitchFamily="49" charset="0"/>
+                <a:cs typeface="Courier New" panose="02070409020205090404" pitchFamily="49" charset="0"/>
               </a:rPr>
               <a:t>运行</a:t>
             </a:r>
@@ -31850,7 +31765,7 @@
                 </a:solidFill>
                 <a:latin typeface="微软雅黑" panose="020B0503020204020204" pitchFamily="34" charset="-122"/>
                 <a:ea typeface="微软雅黑" panose="020B0503020204020204" pitchFamily="34" charset="-122"/>
-                <a:cs typeface="Courier New" panose="02070309020205020404" pitchFamily="49" charset="0"/>
+                <a:cs typeface="Courier New" panose="02070409020205090404" pitchFamily="49" charset="0"/>
               </a:rPr>
               <a:t>associationTest()方法</a:t>
             </a:r>
@@ -31872,7 +31787,7 @@
                 </a:solidFill>
                 <a:latin typeface="微软雅黑" panose="020B0503020204020204" pitchFamily="34" charset="-122"/>
                 <a:ea typeface="微软雅黑" panose="020B0503020204020204" pitchFamily="34" charset="-122"/>
-                <a:cs typeface="Courier New" panose="02070309020205020404" pitchFamily="49" charset="0"/>
+                <a:cs typeface="Courier New" panose="02070409020205090404" pitchFamily="49" charset="0"/>
               </a:rPr>
               <a:t>查询id为1的人员信息</a:t>
             </a:r>
@@ -32131,7 +32046,7 @@
                   <a:schemeClr val="tx1"/>
                 </a:solidFill>
                 <a:latin typeface="Calibri" panose="020F0502020204030204" pitchFamily="34" charset="0"/>
-                <a:ea typeface="宋体" panose="02010600030101010101" pitchFamily="2" charset="-122"/>
+                <a:ea typeface="宋体" pitchFamily="2" charset="-122"/>
               </a:defRPr>
             </a:lvl1pPr>
             <a:lvl2pPr marL="742950" indent="-285750">
@@ -32140,7 +32055,7 @@
                   <a:schemeClr val="tx1"/>
                 </a:solidFill>
                 <a:latin typeface="Calibri" panose="020F0502020204030204" pitchFamily="34" charset="0"/>
-                <a:ea typeface="宋体" panose="02010600030101010101" pitchFamily="2" charset="-122"/>
+                <a:ea typeface="宋体" pitchFamily="2" charset="-122"/>
               </a:defRPr>
             </a:lvl2pPr>
             <a:lvl3pPr marL="1143000" indent="-228600">
@@ -32149,7 +32064,7 @@
                   <a:schemeClr val="tx1"/>
                 </a:solidFill>
                 <a:latin typeface="Calibri" panose="020F0502020204030204" pitchFamily="34" charset="0"/>
-                <a:ea typeface="宋体" panose="02010600030101010101" pitchFamily="2" charset="-122"/>
+                <a:ea typeface="宋体" pitchFamily="2" charset="-122"/>
               </a:defRPr>
             </a:lvl3pPr>
             <a:lvl4pPr marL="1600200" indent="-228600">
@@ -32158,7 +32073,7 @@
                   <a:schemeClr val="tx1"/>
                 </a:solidFill>
                 <a:latin typeface="Calibri" panose="020F0502020204030204" pitchFamily="34" charset="0"/>
-                <a:ea typeface="宋体" panose="02010600030101010101" pitchFamily="2" charset="-122"/>
+                <a:ea typeface="宋体" pitchFamily="2" charset="-122"/>
               </a:defRPr>
             </a:lvl4pPr>
             <a:lvl5pPr marL="2057400" indent="-228600">
@@ -32167,7 +32082,7 @@
                   <a:schemeClr val="tx1"/>
                 </a:solidFill>
                 <a:latin typeface="Calibri" panose="020F0502020204030204" pitchFamily="34" charset="0"/>
-                <a:ea typeface="宋体" panose="02010600030101010101" pitchFamily="2" charset="-122"/>
+                <a:ea typeface="宋体" pitchFamily="2" charset="-122"/>
               </a:defRPr>
             </a:lvl5pPr>
             <a:lvl6pPr marL="2514600" indent="-228600" eaLnBrk="0" fontAlgn="base" hangingPunct="0">
@@ -32182,7 +32097,7 @@
                   <a:schemeClr val="tx1"/>
                 </a:solidFill>
                 <a:latin typeface="Calibri" panose="020F0502020204030204" pitchFamily="34" charset="0"/>
-                <a:ea typeface="宋体" panose="02010600030101010101" pitchFamily="2" charset="-122"/>
+                <a:ea typeface="宋体" pitchFamily="2" charset="-122"/>
               </a:defRPr>
             </a:lvl6pPr>
             <a:lvl7pPr marL="2971800" indent="-228600" eaLnBrk="0" fontAlgn="base" hangingPunct="0">
@@ -32197,7 +32112,7 @@
                   <a:schemeClr val="tx1"/>
                 </a:solidFill>
                 <a:latin typeface="Calibri" panose="020F0502020204030204" pitchFamily="34" charset="0"/>
-                <a:ea typeface="宋体" panose="02010600030101010101" pitchFamily="2" charset="-122"/>
+                <a:ea typeface="宋体" pitchFamily="2" charset="-122"/>
               </a:defRPr>
             </a:lvl7pPr>
             <a:lvl8pPr marL="3429000" indent="-228600" eaLnBrk="0" fontAlgn="base" hangingPunct="0">
@@ -32212,7 +32127,7 @@
                   <a:schemeClr val="tx1"/>
                 </a:solidFill>
                 <a:latin typeface="Calibri" panose="020F0502020204030204" pitchFamily="34" charset="0"/>
-                <a:ea typeface="宋体" panose="02010600030101010101" pitchFamily="2" charset="-122"/>
+                <a:ea typeface="宋体" pitchFamily="2" charset="-122"/>
               </a:defRPr>
             </a:lvl8pPr>
             <a:lvl9pPr marL="3886200" indent="-228600" eaLnBrk="0" fontAlgn="base" hangingPunct="0">
@@ -32227,7 +32142,7 @@
                   <a:schemeClr val="tx1"/>
                 </a:solidFill>
                 <a:latin typeface="Calibri" panose="020F0502020204030204" pitchFamily="34" charset="0"/>
-                <a:ea typeface="宋体" panose="02010600030101010101" pitchFamily="2" charset="-122"/>
+                <a:ea typeface="宋体" pitchFamily="2" charset="-122"/>
               </a:defRPr>
             </a:lvl9pPr>
           </a:lstStyle>
@@ -32382,7 +32297,7 @@
                   <a:schemeClr val="tx1"/>
                 </a:solidFill>
                 <a:latin typeface="Calibri" panose="020F0502020204030204" pitchFamily="34" charset="0"/>
-                <a:ea typeface="宋体" panose="02010600030101010101" pitchFamily="2" charset="-122"/>
+                <a:ea typeface="宋体" pitchFamily="2" charset="-122"/>
               </a:defRPr>
             </a:lvl1pPr>
             <a:lvl2pPr marL="742950" indent="-285750">
@@ -32391,7 +32306,7 @@
                   <a:schemeClr val="tx1"/>
                 </a:solidFill>
                 <a:latin typeface="Calibri" panose="020F0502020204030204" pitchFamily="34" charset="0"/>
-                <a:ea typeface="宋体" panose="02010600030101010101" pitchFamily="2" charset="-122"/>
+                <a:ea typeface="宋体" pitchFamily="2" charset="-122"/>
               </a:defRPr>
             </a:lvl2pPr>
             <a:lvl3pPr marL="1143000" indent="-228600">
@@ -32400,7 +32315,7 @@
                   <a:schemeClr val="tx1"/>
                 </a:solidFill>
                 <a:latin typeface="Calibri" panose="020F0502020204030204" pitchFamily="34" charset="0"/>
-                <a:ea typeface="宋体" panose="02010600030101010101" pitchFamily="2" charset="-122"/>
+                <a:ea typeface="宋体" pitchFamily="2" charset="-122"/>
               </a:defRPr>
             </a:lvl3pPr>
             <a:lvl4pPr marL="1600200" indent="-228600">
@@ -32409,7 +32324,7 @@
                   <a:schemeClr val="tx1"/>
                 </a:solidFill>
                 <a:latin typeface="Calibri" panose="020F0502020204030204" pitchFamily="34" charset="0"/>
-                <a:ea typeface="宋体" panose="02010600030101010101" pitchFamily="2" charset="-122"/>
+                <a:ea typeface="宋体" pitchFamily="2" charset="-122"/>
               </a:defRPr>
             </a:lvl4pPr>
             <a:lvl5pPr marL="2057400" indent="-228600">
@@ -32418,7 +32333,7 @@
                   <a:schemeClr val="tx1"/>
                 </a:solidFill>
                 <a:latin typeface="Calibri" panose="020F0502020204030204" pitchFamily="34" charset="0"/>
-                <a:ea typeface="宋体" panose="02010600030101010101" pitchFamily="2" charset="-122"/>
+                <a:ea typeface="宋体" pitchFamily="2" charset="-122"/>
               </a:defRPr>
             </a:lvl5pPr>
             <a:lvl6pPr marL="2514600" indent="-228600" eaLnBrk="0" fontAlgn="base" hangingPunct="0">
@@ -32433,7 +32348,7 @@
                   <a:schemeClr val="tx1"/>
                 </a:solidFill>
                 <a:latin typeface="Calibri" panose="020F0502020204030204" pitchFamily="34" charset="0"/>
-                <a:ea typeface="宋体" panose="02010600030101010101" pitchFamily="2" charset="-122"/>
+                <a:ea typeface="宋体" pitchFamily="2" charset="-122"/>
               </a:defRPr>
             </a:lvl6pPr>
             <a:lvl7pPr marL="2971800" indent="-228600" eaLnBrk="0" fontAlgn="base" hangingPunct="0">
@@ -32448,7 +32363,7 @@
                   <a:schemeClr val="tx1"/>
                 </a:solidFill>
                 <a:latin typeface="Calibri" panose="020F0502020204030204" pitchFamily="34" charset="0"/>
-                <a:ea typeface="宋体" panose="02010600030101010101" pitchFamily="2" charset="-122"/>
+                <a:ea typeface="宋体" pitchFamily="2" charset="-122"/>
               </a:defRPr>
             </a:lvl7pPr>
             <a:lvl8pPr marL="3429000" indent="-228600" eaLnBrk="0" fontAlgn="base" hangingPunct="0">
@@ -32463,7 +32378,7 @@
                   <a:schemeClr val="tx1"/>
                 </a:solidFill>
                 <a:latin typeface="Calibri" panose="020F0502020204030204" pitchFamily="34" charset="0"/>
-                <a:ea typeface="宋体" panose="02010600030101010101" pitchFamily="2" charset="-122"/>
+                <a:ea typeface="宋体" pitchFamily="2" charset="-122"/>
               </a:defRPr>
             </a:lvl8pPr>
             <a:lvl9pPr marL="3886200" indent="-228600" eaLnBrk="0" fontAlgn="base" hangingPunct="0">
@@ -32478,7 +32393,7 @@
                   <a:schemeClr val="tx1"/>
                 </a:solidFill>
                 <a:latin typeface="Calibri" panose="020F0502020204030204" pitchFamily="34" charset="0"/>
-                <a:ea typeface="宋体" panose="02010600030101010101" pitchFamily="2" charset="-122"/>
+                <a:ea typeface="宋体" pitchFamily="2" charset="-122"/>
               </a:defRPr>
             </a:lvl9pPr>
           </a:lstStyle>
@@ -32573,7 +32488,7 @@
                   <a:schemeClr val="tx1"/>
                 </a:solidFill>
                 <a:latin typeface="Calibri" panose="020F0502020204030204" pitchFamily="34" charset="0"/>
-                <a:ea typeface="宋体" panose="02010600030101010101" pitchFamily="2" charset="-122"/>
+                <a:ea typeface="宋体" pitchFamily="2" charset="-122"/>
               </a:defRPr>
             </a:lvl1pPr>
             <a:lvl2pPr marL="742950" indent="-285750">
@@ -32582,7 +32497,7 @@
                   <a:schemeClr val="tx1"/>
                 </a:solidFill>
                 <a:latin typeface="Calibri" panose="020F0502020204030204" pitchFamily="34" charset="0"/>
-                <a:ea typeface="宋体" panose="02010600030101010101" pitchFamily="2" charset="-122"/>
+                <a:ea typeface="宋体" pitchFamily="2" charset="-122"/>
               </a:defRPr>
             </a:lvl2pPr>
             <a:lvl3pPr marL="1143000" indent="-228600">
@@ -32591,7 +32506,7 @@
                   <a:schemeClr val="tx1"/>
                 </a:solidFill>
                 <a:latin typeface="Calibri" panose="020F0502020204030204" pitchFamily="34" charset="0"/>
-                <a:ea typeface="宋体" panose="02010600030101010101" pitchFamily="2" charset="-122"/>
+                <a:ea typeface="宋体" pitchFamily="2" charset="-122"/>
               </a:defRPr>
             </a:lvl3pPr>
             <a:lvl4pPr marL="1600200" indent="-228600">
@@ -32600,7 +32515,7 @@
                   <a:schemeClr val="tx1"/>
                 </a:solidFill>
                 <a:latin typeface="Calibri" panose="020F0502020204030204" pitchFamily="34" charset="0"/>
-                <a:ea typeface="宋体" panose="02010600030101010101" pitchFamily="2" charset="-122"/>
+                <a:ea typeface="宋体" pitchFamily="2" charset="-122"/>
               </a:defRPr>
             </a:lvl4pPr>
             <a:lvl5pPr marL="2057400" indent="-228600">
@@ -32609,7 +32524,7 @@
                   <a:schemeClr val="tx1"/>
                 </a:solidFill>
                 <a:latin typeface="Calibri" panose="020F0502020204030204" pitchFamily="34" charset="0"/>
-                <a:ea typeface="宋体" panose="02010600030101010101" pitchFamily="2" charset="-122"/>
+                <a:ea typeface="宋体" pitchFamily="2" charset="-122"/>
               </a:defRPr>
             </a:lvl5pPr>
             <a:lvl6pPr marL="2514600" indent="-228600" eaLnBrk="0" fontAlgn="base" hangingPunct="0">
@@ -32624,7 +32539,7 @@
                   <a:schemeClr val="tx1"/>
                 </a:solidFill>
                 <a:latin typeface="Calibri" panose="020F0502020204030204" pitchFamily="34" charset="0"/>
-                <a:ea typeface="宋体" panose="02010600030101010101" pitchFamily="2" charset="-122"/>
+                <a:ea typeface="宋体" pitchFamily="2" charset="-122"/>
               </a:defRPr>
             </a:lvl6pPr>
             <a:lvl7pPr marL="2971800" indent="-228600" eaLnBrk="0" fontAlgn="base" hangingPunct="0">
@@ -32639,7 +32554,7 @@
                   <a:schemeClr val="tx1"/>
                 </a:solidFill>
                 <a:latin typeface="Calibri" panose="020F0502020204030204" pitchFamily="34" charset="0"/>
-                <a:ea typeface="宋体" panose="02010600030101010101" pitchFamily="2" charset="-122"/>
+                <a:ea typeface="宋体" pitchFamily="2" charset="-122"/>
               </a:defRPr>
             </a:lvl7pPr>
             <a:lvl8pPr marL="3429000" indent="-228600" eaLnBrk="0" fontAlgn="base" hangingPunct="0">
@@ -32654,7 +32569,7 @@
                   <a:schemeClr val="tx1"/>
                 </a:solidFill>
                 <a:latin typeface="Calibri" panose="020F0502020204030204" pitchFamily="34" charset="0"/>
-                <a:ea typeface="宋体" panose="02010600030101010101" pitchFamily="2" charset="-122"/>
+                <a:ea typeface="宋体" pitchFamily="2" charset="-122"/>
               </a:defRPr>
             </a:lvl8pPr>
             <a:lvl9pPr marL="3886200" indent="-228600" eaLnBrk="0" fontAlgn="base" hangingPunct="0">
@@ -32669,7 +32584,7 @@
                   <a:schemeClr val="tx1"/>
                 </a:solidFill>
                 <a:latin typeface="Calibri" panose="020F0502020204030204" pitchFamily="34" charset="0"/>
-                <a:ea typeface="宋体" panose="02010600030101010101" pitchFamily="2" charset="-122"/>
+                <a:ea typeface="宋体" pitchFamily="2" charset="-122"/>
               </a:defRPr>
             </a:lvl9pPr>
           </a:lstStyle>
@@ -32899,7 +32814,7 @@
                 </a:solidFill>
                 <a:latin typeface="微软雅黑" panose="020B0503020204020204" pitchFamily="34" charset="-122"/>
                 <a:ea typeface="微软雅黑" panose="020B0503020204020204" pitchFamily="34" charset="-122"/>
-                <a:cs typeface="Courier New" panose="02070309020205020404" pitchFamily="49" charset="0"/>
+                <a:cs typeface="Courier New" panose="02070409020205090404" pitchFamily="49" charset="0"/>
               </a:rPr>
               <a:t>@Many 注解用于描述一对多关联关系</a:t>
             </a:r>
@@ -32921,7 +32836,7 @@
                 </a:solidFill>
                 <a:latin typeface="微软雅黑" panose="020B0503020204020204" pitchFamily="34" charset="-122"/>
                 <a:ea typeface="微软雅黑" panose="020B0503020204020204" pitchFamily="34" charset="-122"/>
-                <a:cs typeface="Courier New" panose="02070309020205020404" pitchFamily="49" charset="0"/>
+                <a:cs typeface="Courier New" panose="02070409020205090404" pitchFamily="49" charset="0"/>
               </a:rPr>
               <a:t>@Results注解一起使用</a:t>
             </a:r>
@@ -32943,7 +32858,7 @@
                 </a:solidFill>
                 <a:latin typeface="微软雅黑" panose="020B0503020204020204" pitchFamily="34" charset="-122"/>
                 <a:ea typeface="微软雅黑" panose="020B0503020204020204" pitchFamily="34" charset="-122"/>
-                <a:cs typeface="Courier New" panose="02070309020205020404" pitchFamily="49" charset="0"/>
+                <a:cs typeface="Courier New" panose="02070409020205090404" pitchFamily="49" charset="0"/>
               </a:rPr>
               <a:t>查询结果中嵌套加载一组关联对象的集</a:t>
             </a:r>
@@ -33164,9 +33079,9 @@
                 <a:solidFill>
                   <a:schemeClr val="lt1"/>
                 </a:solidFill>
-                <a:latin typeface="Arial" panose="020B0604020202020204" pitchFamily="34" charset="0"/>
+                <a:latin typeface="Arial" panose="020B0604020202090204" pitchFamily="34" charset="0"/>
                 <a:ea typeface="思源黑体 CN Normal" panose="020B0400000000000000" pitchFamily="34" charset="-122"/>
-                <a:sym typeface="Arial" panose="020B0604020202020204" pitchFamily="34" charset="0"/>
+                <a:sym typeface="Arial" panose="020B0604020202090204" pitchFamily="34" charset="0"/>
               </a:endParaRPr>
             </a:p>
           </p:txBody>
@@ -33221,16 +33136,16 @@
             <a:p>
               <a:r>
                 <a:rPr sz="1700" dirty="0">
-                  <a:latin typeface="Arial" panose="020B0604020202020204" pitchFamily="34" charset="0"/>
+                  <a:latin typeface="Arial" panose="020B0604020202090204" pitchFamily="34" charset="0"/>
                   <a:ea typeface="思源黑体 CN Normal" panose="020B0400000000000000" pitchFamily="34" charset="-122"/>
-                  <a:sym typeface="Arial" panose="020B0604020202020204" pitchFamily="34" charset="0"/>
+                  <a:sym typeface="Arial" panose="020B0604020202090204" pitchFamily="34" charset="0"/>
                 </a:rPr>
                 <a:t>1.修改Mapper接口</a:t>
               </a:r>
               <a:endParaRPr sz="1700" dirty="0">
-                <a:latin typeface="Arial" panose="020B0604020202020204" pitchFamily="34" charset="0"/>
+                <a:latin typeface="Arial" panose="020B0604020202090204" pitchFamily="34" charset="0"/>
                 <a:ea typeface="思源黑体 CN Normal" panose="020B0400000000000000" pitchFamily="34" charset="-122"/>
-                <a:sym typeface="Arial" panose="020B0604020202020204" pitchFamily="34" charset="0"/>
+                <a:sym typeface="Arial" panose="020B0604020202090204" pitchFamily="34" charset="0"/>
               </a:endParaRPr>
             </a:p>
           </p:txBody>
@@ -33290,7 +33205,7 @@
                 </a:solidFill>
                 <a:latin typeface="微软雅黑" panose="020B0503020204020204" pitchFamily="34" charset="-122"/>
                 <a:ea typeface="微软雅黑" panose="020B0503020204020204" pitchFamily="34" charset="-122"/>
-                <a:cs typeface="Courier New" panose="02070309020205020404" pitchFamily="49" charset="0"/>
+                <a:cs typeface="Courier New" panose="02070409020205090404" pitchFamily="49" charset="0"/>
               </a:rPr>
               <a:t>MemberMapper接口</a:t>
             </a:r>
@@ -33312,7 +33227,7 @@
                 </a:solidFill>
                 <a:latin typeface="微软雅黑" panose="020B0503020204020204" pitchFamily="34" charset="-122"/>
                 <a:ea typeface="微软雅黑" panose="020B0503020204020204" pitchFamily="34" charset="-122"/>
-                <a:cs typeface="Courier New" panose="02070309020205020404" pitchFamily="49" charset="0"/>
+                <a:cs typeface="Courier New" panose="02070409020205090404" pitchFamily="49" charset="0"/>
               </a:rPr>
               <a:t>selectOrdersByMemberId()的方法</a:t>
             </a:r>
@@ -33334,7 +33249,7 @@
                 </a:solidFill>
                 <a:latin typeface="微软雅黑" panose="020B0503020204020204" pitchFamily="34" charset="-122"/>
                 <a:ea typeface="微软雅黑" panose="020B0503020204020204" pitchFamily="34" charset="-122"/>
-                <a:cs typeface="Courier New" panose="02070309020205020404" pitchFamily="49" charset="0"/>
+                <a:cs typeface="Courier New" panose="02070409020205090404" pitchFamily="49" charset="0"/>
               </a:rPr>
               <a:t>注解的方式</a:t>
             </a:r>
@@ -33356,7 +33271,7 @@
                 </a:solidFill>
                 <a:latin typeface="微软雅黑" panose="020B0503020204020204" pitchFamily="34" charset="-122"/>
                 <a:ea typeface="微软雅黑" panose="020B0503020204020204" pitchFamily="34" charset="-122"/>
-                <a:cs typeface="Courier New" panose="02070309020205020404" pitchFamily="49" charset="0"/>
+                <a:cs typeface="Courier New" panose="02070409020205090404" pitchFamily="49" charset="0"/>
               </a:rPr>
               <a:t>方法getMemberWithOrders()</a:t>
             </a:r>
@@ -33378,7 +33293,7 @@
                 </a:solidFill>
                 <a:latin typeface="微软雅黑" panose="020B0503020204020204" pitchFamily="34" charset="-122"/>
                 <a:ea typeface="微软雅黑" panose="020B0503020204020204" pitchFamily="34" charset="-122"/>
-                <a:cs typeface="Courier New" panose="02070309020205020404" pitchFamily="49" charset="0"/>
+                <a:cs typeface="Courier New" panose="02070409020205090404" pitchFamily="49" charset="0"/>
               </a:rPr>
               <a:t>@Select注解</a:t>
             </a:r>
@@ -33400,7 +33315,7 @@
                 </a:solidFill>
                 <a:latin typeface="微软雅黑" panose="020B0503020204020204" pitchFamily="34" charset="-122"/>
                 <a:ea typeface="微软雅黑" panose="020B0503020204020204" pitchFamily="34" charset="-122"/>
-                <a:cs typeface="Courier New" panose="02070309020205020404" pitchFamily="49" charset="0"/>
+                <a:cs typeface="Courier New" panose="02070409020205090404" pitchFamily="49" charset="0"/>
               </a:rPr>
               <a:t>SQL语句</a:t>
             </a:r>
@@ -33422,7 +33337,7 @@
                 </a:solidFill>
                 <a:latin typeface="微软雅黑" panose="020B0503020204020204" pitchFamily="34" charset="-122"/>
                 <a:ea typeface="微软雅黑" panose="020B0503020204020204" pitchFamily="34" charset="-122"/>
-                <a:cs typeface="Courier New" panose="02070309020205020404" pitchFamily="49" charset="0"/>
+                <a:cs typeface="Courier New" panose="02070409020205090404" pitchFamily="49" charset="0"/>
               </a:rPr>
               <a:t>@Results注解</a:t>
             </a:r>
@@ -33444,7 +33359,7 @@
                 </a:solidFill>
                 <a:latin typeface="微软雅黑" panose="020B0503020204020204" pitchFamily="34" charset="-122"/>
                 <a:ea typeface="微软雅黑" panose="020B0503020204020204" pitchFamily="34" charset="-122"/>
-                <a:cs typeface="Courier New" panose="02070309020205020404" pitchFamily="49" charset="0"/>
+                <a:cs typeface="Courier New" panose="02070409020205090404" pitchFamily="49" charset="0"/>
               </a:rPr>
               <a:t>结果集映射</a:t>
             </a:r>
@@ -33466,7 +33381,7 @@
                 </a:solidFill>
                 <a:latin typeface="微软雅黑" panose="020B0503020204020204" pitchFamily="34" charset="-122"/>
                 <a:ea typeface="微软雅黑" panose="020B0503020204020204" pitchFamily="34" charset="-122"/>
-                <a:cs typeface="Courier New" panose="02070309020205020404" pitchFamily="49" charset="0"/>
+                <a:cs typeface="Courier New" panose="02070409020205090404" pitchFamily="49" charset="0"/>
               </a:rPr>
               <a:t>@Many注解</a:t>
             </a:r>
@@ -33488,7 +33403,7 @@
                 </a:solidFill>
                 <a:latin typeface="微软雅黑" panose="020B0503020204020204" pitchFamily="34" charset="-122"/>
                 <a:ea typeface="微软雅黑" panose="020B0503020204020204" pitchFamily="34" charset="-122"/>
-                <a:cs typeface="Courier New" panose="02070309020205020404" pitchFamily="49" charset="0"/>
+                <a:cs typeface="Courier New" panose="02070409020205090404" pitchFamily="49" charset="0"/>
               </a:rPr>
               <a:t>select属性</a:t>
             </a:r>
@@ -33510,7 +33425,7 @@
                 </a:solidFill>
                 <a:latin typeface="微软雅黑" panose="020B0503020204020204" pitchFamily="34" charset="-122"/>
                 <a:ea typeface="微软雅黑" panose="020B0503020204020204" pitchFamily="34" charset="-122"/>
-                <a:cs typeface="Courier New" panose="02070309020205020404" pitchFamily="49" charset="0"/>
+                <a:cs typeface="Courier New" panose="02070409020205090404" pitchFamily="49" charset="0"/>
               </a:rPr>
               <a:t>关联查询的方法指定为selectOrdersByMemberId()</a:t>
             </a:r>
@@ -33860,7 +33775,7 @@
                 </a:solidFill>
                 <a:latin typeface="微软雅黑" panose="020B0503020204020204" pitchFamily="34" charset="-122"/>
                 <a:ea typeface="微软雅黑" panose="020B0503020204020204" pitchFamily="34" charset="-122"/>
-                <a:cs typeface="Courier New" panose="02070309020205020404" pitchFamily="49" charset="0"/>
+                <a:cs typeface="Courier New" panose="02070409020205090404" pitchFamily="49" charset="0"/>
               </a:rPr>
               <a:t>注解实现查询会员信息时，关联查询对应的订单信息</a:t>
             </a:r>
@@ -33871,7 +33786,7 @@
                 </a:solidFill>
                 <a:latin typeface="微软雅黑" panose="020B0503020204020204" pitchFamily="34" charset="-122"/>
                 <a:ea typeface="微软雅黑" panose="020B0503020204020204" pitchFamily="34" charset="-122"/>
-                <a:cs typeface="Courier New" panose="02070309020205020404" pitchFamily="49" charset="0"/>
+                <a:cs typeface="Courier New" panose="02070409020205090404" pitchFamily="49" charset="0"/>
               </a:rPr>
               <a:t>。</a:t>
             </a:r>
@@ -33881,7 +33796,7 @@
               </a:solidFill>
               <a:latin typeface="微软雅黑" panose="020B0503020204020204" pitchFamily="34" charset="-122"/>
               <a:ea typeface="微软雅黑" panose="020B0503020204020204" pitchFamily="34" charset="-122"/>
-              <a:cs typeface="Courier New" panose="02070309020205020404" pitchFamily="49" charset="0"/>
+              <a:cs typeface="Courier New" panose="02070409020205090404" pitchFamily="49" charset="0"/>
             </a:endParaRPr>
           </a:p>
         </p:txBody>
@@ -34081,9 +33996,9 @@
                 <a:solidFill>
                   <a:schemeClr val="lt1"/>
                 </a:solidFill>
-                <a:latin typeface="Arial" panose="020B0604020202020204" pitchFamily="34" charset="0"/>
+                <a:latin typeface="Arial" panose="020B0604020202090204" pitchFamily="34" charset="0"/>
                 <a:ea typeface="思源黑体 CN Normal" panose="020B0400000000000000" pitchFamily="34" charset="-122"/>
-                <a:sym typeface="Arial" panose="020B0604020202020204" pitchFamily="34" charset="0"/>
+                <a:sym typeface="Arial" panose="020B0604020202090204" pitchFamily="34" charset="0"/>
               </a:endParaRPr>
             </a:p>
           </p:txBody>
@@ -34138,16 +34053,16 @@
             <a:p>
               <a:r>
                 <a:rPr sz="1700" dirty="0">
-                  <a:latin typeface="Arial" panose="020B0604020202020204" pitchFamily="34" charset="0"/>
+                  <a:latin typeface="Arial" panose="020B0604020202090204" pitchFamily="34" charset="0"/>
                   <a:ea typeface="思源黑体 CN Normal" panose="020B0400000000000000" pitchFamily="34" charset="-122"/>
-                  <a:sym typeface="Arial" panose="020B0604020202020204" pitchFamily="34" charset="0"/>
+                  <a:sym typeface="Arial" panose="020B0604020202090204" pitchFamily="34" charset="0"/>
                 </a:rPr>
                 <a:t>2.测试效果</a:t>
               </a:r>
               <a:endParaRPr sz="1700" dirty="0">
-                <a:latin typeface="Arial" panose="020B0604020202020204" pitchFamily="34" charset="0"/>
+                <a:latin typeface="Arial" panose="020B0604020202090204" pitchFamily="34" charset="0"/>
                 <a:ea typeface="思源黑体 CN Normal" panose="020B0400000000000000" pitchFamily="34" charset="-122"/>
-                <a:sym typeface="Arial" panose="020B0604020202020204" pitchFamily="34" charset="0"/>
+                <a:sym typeface="Arial" panose="020B0604020202090204" pitchFamily="34" charset="0"/>
               </a:endParaRPr>
             </a:p>
           </p:txBody>
@@ -34196,7 +34111,7 @@
                 </a:solidFill>
                 <a:latin typeface="微软雅黑" panose="020B0503020204020204" pitchFamily="34" charset="-122"/>
                 <a:ea typeface="微软雅黑" panose="020B0503020204020204" pitchFamily="34" charset="-122"/>
-                <a:cs typeface="Courier New" panose="02070309020205020404" pitchFamily="49" charset="0"/>
+                <a:cs typeface="Courier New" panose="02070409020205090404" pitchFamily="49" charset="0"/>
               </a:rPr>
               <a:t>运行</a:t>
             </a:r>
@@ -34218,7 +34133,7 @@
                 </a:solidFill>
                 <a:latin typeface="微软雅黑" panose="020B0503020204020204" pitchFamily="34" charset="-122"/>
                 <a:ea typeface="微软雅黑" panose="020B0503020204020204" pitchFamily="34" charset="-122"/>
-                <a:cs typeface="Courier New" panose="02070309020205020404" pitchFamily="49" charset="0"/>
+                <a:cs typeface="Courier New" panose="02070409020205090404" pitchFamily="49" charset="0"/>
               </a:rPr>
               <a:t>collectionTest()方法</a:t>
             </a:r>
@@ -34477,7 +34392,7 @@
                   <a:schemeClr val="tx1"/>
                 </a:solidFill>
                 <a:latin typeface="Calibri" panose="020F0502020204030204" pitchFamily="34" charset="0"/>
-                <a:ea typeface="宋体" panose="02010600030101010101" pitchFamily="2" charset="-122"/>
+                <a:ea typeface="宋体" pitchFamily="2" charset="-122"/>
               </a:defRPr>
             </a:lvl1pPr>
             <a:lvl2pPr marL="742950" indent="-285750">
@@ -34486,7 +34401,7 @@
                   <a:schemeClr val="tx1"/>
                 </a:solidFill>
                 <a:latin typeface="Calibri" panose="020F0502020204030204" pitchFamily="34" charset="0"/>
-                <a:ea typeface="宋体" panose="02010600030101010101" pitchFamily="2" charset="-122"/>
+                <a:ea typeface="宋体" pitchFamily="2" charset="-122"/>
               </a:defRPr>
             </a:lvl2pPr>
             <a:lvl3pPr marL="1143000" indent="-228600">
@@ -34495,7 +34410,7 @@
                   <a:schemeClr val="tx1"/>
                 </a:solidFill>
                 <a:latin typeface="Calibri" panose="020F0502020204030204" pitchFamily="34" charset="0"/>
-                <a:ea typeface="宋体" panose="02010600030101010101" pitchFamily="2" charset="-122"/>
+                <a:ea typeface="宋体" pitchFamily="2" charset="-122"/>
               </a:defRPr>
             </a:lvl3pPr>
             <a:lvl4pPr marL="1600200" indent="-228600">
@@ -34504,7 +34419,7 @@
                   <a:schemeClr val="tx1"/>
                 </a:solidFill>
                 <a:latin typeface="Calibri" panose="020F0502020204030204" pitchFamily="34" charset="0"/>
-                <a:ea typeface="宋体" panose="02010600030101010101" pitchFamily="2" charset="-122"/>
+                <a:ea typeface="宋体" pitchFamily="2" charset="-122"/>
               </a:defRPr>
             </a:lvl4pPr>
             <a:lvl5pPr marL="2057400" indent="-228600">
@@ -34513,7 +34428,7 @@
                   <a:schemeClr val="tx1"/>
                 </a:solidFill>
                 <a:latin typeface="Calibri" panose="020F0502020204030204" pitchFamily="34" charset="0"/>
-                <a:ea typeface="宋体" panose="02010600030101010101" pitchFamily="2" charset="-122"/>
+                <a:ea typeface="宋体" pitchFamily="2" charset="-122"/>
               </a:defRPr>
             </a:lvl5pPr>
             <a:lvl6pPr marL="2514600" indent="-228600" eaLnBrk="0" fontAlgn="base" hangingPunct="0">
@@ -34528,7 +34443,7 @@
                   <a:schemeClr val="tx1"/>
                 </a:solidFill>
                 <a:latin typeface="Calibri" panose="020F0502020204030204" pitchFamily="34" charset="0"/>
-                <a:ea typeface="宋体" panose="02010600030101010101" pitchFamily="2" charset="-122"/>
+                <a:ea typeface="宋体" pitchFamily="2" charset="-122"/>
               </a:defRPr>
             </a:lvl6pPr>
             <a:lvl7pPr marL="2971800" indent="-228600" eaLnBrk="0" fontAlgn="base" hangingPunct="0">
@@ -34543,7 +34458,7 @@
                   <a:schemeClr val="tx1"/>
                 </a:solidFill>
                 <a:latin typeface="Calibri" panose="020F0502020204030204" pitchFamily="34" charset="0"/>
-                <a:ea typeface="宋体" panose="02010600030101010101" pitchFamily="2" charset="-122"/>
+                <a:ea typeface="宋体" pitchFamily="2" charset="-122"/>
               </a:defRPr>
             </a:lvl7pPr>
             <a:lvl8pPr marL="3429000" indent="-228600" eaLnBrk="0" fontAlgn="base" hangingPunct="0">
@@ -34558,7 +34473,7 @@
                   <a:schemeClr val="tx1"/>
                 </a:solidFill>
                 <a:latin typeface="Calibri" panose="020F0502020204030204" pitchFamily="34" charset="0"/>
-                <a:ea typeface="宋体" panose="02010600030101010101" pitchFamily="2" charset="-122"/>
+                <a:ea typeface="宋体" pitchFamily="2" charset="-122"/>
               </a:defRPr>
             </a:lvl8pPr>
             <a:lvl9pPr marL="3886200" indent="-228600" eaLnBrk="0" fontAlgn="base" hangingPunct="0">
@@ -34573,7 +34488,7 @@
                   <a:schemeClr val="tx1"/>
                 </a:solidFill>
                 <a:latin typeface="Calibri" panose="020F0502020204030204" pitchFamily="34" charset="0"/>
-                <a:ea typeface="宋体" panose="02010600030101010101" pitchFamily="2" charset="-122"/>
+                <a:ea typeface="宋体" pitchFamily="2" charset="-122"/>
               </a:defRPr>
             </a:lvl9pPr>
           </a:lstStyle>
@@ -34728,7 +34643,7 @@
                   <a:schemeClr val="tx1"/>
                 </a:solidFill>
                 <a:latin typeface="Calibri" panose="020F0502020204030204" pitchFamily="34" charset="0"/>
-                <a:ea typeface="宋体" panose="02010600030101010101" pitchFamily="2" charset="-122"/>
+                <a:ea typeface="宋体" pitchFamily="2" charset="-122"/>
               </a:defRPr>
             </a:lvl1pPr>
             <a:lvl2pPr marL="742950" indent="-285750">
@@ -34737,7 +34652,7 @@
                   <a:schemeClr val="tx1"/>
                 </a:solidFill>
                 <a:latin typeface="Calibri" panose="020F0502020204030204" pitchFamily="34" charset="0"/>
-                <a:ea typeface="宋体" panose="02010600030101010101" pitchFamily="2" charset="-122"/>
+                <a:ea typeface="宋体" pitchFamily="2" charset="-122"/>
               </a:defRPr>
             </a:lvl2pPr>
             <a:lvl3pPr marL="1143000" indent="-228600">
@@ -34746,7 +34661,7 @@
                   <a:schemeClr val="tx1"/>
                 </a:solidFill>
                 <a:latin typeface="Calibri" panose="020F0502020204030204" pitchFamily="34" charset="0"/>
-                <a:ea typeface="宋体" panose="02010600030101010101" pitchFamily="2" charset="-122"/>
+                <a:ea typeface="宋体" pitchFamily="2" charset="-122"/>
               </a:defRPr>
             </a:lvl3pPr>
             <a:lvl4pPr marL="1600200" indent="-228600">
@@ -34755,7 +34670,7 @@
                   <a:schemeClr val="tx1"/>
                 </a:solidFill>
                 <a:latin typeface="Calibri" panose="020F0502020204030204" pitchFamily="34" charset="0"/>
-                <a:ea typeface="宋体" panose="02010600030101010101" pitchFamily="2" charset="-122"/>
+                <a:ea typeface="宋体" pitchFamily="2" charset="-122"/>
               </a:defRPr>
             </a:lvl4pPr>
             <a:lvl5pPr marL="2057400" indent="-228600">
@@ -34764,7 +34679,7 @@
                   <a:schemeClr val="tx1"/>
                 </a:solidFill>
                 <a:latin typeface="Calibri" panose="020F0502020204030204" pitchFamily="34" charset="0"/>
-                <a:ea typeface="宋体" panose="02010600030101010101" pitchFamily="2" charset="-122"/>
+                <a:ea typeface="宋体" pitchFamily="2" charset="-122"/>
               </a:defRPr>
             </a:lvl5pPr>
             <a:lvl6pPr marL="2514600" indent="-228600" eaLnBrk="0" fontAlgn="base" hangingPunct="0">
@@ -34779,7 +34694,7 @@
                   <a:schemeClr val="tx1"/>
                 </a:solidFill>
                 <a:latin typeface="Calibri" panose="020F0502020204030204" pitchFamily="34" charset="0"/>
-                <a:ea typeface="宋体" panose="02010600030101010101" pitchFamily="2" charset="-122"/>
+                <a:ea typeface="宋体" pitchFamily="2" charset="-122"/>
               </a:defRPr>
             </a:lvl6pPr>
             <a:lvl7pPr marL="2971800" indent="-228600" eaLnBrk="0" fontAlgn="base" hangingPunct="0">
@@ -34794,7 +34709,7 @@
                   <a:schemeClr val="tx1"/>
                 </a:solidFill>
                 <a:latin typeface="Calibri" panose="020F0502020204030204" pitchFamily="34" charset="0"/>
-                <a:ea typeface="宋体" panose="02010600030101010101" pitchFamily="2" charset="-122"/>
+                <a:ea typeface="宋体" pitchFamily="2" charset="-122"/>
               </a:defRPr>
             </a:lvl7pPr>
             <a:lvl8pPr marL="3429000" indent="-228600" eaLnBrk="0" fontAlgn="base" hangingPunct="0">
@@ -34809,7 +34724,7 @@
                   <a:schemeClr val="tx1"/>
                 </a:solidFill>
                 <a:latin typeface="Calibri" panose="020F0502020204030204" pitchFamily="34" charset="0"/>
-                <a:ea typeface="宋体" panose="02010600030101010101" pitchFamily="2" charset="-122"/>
+                <a:ea typeface="宋体" pitchFamily="2" charset="-122"/>
               </a:defRPr>
             </a:lvl8pPr>
             <a:lvl9pPr marL="3886200" indent="-228600" eaLnBrk="0" fontAlgn="base" hangingPunct="0">
@@ -34824,7 +34739,7 @@
                   <a:schemeClr val="tx1"/>
                 </a:solidFill>
                 <a:latin typeface="Calibri" panose="020F0502020204030204" pitchFamily="34" charset="0"/>
-                <a:ea typeface="宋体" panose="02010600030101010101" pitchFamily="2" charset="-122"/>
+                <a:ea typeface="宋体" pitchFamily="2" charset="-122"/>
               </a:defRPr>
             </a:lvl9pPr>
           </a:lstStyle>
@@ -34919,7 +34834,7 @@
                   <a:schemeClr val="tx1"/>
                 </a:solidFill>
                 <a:latin typeface="Calibri" panose="020F0502020204030204" pitchFamily="34" charset="0"/>
-                <a:ea typeface="宋体" panose="02010600030101010101" pitchFamily="2" charset="-122"/>
+                <a:ea typeface="宋体" pitchFamily="2" charset="-122"/>
               </a:defRPr>
             </a:lvl1pPr>
             <a:lvl2pPr marL="742950" indent="-285750">
@@ -34928,7 +34843,7 @@
                   <a:schemeClr val="tx1"/>
                 </a:solidFill>
                 <a:latin typeface="Calibri" panose="020F0502020204030204" pitchFamily="34" charset="0"/>
-                <a:ea typeface="宋体" panose="02010600030101010101" pitchFamily="2" charset="-122"/>
+                <a:ea typeface="宋体" pitchFamily="2" charset="-122"/>
               </a:defRPr>
             </a:lvl2pPr>
             <a:lvl3pPr marL="1143000" indent="-228600">
@@ -34937,7 +34852,7 @@
                   <a:schemeClr val="tx1"/>
                 </a:solidFill>
                 <a:latin typeface="Calibri" panose="020F0502020204030204" pitchFamily="34" charset="0"/>
-                <a:ea typeface="宋体" panose="02010600030101010101" pitchFamily="2" charset="-122"/>
+                <a:ea typeface="宋体" pitchFamily="2" charset="-122"/>
               </a:defRPr>
             </a:lvl3pPr>
             <a:lvl4pPr marL="1600200" indent="-228600">
@@ -34946,7 +34861,7 @@
                   <a:schemeClr val="tx1"/>
                 </a:solidFill>
                 <a:latin typeface="Calibri" panose="020F0502020204030204" pitchFamily="34" charset="0"/>
-                <a:ea typeface="宋体" panose="02010600030101010101" pitchFamily="2" charset="-122"/>
+                <a:ea typeface="宋体" pitchFamily="2" charset="-122"/>
               </a:defRPr>
             </a:lvl4pPr>
             <a:lvl5pPr marL="2057400" indent="-228600">
@@ -34955,7 +34870,7 @@
                   <a:schemeClr val="tx1"/>
                 </a:solidFill>
                 <a:latin typeface="Calibri" panose="020F0502020204030204" pitchFamily="34" charset="0"/>
-                <a:ea typeface="宋体" panose="02010600030101010101" pitchFamily="2" charset="-122"/>
+                <a:ea typeface="宋体" pitchFamily="2" charset="-122"/>
               </a:defRPr>
             </a:lvl5pPr>
             <a:lvl6pPr marL="2514600" indent="-228600" eaLnBrk="0" fontAlgn="base" hangingPunct="0">
@@ -34970,7 +34885,7 @@
                   <a:schemeClr val="tx1"/>
                 </a:solidFill>
                 <a:latin typeface="Calibri" panose="020F0502020204030204" pitchFamily="34" charset="0"/>
-                <a:ea typeface="宋体" panose="02010600030101010101" pitchFamily="2" charset="-122"/>
+                <a:ea typeface="宋体" pitchFamily="2" charset="-122"/>
               </a:defRPr>
             </a:lvl6pPr>
             <a:lvl7pPr marL="2971800" indent="-228600" eaLnBrk="0" fontAlgn="base" hangingPunct="0">
@@ -34985,7 +34900,7 @@
                   <a:schemeClr val="tx1"/>
                 </a:solidFill>
                 <a:latin typeface="Calibri" panose="020F0502020204030204" pitchFamily="34" charset="0"/>
-                <a:ea typeface="宋体" panose="02010600030101010101" pitchFamily="2" charset="-122"/>
+                <a:ea typeface="宋体" pitchFamily="2" charset="-122"/>
               </a:defRPr>
             </a:lvl7pPr>
             <a:lvl8pPr marL="3429000" indent="-228600" eaLnBrk="0" fontAlgn="base" hangingPunct="0">
@@ -35000,7 +34915,7 @@
                   <a:schemeClr val="tx1"/>
                 </a:solidFill>
                 <a:latin typeface="Calibri" panose="020F0502020204030204" pitchFamily="34" charset="0"/>
-                <a:ea typeface="宋体" panose="02010600030101010101" pitchFamily="2" charset="-122"/>
+                <a:ea typeface="宋体" pitchFamily="2" charset="-122"/>
               </a:defRPr>
             </a:lvl8pPr>
             <a:lvl9pPr marL="3886200" indent="-228600" eaLnBrk="0" fontAlgn="base" hangingPunct="0">
@@ -35015,7 +34930,7 @@
                   <a:schemeClr val="tx1"/>
                 </a:solidFill>
                 <a:latin typeface="Calibri" panose="020F0502020204030204" pitchFamily="34" charset="0"/>
-                <a:ea typeface="宋体" panose="02010600030101010101" pitchFamily="2" charset="-122"/>
+                <a:ea typeface="宋体" pitchFamily="2" charset="-122"/>
               </a:defRPr>
             </a:lvl9pPr>
           </a:lstStyle>
@@ -35234,7 +35149,7 @@
                 </a:solidFill>
                 <a:latin typeface="微软雅黑" panose="020B0503020204020204" pitchFamily="34" charset="-122"/>
                 <a:ea typeface="微软雅黑" panose="020B0503020204020204" pitchFamily="34" charset="-122"/>
-                <a:cs typeface="Courier New" panose="02070309020205020404" pitchFamily="49" charset="0"/>
+                <a:cs typeface="Courier New" panose="02070409020205090404" pitchFamily="49" charset="0"/>
               </a:rPr>
               <a:t>多对多关联关系</a:t>
             </a:r>
@@ -35256,7 +35171,7 @@
                 </a:solidFill>
                 <a:latin typeface="微软雅黑" panose="020B0503020204020204" pitchFamily="34" charset="-122"/>
                 <a:ea typeface="微软雅黑" panose="020B0503020204020204" pitchFamily="34" charset="-122"/>
-                <a:cs typeface="Courier New" panose="02070309020205020404" pitchFamily="49" charset="0"/>
+                <a:cs typeface="Courier New" panose="02070409020205090404" pitchFamily="49" charset="0"/>
               </a:rPr>
               <a:t>两个实体之间</a:t>
             </a:r>
@@ -35278,7 +35193,7 @@
                 </a:solidFill>
                 <a:latin typeface="微软雅黑" panose="020B0503020204020204" pitchFamily="34" charset="-122"/>
                 <a:ea typeface="微软雅黑" panose="020B0503020204020204" pitchFamily="34" charset="-122"/>
-                <a:cs typeface="Courier New" panose="02070309020205020404" pitchFamily="49" charset="0"/>
+                <a:cs typeface="Courier New" panose="02070409020205090404" pitchFamily="49" charset="0"/>
               </a:rPr>
               <a:t>多个实例之间的多重关联</a:t>
             </a:r>
@@ -35300,7 +35215,7 @@
                 </a:solidFill>
                 <a:latin typeface="微软雅黑" panose="020B0503020204020204" pitchFamily="34" charset="-122"/>
                 <a:ea typeface="微软雅黑" panose="020B0503020204020204" pitchFamily="34" charset="-122"/>
-                <a:cs typeface="Courier New" panose="02070309020205020404" pitchFamily="49" charset="0"/>
+                <a:cs typeface="Courier New" panose="02070409020205090404" pitchFamily="49" charset="0"/>
               </a:rPr>
               <a:t>通常</a:t>
             </a:r>
@@ -35322,7 +35237,7 @@
                 </a:solidFill>
                 <a:latin typeface="微软雅黑" panose="020B0503020204020204" pitchFamily="34" charset="-122"/>
                 <a:ea typeface="微软雅黑" panose="020B0503020204020204" pitchFamily="34" charset="-122"/>
-                <a:cs typeface="Courier New" panose="02070309020205020404" pitchFamily="49" charset="0"/>
+                <a:cs typeface="Courier New" panose="02070409020205090404" pitchFamily="49" charset="0"/>
               </a:rPr>
               <a:t>中间表</a:t>
             </a:r>
@@ -35344,7 +35259,7 @@
                 </a:solidFill>
                 <a:latin typeface="微软雅黑" panose="020B0503020204020204" pitchFamily="34" charset="-122"/>
                 <a:ea typeface="微软雅黑" panose="020B0503020204020204" pitchFamily="34" charset="-122"/>
-                <a:cs typeface="Courier New" panose="02070309020205020404" pitchFamily="49" charset="0"/>
+                <a:cs typeface="Courier New" panose="02070409020205090404" pitchFamily="49" charset="0"/>
               </a:rPr>
               <a:t>维护</a:t>
             </a:r>
@@ -35384,7 +35299,7 @@
                 </a:solidFill>
                 <a:latin typeface="微软雅黑" panose="020B0503020204020204" pitchFamily="34" charset="-122"/>
                 <a:ea typeface="微软雅黑" panose="020B0503020204020204" pitchFamily="34" charset="-122"/>
-                <a:cs typeface="Courier New" panose="02070309020205020404" pitchFamily="49" charset="0"/>
+                <a:cs typeface="Courier New" panose="02070409020205090404" pitchFamily="49" charset="0"/>
               </a:rPr>
               <a:t>中间表</a:t>
             </a:r>
@@ -35406,7 +35321,7 @@
                 </a:solidFill>
                 <a:latin typeface="微软雅黑" panose="020B0503020204020204" pitchFamily="34" charset="-122"/>
                 <a:ea typeface="微软雅黑" panose="020B0503020204020204" pitchFamily="34" charset="-122"/>
-                <a:cs typeface="Courier New" panose="02070309020205020404" pitchFamily="49" charset="0"/>
+                <a:cs typeface="Courier New" panose="02070409020205090404" pitchFamily="49" charset="0"/>
               </a:rPr>
               <a:t>两个外键</a:t>
             </a:r>
@@ -35428,7 +35343,7 @@
                 </a:solidFill>
                 <a:latin typeface="微软雅黑" panose="020B0503020204020204" pitchFamily="34" charset="-122"/>
                 <a:ea typeface="微软雅黑" panose="020B0503020204020204" pitchFamily="34" charset="-122"/>
-                <a:cs typeface="Courier New" panose="02070309020205020404" pitchFamily="49" charset="0"/>
+                <a:cs typeface="Courier New" panose="02070409020205090404" pitchFamily="49" charset="0"/>
               </a:rPr>
               <a:t>关联关系</a:t>
             </a:r>
@@ -35649,9 +35564,9 @@
                 <a:solidFill>
                   <a:schemeClr val="lt1"/>
                 </a:solidFill>
-                <a:latin typeface="Arial" panose="020B0604020202020204" pitchFamily="34" charset="0"/>
+                <a:latin typeface="Arial" panose="020B0604020202090204" pitchFamily="34" charset="0"/>
                 <a:ea typeface="思源黑体 CN Normal" panose="020B0400000000000000" pitchFamily="34" charset="-122"/>
-                <a:sym typeface="Arial" panose="020B0604020202020204" pitchFamily="34" charset="0"/>
+                <a:sym typeface="Arial" panose="020B0604020202090204" pitchFamily="34" charset="0"/>
               </a:endParaRPr>
             </a:p>
           </p:txBody>
@@ -35706,16 +35621,16 @@
             <a:p>
               <a:r>
                 <a:rPr sz="1700" dirty="0">
-                  <a:latin typeface="Arial" panose="020B0604020202020204" pitchFamily="34" charset="0"/>
+                  <a:latin typeface="Arial" panose="020B0604020202090204" pitchFamily="34" charset="0"/>
                   <a:ea typeface="思源黑体 CN Normal" panose="020B0400000000000000" pitchFamily="34" charset="-122"/>
-                  <a:sym typeface="Arial" panose="020B0604020202020204" pitchFamily="34" charset="0"/>
+                  <a:sym typeface="Arial" panose="020B0604020202090204" pitchFamily="34" charset="0"/>
                 </a:rPr>
                 <a:t>1.数据库数据准备</a:t>
               </a:r>
               <a:endParaRPr sz="1700" dirty="0">
-                <a:latin typeface="Arial" panose="020B0604020202020204" pitchFamily="34" charset="0"/>
+                <a:latin typeface="Arial" panose="020B0604020202090204" pitchFamily="34" charset="0"/>
                 <a:ea typeface="思源黑体 CN Normal" panose="020B0400000000000000" pitchFamily="34" charset="-122"/>
-                <a:sym typeface="Arial" panose="020B0604020202020204" pitchFamily="34" charset="0"/>
+                <a:sym typeface="Arial" panose="020B0604020202090204" pitchFamily="34" charset="0"/>
               </a:endParaRPr>
             </a:p>
           </p:txBody>
@@ -35775,7 +35690,7 @@
                 </a:solidFill>
                 <a:latin typeface="微软雅黑" panose="020B0503020204020204" pitchFamily="34" charset="-122"/>
                 <a:ea typeface="微软雅黑" panose="020B0503020204020204" pitchFamily="34" charset="-122"/>
-                <a:cs typeface="Courier New" panose="02070309020205020404" pitchFamily="49" charset="0"/>
+                <a:cs typeface="Courier New" panose="02070409020205090404" pitchFamily="49" charset="0"/>
               </a:rPr>
               <a:t>mybatis</a:t>
             </a:r>
@@ -35797,7 +35712,7 @@
                 </a:solidFill>
                 <a:latin typeface="微软雅黑" panose="020B0503020204020204" pitchFamily="34" charset="-122"/>
                 <a:ea typeface="微软雅黑" panose="020B0503020204020204" pitchFamily="34" charset="-122"/>
-                <a:cs typeface="Courier New" panose="02070309020205020404" pitchFamily="49" charset="0"/>
+                <a:cs typeface="Courier New" panose="02070409020205090404" pitchFamily="49" charset="0"/>
               </a:rPr>
               <a:t>创建</a:t>
             </a:r>
@@ -35819,7 +35734,7 @@
                 </a:solidFill>
                 <a:latin typeface="微软雅黑" panose="020B0503020204020204" pitchFamily="34" charset="-122"/>
                 <a:ea typeface="微软雅黑" panose="020B0503020204020204" pitchFamily="34" charset="-122"/>
-                <a:cs typeface="Courier New" panose="02070309020205020404" pitchFamily="49" charset="0"/>
+                <a:cs typeface="Courier New" panose="02070409020205090404" pitchFamily="49" charset="0"/>
               </a:rPr>
               <a:t>数据表</a:t>
             </a:r>
@@ -35841,7 +35756,7 @@
                 </a:solidFill>
                 <a:latin typeface="微软雅黑" panose="020B0503020204020204" pitchFamily="34" charset="-122"/>
                 <a:ea typeface="微软雅黑" panose="020B0503020204020204" pitchFamily="34" charset="-122"/>
-                <a:cs typeface="Courier New" panose="02070309020205020404" pitchFamily="49" charset="0"/>
+                <a:cs typeface="Courier New" panose="02070409020205090404" pitchFamily="49" charset="0"/>
               </a:rPr>
               <a:t>插入</a:t>
             </a:r>
@@ -35863,7 +35778,7 @@
                 </a:solidFill>
                 <a:latin typeface="微软雅黑" panose="020B0503020204020204" pitchFamily="34" charset="-122"/>
                 <a:ea typeface="微软雅黑" panose="020B0503020204020204" pitchFamily="34" charset="-122"/>
-                <a:cs typeface="Courier New" panose="02070309020205020404" pitchFamily="49" charset="0"/>
+                <a:cs typeface="Courier New" panose="02070409020205090404" pitchFamily="49" charset="0"/>
               </a:rPr>
               <a:t>测试数据</a:t>
             </a:r>
@@ -36202,7 +36117,7 @@
                 </a:solidFill>
                 <a:latin typeface="微软雅黑" panose="020B0503020204020204" pitchFamily="34" charset="-122"/>
                 <a:ea typeface="微软雅黑" panose="020B0503020204020204" pitchFamily="34" charset="-122"/>
-                <a:cs typeface="Courier New" panose="02070309020205020404" pitchFamily="49" charset="0"/>
+                <a:cs typeface="Courier New" panose="02070409020205090404" pitchFamily="49" charset="0"/>
               </a:rPr>
               <a:t>MyBatis</a:t>
             </a:r>
@@ -36224,7 +36139,7 @@
                 </a:solidFill>
                 <a:latin typeface="微软雅黑" panose="020B0503020204020204" pitchFamily="34" charset="-122"/>
                 <a:ea typeface="微软雅黑" panose="020B0503020204020204" pitchFamily="34" charset="-122"/>
-                <a:cs typeface="Courier New" panose="02070309020205020404" pitchFamily="49" charset="0"/>
+                <a:cs typeface="Courier New" panose="02070409020205090404" pitchFamily="49" charset="0"/>
               </a:rPr>
               <a:t>没有直接提供多对多关联查询的注解</a:t>
             </a:r>
@@ -36246,7 +36161,7 @@
                 </a:solidFill>
                 <a:latin typeface="微软雅黑" panose="020B0503020204020204" pitchFamily="34" charset="-122"/>
                 <a:ea typeface="微软雅黑" panose="020B0503020204020204" pitchFamily="34" charset="-122"/>
-                <a:cs typeface="Courier New" panose="02070309020205020404" pitchFamily="49" charset="0"/>
+                <a:cs typeface="Courier New" panose="02070409020205090404" pitchFamily="49" charset="0"/>
               </a:rPr>
               <a:t>个一对多关联查询实现</a:t>
             </a:r>
@@ -36467,9 +36382,9 @@
                 <a:solidFill>
                   <a:schemeClr val="lt1"/>
                 </a:solidFill>
-                <a:latin typeface="Arial" panose="020B0604020202020204" pitchFamily="34" charset="0"/>
+                <a:latin typeface="Arial" panose="020B0604020202090204" pitchFamily="34" charset="0"/>
                 <a:ea typeface="思源黑体 CN Normal" panose="020B0400000000000000" pitchFamily="34" charset="-122"/>
-                <a:sym typeface="Arial" panose="020B0604020202020204" pitchFamily="34" charset="0"/>
+                <a:sym typeface="Arial" panose="020B0604020202090204" pitchFamily="34" charset="0"/>
               </a:endParaRPr>
             </a:p>
           </p:txBody>
@@ -36524,16 +36439,16 @@
             <a:p>
               <a:r>
                 <a:rPr sz="1700" dirty="0">
-                  <a:latin typeface="Arial" panose="020B0604020202020204" pitchFamily="34" charset="0"/>
+                  <a:latin typeface="Arial" panose="020B0604020202090204" pitchFamily="34" charset="0"/>
                   <a:ea typeface="思源黑体 CN Normal" panose="020B0400000000000000" pitchFamily="34" charset="-122"/>
-                  <a:sym typeface="Arial" panose="020B0604020202020204" pitchFamily="34" charset="0"/>
+                  <a:sym typeface="Arial" panose="020B0604020202090204" pitchFamily="34" charset="0"/>
                 </a:rPr>
                 <a:t>2.创建实体类</a:t>
               </a:r>
               <a:endParaRPr sz="1700" dirty="0">
-                <a:latin typeface="Arial" panose="020B0604020202020204" pitchFamily="34" charset="0"/>
+                <a:latin typeface="Arial" panose="020B0604020202090204" pitchFamily="34" charset="0"/>
                 <a:ea typeface="思源黑体 CN Normal" panose="020B0400000000000000" pitchFamily="34" charset="-122"/>
-                <a:sym typeface="Arial" panose="020B0604020202020204" pitchFamily="34" charset="0"/>
+                <a:sym typeface="Arial" panose="020B0604020202090204" pitchFamily="34" charset="0"/>
               </a:endParaRPr>
             </a:p>
           </p:txBody>
@@ -36593,7 +36508,7 @@
                 </a:solidFill>
                 <a:latin typeface="微软雅黑" panose="020B0503020204020204" pitchFamily="34" charset="-122"/>
                 <a:ea typeface="微软雅黑" panose="020B0503020204020204" pitchFamily="34" charset="-122"/>
-                <a:cs typeface="Courier New" panose="02070309020205020404" pitchFamily="49" charset="0"/>
+                <a:cs typeface="Courier New" panose="02070409020205090404" pitchFamily="49" charset="0"/>
               </a:rPr>
               <a:t>创建</a:t>
             </a:r>
@@ -36615,7 +36530,7 @@
                 </a:solidFill>
                 <a:latin typeface="微软雅黑" panose="020B0503020204020204" pitchFamily="34" charset="-122"/>
                 <a:ea typeface="微软雅黑" panose="020B0503020204020204" pitchFamily="34" charset="-122"/>
-                <a:cs typeface="Courier New" panose="02070309020205020404" pitchFamily="49" charset="0"/>
+                <a:cs typeface="Courier New" panose="02070409020205090404" pitchFamily="49" charset="0"/>
               </a:rPr>
               <a:t>实体类</a:t>
             </a:r>
@@ -37138,9 +37053,9 @@
                 <a:solidFill>
                   <a:schemeClr val="lt1"/>
                 </a:solidFill>
-                <a:latin typeface="Arial" panose="020B0604020202020204" pitchFamily="34" charset="0"/>
+                <a:latin typeface="Arial" panose="020B0604020202090204" pitchFamily="34" charset="0"/>
                 <a:ea typeface="思源黑体 CN Normal" panose="020B0400000000000000" pitchFamily="34" charset="-122"/>
-                <a:sym typeface="Arial" panose="020B0604020202020204" pitchFamily="34" charset="0"/>
+                <a:sym typeface="Arial" panose="020B0604020202090204" pitchFamily="34" charset="0"/>
               </a:endParaRPr>
             </a:p>
           </p:txBody>
@@ -37195,16 +37110,16 @@
             <a:p>
               <a:r>
                 <a:rPr sz="1700" dirty="0">
-                  <a:latin typeface="Arial" panose="020B0604020202020204" pitchFamily="34" charset="0"/>
+                  <a:latin typeface="Arial" panose="020B0604020202090204" pitchFamily="34" charset="0"/>
                   <a:ea typeface="思源黑体 CN Normal" panose="020B0400000000000000" pitchFamily="34" charset="-122"/>
-                  <a:sym typeface="Arial" panose="020B0604020202020204" pitchFamily="34" charset="0"/>
+                  <a:sym typeface="Arial" panose="020B0604020202090204" pitchFamily="34" charset="0"/>
                 </a:rPr>
                 <a:t>3.创建Mapper接口</a:t>
               </a:r>
               <a:endParaRPr sz="1700" dirty="0">
-                <a:latin typeface="Arial" panose="020B0604020202020204" pitchFamily="34" charset="0"/>
+                <a:latin typeface="Arial" panose="020B0604020202090204" pitchFamily="34" charset="0"/>
                 <a:ea typeface="思源黑体 CN Normal" panose="020B0400000000000000" pitchFamily="34" charset="-122"/>
-                <a:sym typeface="Arial" panose="020B0604020202020204" pitchFamily="34" charset="0"/>
+                <a:sym typeface="Arial" panose="020B0604020202090204" pitchFamily="34" charset="0"/>
               </a:endParaRPr>
             </a:p>
           </p:txBody>
@@ -37264,7 +37179,7 @@
                 </a:solidFill>
                 <a:latin typeface="微软雅黑" panose="020B0503020204020204" pitchFamily="34" charset="-122"/>
                 <a:ea typeface="微软雅黑" panose="020B0503020204020204" pitchFamily="34" charset="-122"/>
-                <a:cs typeface="Courier New" panose="02070309020205020404" pitchFamily="49" charset="0"/>
+                <a:cs typeface="Courier New" panose="02070409020205090404" pitchFamily="49" charset="0"/>
               </a:rPr>
               <a:t>创建</a:t>
             </a:r>
@@ -37286,7 +37201,7 @@
                 </a:solidFill>
                 <a:latin typeface="微软雅黑" panose="020B0503020204020204" pitchFamily="34" charset="-122"/>
                 <a:ea typeface="微软雅黑" panose="020B0503020204020204" pitchFamily="34" charset="-122"/>
-                <a:cs typeface="Courier New" panose="02070309020205020404" pitchFamily="49" charset="0"/>
+                <a:cs typeface="Courier New" panose="02070409020205090404" pitchFamily="49" charset="0"/>
               </a:rPr>
               <a:t>Mapper接口StudentMapper</a:t>
             </a:r>
@@ -37308,7 +37223,7 @@
                 </a:solidFill>
                 <a:latin typeface="微软雅黑" panose="020B0503020204020204" pitchFamily="34" charset="-122"/>
                 <a:ea typeface="微软雅黑" panose="020B0503020204020204" pitchFamily="34" charset="-122"/>
-                <a:cs typeface="Courier New" panose="02070309020205020404" pitchFamily="49" charset="0"/>
+                <a:cs typeface="Courier New" panose="02070409020205090404" pitchFamily="49" charset="0"/>
               </a:rPr>
               <a:t>定义findById()方法</a:t>
             </a:r>
@@ -37330,7 +37245,7 @@
                 </a:solidFill>
                 <a:latin typeface="微软雅黑" panose="020B0503020204020204" pitchFamily="34" charset="-122"/>
                 <a:ea typeface="微软雅黑" panose="020B0503020204020204" pitchFamily="34" charset="-122"/>
-                <a:cs typeface="Courier New" panose="02070309020205020404" pitchFamily="49" charset="0"/>
+                <a:cs typeface="Courier New" panose="02070409020205090404" pitchFamily="49" charset="0"/>
               </a:rPr>
               <a:t>定义findByCourseId()方法</a:t>
             </a:r>
@@ -37683,7 +37598,7 @@
               <a:spcBef>
                 <a:spcPct val="20000"/>
               </a:spcBef>
-              <a:buFont typeface="Arial" panose="020B0604020202020204" pitchFamily="34" charset="0"/>
+              <a:buFont typeface="Arial" panose="020B0604020202090204" pitchFamily="34" charset="0"/>
               <a:buChar char="•"/>
               <a:defRPr sz="3200" kern="1200">
                 <a:solidFill>
@@ -37698,7 +37613,7 @@
               <a:spcBef>
                 <a:spcPct val="20000"/>
               </a:spcBef>
-              <a:buFont typeface="Arial" panose="020B0604020202020204" pitchFamily="34" charset="0"/>
+              <a:buFont typeface="Arial" panose="020B0604020202090204" pitchFamily="34" charset="0"/>
               <a:buChar char="–"/>
               <a:defRPr sz="2800" kern="1200">
                 <a:solidFill>
@@ -37713,7 +37628,7 @@
               <a:spcBef>
                 <a:spcPct val="20000"/>
               </a:spcBef>
-              <a:buFont typeface="Arial" panose="020B0604020202020204" pitchFamily="34" charset="0"/>
+              <a:buFont typeface="Arial" panose="020B0604020202090204" pitchFamily="34" charset="0"/>
               <a:buChar char="•"/>
               <a:defRPr sz="2400" kern="1200">
                 <a:solidFill>
@@ -37728,7 +37643,7 @@
               <a:spcBef>
                 <a:spcPct val="20000"/>
               </a:spcBef>
-              <a:buFont typeface="Arial" panose="020B0604020202020204" pitchFamily="34" charset="0"/>
+              <a:buFont typeface="Arial" panose="020B0604020202090204" pitchFamily="34" charset="0"/>
               <a:buChar char="–"/>
               <a:defRPr sz="2000" kern="1200">
                 <a:solidFill>
@@ -37743,7 +37658,7 @@
               <a:spcBef>
                 <a:spcPct val="20000"/>
               </a:spcBef>
-              <a:buFont typeface="Arial" panose="020B0604020202020204" pitchFamily="34" charset="0"/>
+              <a:buFont typeface="Arial" panose="020B0604020202090204" pitchFamily="34" charset="0"/>
               <a:buChar char="»"/>
               <a:defRPr sz="2000" kern="1200">
                 <a:solidFill>
@@ -37758,7 +37673,7 @@
               <a:spcBef>
                 <a:spcPct val="20000"/>
               </a:spcBef>
-              <a:buFont typeface="Arial" panose="020B0604020202020204" pitchFamily="34" charset="0"/>
+              <a:buFont typeface="Arial" panose="020B0604020202090204" pitchFamily="34" charset="0"/>
               <a:buChar char="•"/>
               <a:defRPr sz="2000" kern="1200">
                 <a:solidFill>
@@ -37773,7 +37688,7 @@
               <a:spcBef>
                 <a:spcPct val="20000"/>
               </a:spcBef>
-              <a:buFont typeface="Arial" panose="020B0604020202020204" pitchFamily="34" charset="0"/>
+              <a:buFont typeface="Arial" panose="020B0604020202090204" pitchFamily="34" charset="0"/>
               <a:buChar char="•"/>
               <a:defRPr sz="2000" kern="1200">
                 <a:solidFill>
@@ -37788,7 +37703,7 @@
               <a:spcBef>
                 <a:spcPct val="20000"/>
               </a:spcBef>
-              <a:buFont typeface="Arial" panose="020B0604020202020204" pitchFamily="34" charset="0"/>
+              <a:buFont typeface="Arial" panose="020B0604020202090204" pitchFamily="34" charset="0"/>
               <a:buChar char="•"/>
               <a:defRPr sz="2000" kern="1200">
                 <a:solidFill>
@@ -37803,7 +37718,7 @@
               <a:spcBef>
                 <a:spcPct val="20000"/>
               </a:spcBef>
-              <a:buFont typeface="Arial" panose="020B0604020202020204" pitchFamily="34" charset="0"/>
+              <a:buFont typeface="Arial" panose="020B0604020202090204" pitchFamily="34" charset="0"/>
               <a:buChar char="•"/>
               <a:defRPr sz="2000" kern="1200">
                 <a:solidFill>
@@ -38568,9 +38483,9 @@
                 <a:solidFill>
                   <a:schemeClr val="lt1"/>
                 </a:solidFill>
-                <a:latin typeface="Arial" panose="020B0604020202020204" pitchFamily="34" charset="0"/>
+                <a:latin typeface="Arial" panose="020B0604020202090204" pitchFamily="34" charset="0"/>
                 <a:ea typeface="思源黑体 CN Normal" panose="020B0400000000000000" pitchFamily="34" charset="-122"/>
-                <a:sym typeface="Arial" panose="020B0604020202020204" pitchFamily="34" charset="0"/>
+                <a:sym typeface="Arial" panose="020B0604020202090204" pitchFamily="34" charset="0"/>
               </a:endParaRPr>
             </a:p>
           </p:txBody>
@@ -38625,16 +38540,16 @@
             <a:p>
               <a:r>
                 <a:rPr sz="1700" dirty="0">
-                  <a:latin typeface="Arial" panose="020B0604020202020204" pitchFamily="34" charset="0"/>
+                  <a:latin typeface="Arial" panose="020B0604020202090204" pitchFamily="34" charset="0"/>
                   <a:ea typeface="思源黑体 CN Normal" panose="020B0400000000000000" pitchFamily="34" charset="-122"/>
-                  <a:sym typeface="Arial" panose="020B0604020202020204" pitchFamily="34" charset="0"/>
+                  <a:sym typeface="Arial" panose="020B0604020202090204" pitchFamily="34" charset="0"/>
                 </a:rPr>
                 <a:t>3.创建Mapper接口</a:t>
               </a:r>
               <a:endParaRPr sz="1700" dirty="0">
-                <a:latin typeface="Arial" panose="020B0604020202020204" pitchFamily="34" charset="0"/>
+                <a:latin typeface="Arial" panose="020B0604020202090204" pitchFamily="34" charset="0"/>
                 <a:ea typeface="思源黑体 CN Normal" panose="020B0400000000000000" pitchFamily="34" charset="-122"/>
-                <a:sym typeface="Arial" panose="020B0604020202020204" pitchFamily="34" charset="0"/>
+                <a:sym typeface="Arial" panose="020B0604020202090204" pitchFamily="34" charset="0"/>
               </a:endParaRPr>
             </a:p>
           </p:txBody>
@@ -38694,7 +38609,7 @@
                 </a:solidFill>
                 <a:latin typeface="微软雅黑" panose="020B0503020204020204" pitchFamily="34" charset="-122"/>
                 <a:ea typeface="微软雅黑" panose="020B0503020204020204" pitchFamily="34" charset="-122"/>
-                <a:cs typeface="Courier New" panose="02070309020205020404" pitchFamily="49" charset="0"/>
+                <a:cs typeface="Courier New" panose="02070409020205090404" pitchFamily="49" charset="0"/>
               </a:rPr>
               <a:t>创建</a:t>
             </a:r>
@@ -38716,7 +38631,7 @@
                 </a:solidFill>
                 <a:latin typeface="微软雅黑" panose="020B0503020204020204" pitchFamily="34" charset="-122"/>
                 <a:ea typeface="微软雅黑" panose="020B0503020204020204" pitchFamily="34" charset="-122"/>
-                <a:cs typeface="Courier New" panose="02070309020205020404" pitchFamily="49" charset="0"/>
+                <a:cs typeface="Courier New" panose="02070409020205090404" pitchFamily="49" charset="0"/>
               </a:rPr>
               <a:t>Mapper接口CourseMapper</a:t>
             </a:r>
@@ -38738,7 +38653,7 @@
                 </a:solidFill>
                 <a:latin typeface="微软雅黑" panose="020B0503020204020204" pitchFamily="34" charset="-122"/>
                 <a:ea typeface="微软雅黑" panose="020B0503020204020204" pitchFamily="34" charset="-122"/>
-                <a:cs typeface="Courier New" panose="02070309020205020404" pitchFamily="49" charset="0"/>
+                <a:cs typeface="Courier New" panose="02070409020205090404" pitchFamily="49" charset="0"/>
               </a:rPr>
               <a:t>findById()方法</a:t>
             </a:r>
@@ -38760,7 +38675,7 @@
                 </a:solidFill>
                 <a:latin typeface="微软雅黑" panose="020B0503020204020204" pitchFamily="34" charset="-122"/>
                 <a:ea typeface="微软雅黑" panose="020B0503020204020204" pitchFamily="34" charset="-122"/>
-                <a:cs typeface="Courier New" panose="02070309020205020404" pitchFamily="49" charset="0"/>
+                <a:cs typeface="Courier New" panose="02070409020205090404" pitchFamily="49" charset="0"/>
               </a:rPr>
               <a:t>findByStudentId()方法</a:t>
             </a:r>
@@ -39251,9 +39166,9 @@
                 <a:solidFill>
                   <a:schemeClr val="lt1"/>
                 </a:solidFill>
-                <a:latin typeface="Arial" panose="020B0604020202020204" pitchFamily="34" charset="0"/>
+                <a:latin typeface="Arial" panose="020B0604020202090204" pitchFamily="34" charset="0"/>
                 <a:ea typeface="思源黑体 CN Normal" panose="020B0400000000000000" pitchFamily="34" charset="-122"/>
-                <a:sym typeface="Arial" panose="020B0604020202020204" pitchFamily="34" charset="0"/>
+                <a:sym typeface="Arial" panose="020B0604020202090204" pitchFamily="34" charset="0"/>
               </a:endParaRPr>
             </a:p>
           </p:txBody>
@@ -39308,16 +39223,16 @@
             <a:p>
               <a:r>
                 <a:rPr sz="1700" dirty="0">
-                  <a:latin typeface="Arial" panose="020B0604020202020204" pitchFamily="34" charset="0"/>
+                  <a:latin typeface="Arial" panose="020B0604020202090204" pitchFamily="34" charset="0"/>
                   <a:ea typeface="思源黑体 CN Normal" panose="020B0400000000000000" pitchFamily="34" charset="-122"/>
-                  <a:sym typeface="Arial" panose="020B0604020202020204" pitchFamily="34" charset="0"/>
+                  <a:sym typeface="Arial" panose="020B0604020202090204" pitchFamily="34" charset="0"/>
                 </a:rPr>
                 <a:t>4.定义测试方法</a:t>
               </a:r>
               <a:endParaRPr sz="1700" dirty="0">
-                <a:latin typeface="Arial" panose="020B0604020202020204" pitchFamily="34" charset="0"/>
+                <a:latin typeface="Arial" panose="020B0604020202090204" pitchFamily="34" charset="0"/>
                 <a:ea typeface="思源黑体 CN Normal" panose="020B0400000000000000" pitchFamily="34" charset="-122"/>
-                <a:sym typeface="Arial" panose="020B0604020202020204" pitchFamily="34" charset="0"/>
+                <a:sym typeface="Arial" panose="020B0604020202090204" pitchFamily="34" charset="0"/>
               </a:endParaRPr>
             </a:p>
           </p:txBody>
@@ -39388,7 +39303,7 @@
                 </a:solidFill>
                 <a:latin typeface="微软雅黑" panose="020B0503020204020204" pitchFamily="34" charset="-122"/>
                 <a:ea typeface="微软雅黑" panose="020B0503020204020204" pitchFamily="34" charset="-122"/>
-                <a:cs typeface="Courier New" panose="02070309020205020404" pitchFamily="49" charset="0"/>
+                <a:cs typeface="Courier New" panose="02070409020205090404" pitchFamily="49" charset="0"/>
               </a:rPr>
               <a:t>测试manyToManyTest()方法</a:t>
             </a:r>
@@ -39410,7 +39325,7 @@
                 </a:solidFill>
                 <a:latin typeface="微软雅黑" panose="020B0503020204020204" pitchFamily="34" charset="-122"/>
                 <a:ea typeface="微软雅黑" panose="020B0503020204020204" pitchFamily="34" charset="-122"/>
-                <a:cs typeface="Courier New" panose="02070309020205020404" pitchFamily="49" charset="0"/>
+                <a:cs typeface="Courier New" panose="02070409020205090404" pitchFamily="49" charset="0"/>
               </a:rPr>
               <a:t>SqlSession对象获取StudentMapper对象和CourseMapper对象</a:t>
             </a:r>
@@ -39432,7 +39347,7 @@
                 </a:solidFill>
                 <a:latin typeface="微软雅黑" panose="020B0503020204020204" pitchFamily="34" charset="-122"/>
                 <a:ea typeface="微软雅黑" panose="020B0503020204020204" pitchFamily="34" charset="-122"/>
-                <a:cs typeface="Courier New" panose="02070309020205020404" pitchFamily="49" charset="0"/>
+                <a:cs typeface="Courier New" panose="02070409020205090404" pitchFamily="49" charset="0"/>
               </a:rPr>
               <a:t>调用对应的findById方法</a:t>
             </a:r>
@@ -39911,9 +39826,9 @@
                 <a:solidFill>
                   <a:schemeClr val="lt1"/>
                 </a:solidFill>
-                <a:latin typeface="Arial" panose="020B0604020202020204" pitchFamily="34" charset="0"/>
+                <a:latin typeface="Arial" panose="020B0604020202090204" pitchFamily="34" charset="0"/>
                 <a:ea typeface="思源黑体 CN Normal" panose="020B0400000000000000" pitchFamily="34" charset="-122"/>
-                <a:sym typeface="Arial" panose="020B0604020202020204" pitchFamily="34" charset="0"/>
+                <a:sym typeface="Arial" panose="020B0604020202090204" pitchFamily="34" charset="0"/>
               </a:endParaRPr>
             </a:p>
           </p:txBody>
@@ -39968,16 +39883,16 @@
             <a:p>
               <a:r>
                 <a:rPr sz="1700" dirty="0">
-                  <a:latin typeface="Arial" panose="020B0604020202020204" pitchFamily="34" charset="0"/>
+                  <a:latin typeface="Arial" panose="020B0604020202090204" pitchFamily="34" charset="0"/>
                   <a:ea typeface="思源黑体 CN Normal" panose="020B0400000000000000" pitchFamily="34" charset="-122"/>
-                  <a:sym typeface="Arial" panose="020B0604020202020204" pitchFamily="34" charset="0"/>
+                  <a:sym typeface="Arial" panose="020B0604020202090204" pitchFamily="34" charset="0"/>
                 </a:rPr>
                 <a:t>5.测试效果</a:t>
               </a:r>
               <a:endParaRPr sz="1700" dirty="0">
-                <a:latin typeface="Arial" panose="020B0604020202020204" pitchFamily="34" charset="0"/>
+                <a:latin typeface="Arial" panose="020B0604020202090204" pitchFamily="34" charset="0"/>
                 <a:ea typeface="思源黑体 CN Normal" panose="020B0400000000000000" pitchFamily="34" charset="-122"/>
-                <a:sym typeface="Arial" panose="020B0604020202020204" pitchFamily="34" charset="0"/>
+                <a:sym typeface="Arial" panose="020B0604020202090204" pitchFamily="34" charset="0"/>
               </a:endParaRPr>
             </a:p>
           </p:txBody>
@@ -40026,7 +39941,7 @@
                 </a:solidFill>
                 <a:latin typeface="微软雅黑" panose="020B0503020204020204" pitchFamily="34" charset="-122"/>
                 <a:ea typeface="微软雅黑" panose="020B0503020204020204" pitchFamily="34" charset="-122"/>
-                <a:cs typeface="Courier New" panose="02070309020205020404" pitchFamily="49" charset="0"/>
+                <a:cs typeface="Courier New" panose="02070409020205090404" pitchFamily="49" charset="0"/>
               </a:rPr>
               <a:t>运行manyToManyTest()方法</a:t>
             </a:r>
@@ -40231,7 +40146,7 @@
                   <a:schemeClr val="tx1"/>
                 </a:solidFill>
                 <a:latin typeface="Calibri" panose="020F0502020204030204" pitchFamily="34" charset="0"/>
-                <a:ea typeface="宋体" panose="02010600030101010101" pitchFamily="2" charset="-122"/>
+                <a:ea typeface="宋体" pitchFamily="2" charset="-122"/>
               </a:defRPr>
             </a:lvl1pPr>
             <a:lvl2pPr marL="742950" indent="-285750">
@@ -40240,7 +40155,7 @@
                   <a:schemeClr val="tx1"/>
                 </a:solidFill>
                 <a:latin typeface="Calibri" panose="020F0502020204030204" pitchFamily="34" charset="0"/>
-                <a:ea typeface="宋体" panose="02010600030101010101" pitchFamily="2" charset="-122"/>
+                <a:ea typeface="宋体" pitchFamily="2" charset="-122"/>
               </a:defRPr>
             </a:lvl2pPr>
             <a:lvl3pPr marL="1143000" indent="-228600">
@@ -40249,7 +40164,7 @@
                   <a:schemeClr val="tx1"/>
                 </a:solidFill>
                 <a:latin typeface="Calibri" panose="020F0502020204030204" pitchFamily="34" charset="0"/>
-                <a:ea typeface="宋体" panose="02010600030101010101" pitchFamily="2" charset="-122"/>
+                <a:ea typeface="宋体" pitchFamily="2" charset="-122"/>
               </a:defRPr>
             </a:lvl3pPr>
             <a:lvl4pPr marL="1600200" indent="-228600">
@@ -40258,7 +40173,7 @@
                   <a:schemeClr val="tx1"/>
                 </a:solidFill>
                 <a:latin typeface="Calibri" panose="020F0502020204030204" pitchFamily="34" charset="0"/>
-                <a:ea typeface="宋体" panose="02010600030101010101" pitchFamily="2" charset="-122"/>
+                <a:ea typeface="宋体" pitchFamily="2" charset="-122"/>
               </a:defRPr>
             </a:lvl4pPr>
             <a:lvl5pPr marL="2057400" indent="-228600">
@@ -40267,7 +40182,7 @@
                   <a:schemeClr val="tx1"/>
                 </a:solidFill>
                 <a:latin typeface="Calibri" panose="020F0502020204030204" pitchFamily="34" charset="0"/>
-                <a:ea typeface="宋体" panose="02010600030101010101" pitchFamily="2" charset="-122"/>
+                <a:ea typeface="宋体" pitchFamily="2" charset="-122"/>
               </a:defRPr>
             </a:lvl5pPr>
             <a:lvl6pPr marL="2514600" indent="-228600" eaLnBrk="0" fontAlgn="base" hangingPunct="0">
@@ -40282,7 +40197,7 @@
                   <a:schemeClr val="tx1"/>
                 </a:solidFill>
                 <a:latin typeface="Calibri" panose="020F0502020204030204" pitchFamily="34" charset="0"/>
-                <a:ea typeface="宋体" panose="02010600030101010101" pitchFamily="2" charset="-122"/>
+                <a:ea typeface="宋体" pitchFamily="2" charset="-122"/>
               </a:defRPr>
             </a:lvl6pPr>
             <a:lvl7pPr marL="2971800" indent="-228600" eaLnBrk="0" fontAlgn="base" hangingPunct="0">
@@ -40297,7 +40212,7 @@
                   <a:schemeClr val="tx1"/>
                 </a:solidFill>
                 <a:latin typeface="Calibri" panose="020F0502020204030204" pitchFamily="34" charset="0"/>
-                <a:ea typeface="宋体" panose="02010600030101010101" pitchFamily="2" charset="-122"/>
+                <a:ea typeface="宋体" pitchFamily="2" charset="-122"/>
               </a:defRPr>
             </a:lvl7pPr>
             <a:lvl8pPr marL="3429000" indent="-228600" eaLnBrk="0" fontAlgn="base" hangingPunct="0">
@@ -40312,7 +40227,7 @@
                   <a:schemeClr val="tx1"/>
                 </a:solidFill>
                 <a:latin typeface="Calibri" panose="020F0502020204030204" pitchFamily="34" charset="0"/>
-                <a:ea typeface="宋体" panose="02010600030101010101" pitchFamily="2" charset="-122"/>
+                <a:ea typeface="宋体" pitchFamily="2" charset="-122"/>
               </a:defRPr>
             </a:lvl8pPr>
             <a:lvl9pPr marL="3886200" indent="-228600" eaLnBrk="0" fontAlgn="base" hangingPunct="0">
@@ -40327,7 +40242,7 @@
                   <a:schemeClr val="tx1"/>
                 </a:solidFill>
                 <a:latin typeface="Calibri" panose="020F0502020204030204" pitchFamily="34" charset="0"/>
-                <a:ea typeface="宋体" panose="02010600030101010101" pitchFamily="2" charset="-122"/>
+                <a:ea typeface="宋体" pitchFamily="2" charset="-122"/>
               </a:defRPr>
             </a:lvl9pPr>
           </a:lstStyle>
@@ -41139,7 +41054,7 @@
                   <a:schemeClr val="tx1"/>
                 </a:solidFill>
                 <a:latin typeface="Calibri" panose="020F0502020204030204" pitchFamily="34" charset="0"/>
-                <a:ea typeface="宋体" panose="02010600030101010101" pitchFamily="2" charset="-122"/>
+                <a:ea typeface="宋体" pitchFamily="2" charset="-122"/>
               </a:defRPr>
             </a:lvl1pPr>
             <a:lvl2pPr marL="742950" indent="-285750">
@@ -41148,7 +41063,7 @@
                   <a:schemeClr val="tx1"/>
                 </a:solidFill>
                 <a:latin typeface="Calibri" panose="020F0502020204030204" pitchFamily="34" charset="0"/>
-                <a:ea typeface="宋体" panose="02010600030101010101" pitchFamily="2" charset="-122"/>
+                <a:ea typeface="宋体" pitchFamily="2" charset="-122"/>
               </a:defRPr>
             </a:lvl2pPr>
             <a:lvl3pPr marL="1143000" indent="-228600">
@@ -41157,7 +41072,7 @@
                   <a:schemeClr val="tx1"/>
                 </a:solidFill>
                 <a:latin typeface="Calibri" panose="020F0502020204030204" pitchFamily="34" charset="0"/>
-                <a:ea typeface="宋体" panose="02010600030101010101" pitchFamily="2" charset="-122"/>
+                <a:ea typeface="宋体" pitchFamily="2" charset="-122"/>
               </a:defRPr>
             </a:lvl3pPr>
             <a:lvl4pPr marL="1600200" indent="-228600">
@@ -41166,7 +41081,7 @@
                   <a:schemeClr val="tx1"/>
                 </a:solidFill>
                 <a:latin typeface="Calibri" panose="020F0502020204030204" pitchFamily="34" charset="0"/>
-                <a:ea typeface="宋体" panose="02010600030101010101" pitchFamily="2" charset="-122"/>
+                <a:ea typeface="宋体" pitchFamily="2" charset="-122"/>
               </a:defRPr>
             </a:lvl4pPr>
             <a:lvl5pPr marL="2057400" indent="-228600">
@@ -41175,7 +41090,7 @@
                   <a:schemeClr val="tx1"/>
                 </a:solidFill>
                 <a:latin typeface="Calibri" panose="020F0502020204030204" pitchFamily="34" charset="0"/>
-                <a:ea typeface="宋体" panose="02010600030101010101" pitchFamily="2" charset="-122"/>
+                <a:ea typeface="宋体" pitchFamily="2" charset="-122"/>
               </a:defRPr>
             </a:lvl5pPr>
             <a:lvl6pPr marL="2514600" indent="-228600" eaLnBrk="0" fontAlgn="base" hangingPunct="0">
@@ -41190,7 +41105,7 @@
                   <a:schemeClr val="tx1"/>
                 </a:solidFill>
                 <a:latin typeface="Calibri" panose="020F0502020204030204" pitchFamily="34" charset="0"/>
-                <a:ea typeface="宋体" panose="02010600030101010101" pitchFamily="2" charset="-122"/>
+                <a:ea typeface="宋体" pitchFamily="2" charset="-122"/>
               </a:defRPr>
             </a:lvl6pPr>
             <a:lvl7pPr marL="2971800" indent="-228600" eaLnBrk="0" fontAlgn="base" hangingPunct="0">
@@ -41205,7 +41120,7 @@
                   <a:schemeClr val="tx1"/>
                 </a:solidFill>
                 <a:latin typeface="Calibri" panose="020F0502020204030204" pitchFamily="34" charset="0"/>
-                <a:ea typeface="宋体" panose="02010600030101010101" pitchFamily="2" charset="-122"/>
+                <a:ea typeface="宋体" pitchFamily="2" charset="-122"/>
               </a:defRPr>
             </a:lvl7pPr>
             <a:lvl8pPr marL="3429000" indent="-228600" eaLnBrk="0" fontAlgn="base" hangingPunct="0">
@@ -41220,7 +41135,7 @@
                   <a:schemeClr val="tx1"/>
                 </a:solidFill>
                 <a:latin typeface="Calibri" panose="020F0502020204030204" pitchFamily="34" charset="0"/>
-                <a:ea typeface="宋体" panose="02010600030101010101" pitchFamily="2" charset="-122"/>
+                <a:ea typeface="宋体" pitchFamily="2" charset="-122"/>
               </a:defRPr>
             </a:lvl8pPr>
             <a:lvl9pPr marL="3886200" indent="-228600" eaLnBrk="0" fontAlgn="base" hangingPunct="0">
@@ -41235,7 +41150,7 @@
                   <a:schemeClr val="tx1"/>
                 </a:solidFill>
                 <a:latin typeface="Calibri" panose="020F0502020204030204" pitchFamily="34" charset="0"/>
-                <a:ea typeface="宋体" panose="02010600030101010101" pitchFamily="2" charset="-122"/>
+                <a:ea typeface="宋体" pitchFamily="2" charset="-122"/>
               </a:defRPr>
             </a:lvl9pPr>
           </a:lstStyle>
@@ -41786,7 +41701,7 @@
                   <a:schemeClr val="tx1"/>
                 </a:solidFill>
                 <a:latin typeface="Calibri" panose="020F0502020204030204" pitchFamily="34" charset="0"/>
-                <a:ea typeface="宋体" panose="02010600030101010101" pitchFamily="2" charset="-122"/>
+                <a:ea typeface="宋体" pitchFamily="2" charset="-122"/>
               </a:defRPr>
             </a:lvl1pPr>
             <a:lvl2pPr marL="742950" indent="-285750">
@@ -41795,7 +41710,7 @@
                   <a:schemeClr val="tx1"/>
                 </a:solidFill>
                 <a:latin typeface="Calibri" panose="020F0502020204030204" pitchFamily="34" charset="0"/>
-                <a:ea typeface="宋体" panose="02010600030101010101" pitchFamily="2" charset="-122"/>
+                <a:ea typeface="宋体" pitchFamily="2" charset="-122"/>
               </a:defRPr>
             </a:lvl2pPr>
             <a:lvl3pPr marL="1143000" indent="-228600">
@@ -41804,7 +41719,7 @@
                   <a:schemeClr val="tx1"/>
                 </a:solidFill>
                 <a:latin typeface="Calibri" panose="020F0502020204030204" pitchFamily="34" charset="0"/>
-                <a:ea typeface="宋体" panose="02010600030101010101" pitchFamily="2" charset="-122"/>
+                <a:ea typeface="宋体" pitchFamily="2" charset="-122"/>
               </a:defRPr>
             </a:lvl3pPr>
             <a:lvl4pPr marL="1600200" indent="-228600">
@@ -41813,7 +41728,7 @@
                   <a:schemeClr val="tx1"/>
                 </a:solidFill>
                 <a:latin typeface="Calibri" panose="020F0502020204030204" pitchFamily="34" charset="0"/>
-                <a:ea typeface="宋体" panose="02010600030101010101" pitchFamily="2" charset="-122"/>
+                <a:ea typeface="宋体" pitchFamily="2" charset="-122"/>
               </a:defRPr>
             </a:lvl4pPr>
             <a:lvl5pPr marL="2057400" indent="-228600">
@@ -41822,7 +41737,7 @@
                   <a:schemeClr val="tx1"/>
                 </a:solidFill>
                 <a:latin typeface="Calibri" panose="020F0502020204030204" pitchFamily="34" charset="0"/>
-                <a:ea typeface="宋体" panose="02010600030101010101" pitchFamily="2" charset="-122"/>
+                <a:ea typeface="宋体" pitchFamily="2" charset="-122"/>
               </a:defRPr>
             </a:lvl5pPr>
             <a:lvl6pPr marL="2514600" indent="-228600" eaLnBrk="0" fontAlgn="base" hangingPunct="0">
@@ -41837,7 +41752,7 @@
                   <a:schemeClr val="tx1"/>
                 </a:solidFill>
                 <a:latin typeface="Calibri" panose="020F0502020204030204" pitchFamily="34" charset="0"/>
-                <a:ea typeface="宋体" panose="02010600030101010101" pitchFamily="2" charset="-122"/>
+                <a:ea typeface="宋体" pitchFamily="2" charset="-122"/>
               </a:defRPr>
             </a:lvl6pPr>
             <a:lvl7pPr marL="2971800" indent="-228600" eaLnBrk="0" fontAlgn="base" hangingPunct="0">
@@ -41852,7 +41767,7 @@
                   <a:schemeClr val="tx1"/>
                 </a:solidFill>
                 <a:latin typeface="Calibri" panose="020F0502020204030204" pitchFamily="34" charset="0"/>
-                <a:ea typeface="宋体" panose="02010600030101010101" pitchFamily="2" charset="-122"/>
+                <a:ea typeface="宋体" pitchFamily="2" charset="-122"/>
               </a:defRPr>
             </a:lvl7pPr>
             <a:lvl8pPr marL="3429000" indent="-228600" eaLnBrk="0" fontAlgn="base" hangingPunct="0">
@@ -41867,7 +41782,7 @@
                   <a:schemeClr val="tx1"/>
                 </a:solidFill>
                 <a:latin typeface="Calibri" panose="020F0502020204030204" pitchFamily="34" charset="0"/>
-                <a:ea typeface="宋体" panose="02010600030101010101" pitchFamily="2" charset="-122"/>
+                <a:ea typeface="宋体" pitchFamily="2" charset="-122"/>
               </a:defRPr>
             </a:lvl8pPr>
             <a:lvl9pPr marL="3886200" indent="-228600" eaLnBrk="0" fontAlgn="base" hangingPunct="0">
@@ -41882,7 +41797,7 @@
                   <a:schemeClr val="tx1"/>
                 </a:solidFill>
                 <a:latin typeface="Calibri" panose="020F0502020204030204" pitchFamily="34" charset="0"/>
-                <a:ea typeface="宋体" panose="02010600030101010101" pitchFamily="2" charset="-122"/>
+                <a:ea typeface="宋体" pitchFamily="2" charset="-122"/>
               </a:defRPr>
             </a:lvl9pPr>
           </a:lstStyle>
@@ -42037,7 +41952,7 @@
                   <a:schemeClr val="tx1"/>
                 </a:solidFill>
                 <a:latin typeface="Calibri" panose="020F0502020204030204" pitchFamily="34" charset="0"/>
-                <a:ea typeface="宋体" panose="02010600030101010101" pitchFamily="2" charset="-122"/>
+                <a:ea typeface="宋体" pitchFamily="2" charset="-122"/>
               </a:defRPr>
             </a:lvl1pPr>
             <a:lvl2pPr marL="742950" indent="-285750">
@@ -42046,7 +41961,7 @@
                   <a:schemeClr val="tx1"/>
                 </a:solidFill>
                 <a:latin typeface="Calibri" panose="020F0502020204030204" pitchFamily="34" charset="0"/>
-                <a:ea typeface="宋体" panose="02010600030101010101" pitchFamily="2" charset="-122"/>
+                <a:ea typeface="宋体" pitchFamily="2" charset="-122"/>
               </a:defRPr>
             </a:lvl2pPr>
             <a:lvl3pPr marL="1143000" indent="-228600">
@@ -42055,7 +41970,7 @@
                   <a:schemeClr val="tx1"/>
                 </a:solidFill>
                 <a:latin typeface="Calibri" panose="020F0502020204030204" pitchFamily="34" charset="0"/>
-                <a:ea typeface="宋体" panose="02010600030101010101" pitchFamily="2" charset="-122"/>
+                <a:ea typeface="宋体" pitchFamily="2" charset="-122"/>
               </a:defRPr>
             </a:lvl3pPr>
             <a:lvl4pPr marL="1600200" indent="-228600">
@@ -42064,7 +41979,7 @@
                   <a:schemeClr val="tx1"/>
                 </a:solidFill>
                 <a:latin typeface="Calibri" panose="020F0502020204030204" pitchFamily="34" charset="0"/>
-                <a:ea typeface="宋体" panose="02010600030101010101" pitchFamily="2" charset="-122"/>
+                <a:ea typeface="宋体" pitchFamily="2" charset="-122"/>
               </a:defRPr>
             </a:lvl4pPr>
             <a:lvl5pPr marL="2057400" indent="-228600">
@@ -42073,7 +41988,7 @@
                   <a:schemeClr val="tx1"/>
                 </a:solidFill>
                 <a:latin typeface="Calibri" panose="020F0502020204030204" pitchFamily="34" charset="0"/>
-                <a:ea typeface="宋体" panose="02010600030101010101" pitchFamily="2" charset="-122"/>
+                <a:ea typeface="宋体" pitchFamily="2" charset="-122"/>
               </a:defRPr>
             </a:lvl5pPr>
             <a:lvl6pPr marL="2514600" indent="-228600" eaLnBrk="0" fontAlgn="base" hangingPunct="0">
@@ -42088,7 +42003,7 @@
                   <a:schemeClr val="tx1"/>
                 </a:solidFill>
                 <a:latin typeface="Calibri" panose="020F0502020204030204" pitchFamily="34" charset="0"/>
-                <a:ea typeface="宋体" panose="02010600030101010101" pitchFamily="2" charset="-122"/>
+                <a:ea typeface="宋体" pitchFamily="2" charset="-122"/>
               </a:defRPr>
             </a:lvl6pPr>
             <a:lvl7pPr marL="2971800" indent="-228600" eaLnBrk="0" fontAlgn="base" hangingPunct="0">
@@ -42103,7 +42018,7 @@
                   <a:schemeClr val="tx1"/>
                 </a:solidFill>
                 <a:latin typeface="Calibri" panose="020F0502020204030204" pitchFamily="34" charset="0"/>
-                <a:ea typeface="宋体" panose="02010600030101010101" pitchFamily="2" charset="-122"/>
+                <a:ea typeface="宋体" pitchFamily="2" charset="-122"/>
               </a:defRPr>
             </a:lvl7pPr>
             <a:lvl8pPr marL="3429000" indent="-228600" eaLnBrk="0" fontAlgn="base" hangingPunct="0">
@@ -42118,7 +42033,7 @@
                   <a:schemeClr val="tx1"/>
                 </a:solidFill>
                 <a:latin typeface="Calibri" panose="020F0502020204030204" pitchFamily="34" charset="0"/>
-                <a:ea typeface="宋体" panose="02010600030101010101" pitchFamily="2" charset="-122"/>
+                <a:ea typeface="宋体" pitchFamily="2" charset="-122"/>
               </a:defRPr>
             </a:lvl8pPr>
             <a:lvl9pPr marL="3886200" indent="-228600" eaLnBrk="0" fontAlgn="base" hangingPunct="0">
@@ -42133,7 +42048,7 @@
                   <a:schemeClr val="tx1"/>
                 </a:solidFill>
                 <a:latin typeface="Calibri" panose="020F0502020204030204" pitchFamily="34" charset="0"/>
-                <a:ea typeface="宋体" panose="02010600030101010101" pitchFamily="2" charset="-122"/>
+                <a:ea typeface="宋体" pitchFamily="2" charset="-122"/>
               </a:defRPr>
             </a:lvl9pPr>
           </a:lstStyle>
@@ -42228,7 +42143,7 @@
                   <a:schemeClr val="tx1"/>
                 </a:solidFill>
                 <a:latin typeface="Calibri" panose="020F0502020204030204" pitchFamily="34" charset="0"/>
-                <a:ea typeface="宋体" panose="02010600030101010101" pitchFamily="2" charset="-122"/>
+                <a:ea typeface="宋体" pitchFamily="2" charset="-122"/>
               </a:defRPr>
             </a:lvl1pPr>
             <a:lvl2pPr marL="742950" indent="-285750">
@@ -42237,7 +42152,7 @@
                   <a:schemeClr val="tx1"/>
                 </a:solidFill>
                 <a:latin typeface="Calibri" panose="020F0502020204030204" pitchFamily="34" charset="0"/>
-                <a:ea typeface="宋体" panose="02010600030101010101" pitchFamily="2" charset="-122"/>
+                <a:ea typeface="宋体" pitchFamily="2" charset="-122"/>
               </a:defRPr>
             </a:lvl2pPr>
             <a:lvl3pPr marL="1143000" indent="-228600">
@@ -42246,7 +42161,7 @@
                   <a:schemeClr val="tx1"/>
                 </a:solidFill>
                 <a:latin typeface="Calibri" panose="020F0502020204030204" pitchFamily="34" charset="0"/>
-                <a:ea typeface="宋体" panose="02010600030101010101" pitchFamily="2" charset="-122"/>
+                <a:ea typeface="宋体" pitchFamily="2" charset="-122"/>
               </a:defRPr>
             </a:lvl3pPr>
             <a:lvl4pPr marL="1600200" indent="-228600">
@@ -42255,7 +42170,7 @@
                   <a:schemeClr val="tx1"/>
                 </a:solidFill>
                 <a:latin typeface="Calibri" panose="020F0502020204030204" pitchFamily="34" charset="0"/>
-                <a:ea typeface="宋体" panose="02010600030101010101" pitchFamily="2" charset="-122"/>
+                <a:ea typeface="宋体" pitchFamily="2" charset="-122"/>
               </a:defRPr>
             </a:lvl4pPr>
             <a:lvl5pPr marL="2057400" indent="-228600">
@@ -42264,7 +42179,7 @@
                   <a:schemeClr val="tx1"/>
                 </a:solidFill>
                 <a:latin typeface="Calibri" panose="020F0502020204030204" pitchFamily="34" charset="0"/>
-                <a:ea typeface="宋体" panose="02010600030101010101" pitchFamily="2" charset="-122"/>
+                <a:ea typeface="宋体" pitchFamily="2" charset="-122"/>
               </a:defRPr>
             </a:lvl5pPr>
             <a:lvl6pPr marL="2514600" indent="-228600" eaLnBrk="0" fontAlgn="base" hangingPunct="0">
@@ -42279,7 +42194,7 @@
                   <a:schemeClr val="tx1"/>
                 </a:solidFill>
                 <a:latin typeface="Calibri" panose="020F0502020204030204" pitchFamily="34" charset="0"/>
-                <a:ea typeface="宋体" panose="02010600030101010101" pitchFamily="2" charset="-122"/>
+                <a:ea typeface="宋体" pitchFamily="2" charset="-122"/>
               </a:defRPr>
             </a:lvl6pPr>
             <a:lvl7pPr marL="2971800" indent="-228600" eaLnBrk="0" fontAlgn="base" hangingPunct="0">
@@ -42294,7 +42209,7 @@
                   <a:schemeClr val="tx1"/>
                 </a:solidFill>
                 <a:latin typeface="Calibri" panose="020F0502020204030204" pitchFamily="34" charset="0"/>
-                <a:ea typeface="宋体" panose="02010600030101010101" pitchFamily="2" charset="-122"/>
+                <a:ea typeface="宋体" pitchFamily="2" charset="-122"/>
               </a:defRPr>
             </a:lvl7pPr>
             <a:lvl8pPr marL="3429000" indent="-228600" eaLnBrk="0" fontAlgn="base" hangingPunct="0">
@@ -42309,7 +42224,7 @@
                   <a:schemeClr val="tx1"/>
                 </a:solidFill>
                 <a:latin typeface="Calibri" panose="020F0502020204030204" pitchFamily="34" charset="0"/>
-                <a:ea typeface="宋体" panose="02010600030101010101" pitchFamily="2" charset="-122"/>
+                <a:ea typeface="宋体" pitchFamily="2" charset="-122"/>
               </a:defRPr>
             </a:lvl8pPr>
             <a:lvl9pPr marL="3886200" indent="-228600" eaLnBrk="0" fontAlgn="base" hangingPunct="0">
@@ -42324,7 +42239,7 @@
                   <a:schemeClr val="tx1"/>
                 </a:solidFill>
                 <a:latin typeface="Calibri" panose="020F0502020204030204" pitchFamily="34" charset="0"/>
-                <a:ea typeface="宋体" panose="02010600030101010101" pitchFamily="2" charset="-122"/>
+                <a:ea typeface="宋体" pitchFamily="2" charset="-122"/>
               </a:defRPr>
             </a:lvl9pPr>
           </a:lstStyle>
@@ -42565,7 +42480,7 @@
                 </a:solidFill>
                 <a:latin typeface="微软雅黑" panose="020B0503020204020204" pitchFamily="34" charset="-122"/>
                 <a:ea typeface="微软雅黑" panose="020B0503020204020204" pitchFamily="34" charset="-122"/>
-                <a:cs typeface="Courier New" panose="02070309020205020404" pitchFamily="49" charset="0"/>
+                <a:cs typeface="Courier New" panose="02070409020205090404" pitchFamily="49" charset="0"/>
               </a:rPr>
               <a:t>单表增删改查</a:t>
             </a:r>
@@ -42587,7 +42502,7 @@
                 </a:solidFill>
                 <a:latin typeface="微软雅黑" panose="020B0503020204020204" pitchFamily="34" charset="-122"/>
                 <a:ea typeface="微软雅黑" panose="020B0503020204020204" pitchFamily="34" charset="-122"/>
-                <a:cs typeface="Courier New" panose="02070309020205020404" pitchFamily="49" charset="0"/>
+                <a:cs typeface="Courier New" panose="02070409020205090404" pitchFamily="49" charset="0"/>
               </a:rPr>
               <a:t>常用注解</a:t>
             </a:r>
@@ -42609,7 +42524,7 @@
                 </a:solidFill>
                 <a:latin typeface="微软雅黑" panose="020B0503020204020204" pitchFamily="34" charset="-122"/>
                 <a:ea typeface="微软雅黑" panose="020B0503020204020204" pitchFamily="34" charset="-122"/>
-                <a:cs typeface="Courier New" panose="02070309020205020404" pitchFamily="49" charset="0"/>
+                <a:cs typeface="Courier New" panose="02070409020205090404" pitchFamily="49" charset="0"/>
               </a:rPr>
               <a:t>SQL语句映射注解</a:t>
             </a:r>
@@ -42642,7 +42557,7 @@
                 </a:solidFill>
                 <a:latin typeface="微软雅黑" panose="020B0503020204020204" pitchFamily="34" charset="-122"/>
                 <a:ea typeface="微软雅黑" panose="020B0503020204020204" pitchFamily="34" charset="-122"/>
-                <a:cs typeface="Courier New" panose="02070309020205020404" pitchFamily="49" charset="0"/>
+                <a:cs typeface="Courier New" panose="02070409020205090404" pitchFamily="49" charset="0"/>
               </a:rPr>
               <a:t>结果集映射注解</a:t>
             </a:r>
@@ -42664,7 +42579,7 @@
                 </a:solidFill>
                 <a:latin typeface="微软雅黑" panose="020B0503020204020204" pitchFamily="34" charset="-122"/>
                 <a:ea typeface="微软雅黑" panose="020B0503020204020204" pitchFamily="34" charset="-122"/>
-                <a:cs typeface="Courier New" panose="02070309020205020404" pitchFamily="49" charset="0"/>
+                <a:cs typeface="Courier New" panose="02070409020205090404" pitchFamily="49" charset="0"/>
               </a:rPr>
               <a:t>高级特性注解</a:t>
             </a:r>
@@ -42795,7 +42710,7 @@
                 </a:solidFill>
                 <a:latin typeface="微软雅黑" panose="020B0503020204020204" pitchFamily="34" charset="-122"/>
                 <a:ea typeface="微软雅黑" panose="020B0503020204020204" pitchFamily="34" charset="-122"/>
-                <a:cs typeface="Courier New" panose="02070309020205020404" pitchFamily="49" charset="0"/>
+                <a:cs typeface="Courier New" panose="02070409020205090404" pitchFamily="49" charset="0"/>
               </a:rPr>
               <a:t>SQL语句映射注解</a:t>
             </a:r>
@@ -42817,7 +42732,7 @@
                 </a:solidFill>
                 <a:latin typeface="微软雅黑" panose="020B0503020204020204" pitchFamily="34" charset="-122"/>
                 <a:ea typeface="微软雅黑" panose="020B0503020204020204" pitchFamily="34" charset="-122"/>
-                <a:cs typeface="Courier New" panose="02070309020205020404" pitchFamily="49" charset="0"/>
+                <a:cs typeface="Courier New" panose="02070409020205090404" pitchFamily="49" charset="0"/>
               </a:rPr>
               <a:t>SQL语句</a:t>
             </a:r>
@@ -42839,7 +42754,7 @@
                 </a:solidFill>
                 <a:latin typeface="微软雅黑" panose="020B0503020204020204" pitchFamily="34" charset="-122"/>
                 <a:ea typeface="微软雅黑" panose="020B0503020204020204" pitchFamily="34" charset="-122"/>
-                <a:cs typeface="Courier New" panose="02070309020205020404" pitchFamily="49" charset="0"/>
+                <a:cs typeface="Courier New" panose="02070409020205090404" pitchFamily="49" charset="0"/>
               </a:rPr>
               <a:t>ava方法</a:t>
             </a:r>
@@ -42861,7 +42776,7 @@
                 </a:solidFill>
                 <a:latin typeface="微软雅黑" panose="020B0503020204020204" pitchFamily="34" charset="-122"/>
                 <a:ea typeface="微软雅黑" panose="020B0503020204020204" pitchFamily="34" charset="-122"/>
-                <a:cs typeface="Courier New" panose="02070309020205020404" pitchFamily="49" charset="0"/>
+                <a:cs typeface="Courier New" panose="02070409020205090404" pitchFamily="49" charset="0"/>
               </a:rPr>
               <a:t>映射关系</a:t>
             </a:r>
@@ -42883,7 +42798,7 @@
                 </a:solidFill>
                 <a:latin typeface="微软雅黑" panose="020B0503020204020204" pitchFamily="34" charset="-122"/>
                 <a:ea typeface="微软雅黑" panose="020B0503020204020204" pitchFamily="34" charset="-122"/>
-                <a:cs typeface="Courier New" panose="02070309020205020404" pitchFamily="49" charset="0"/>
+                <a:cs typeface="Courier New" panose="02070409020205090404" pitchFamily="49" charset="0"/>
               </a:rPr>
               <a:t>标记在方法</a:t>
             </a:r>
@@ -42894,7 +42809,7 @@
                 </a:solidFill>
                 <a:latin typeface="微软雅黑" panose="020B0503020204020204" pitchFamily="34" charset="-122"/>
                 <a:ea typeface="微软雅黑" panose="020B0503020204020204" pitchFamily="34" charset="-122"/>
-                <a:cs typeface="Courier New" panose="02070309020205020404" pitchFamily="49" charset="0"/>
+                <a:cs typeface="Courier New" panose="02070409020205090404" pitchFamily="49" charset="0"/>
               </a:rPr>
               <a:t>和</a:t>
             </a:r>
@@ -42905,7 +42820,7 @@
                 </a:solidFill>
                 <a:latin typeface="微软雅黑" panose="020B0503020204020204" pitchFamily="34" charset="-122"/>
                 <a:ea typeface="微软雅黑" panose="020B0503020204020204" pitchFamily="34" charset="-122"/>
-                <a:cs typeface="Courier New" panose="02070309020205020404" pitchFamily="49" charset="0"/>
+                <a:cs typeface="Courier New" panose="02070409020205090404" pitchFamily="49" charset="0"/>
               </a:rPr>
               <a:t>参数</a:t>
             </a:r>
@@ -43096,7 +43011,7 @@
                 </a:solidFill>
                 <a:latin typeface="微软雅黑" panose="020B0503020204020204" pitchFamily="34" charset="-122"/>
                 <a:ea typeface="微软雅黑" panose="020B0503020204020204" pitchFamily="34" charset="-122"/>
-                <a:cs typeface="Courier New" panose="02070309020205020404" pitchFamily="49" charset="0"/>
+                <a:cs typeface="Courier New" panose="02070409020205090404" pitchFamily="49" charset="0"/>
               </a:rPr>
               <a:t>@Insert 注解</a:t>
             </a:r>
@@ -43118,7 +43033,7 @@
                 </a:solidFill>
                 <a:latin typeface="微软雅黑" panose="020B0503020204020204" pitchFamily="34" charset="-122"/>
                 <a:ea typeface="微软雅黑" panose="020B0503020204020204" pitchFamily="34" charset="-122"/>
-                <a:cs typeface="Courier New" panose="02070309020205020404" pitchFamily="49" charset="0"/>
+                <a:cs typeface="Courier New" panose="02070409020205090404" pitchFamily="49" charset="0"/>
               </a:rPr>
               <a:t>插入操作的方法</a:t>
             </a:r>
@@ -43140,7 +43055,7 @@
                 </a:solidFill>
                 <a:latin typeface="微软雅黑" panose="020B0503020204020204" pitchFamily="34" charset="-122"/>
                 <a:ea typeface="微软雅黑" panose="020B0503020204020204" pitchFamily="34" charset="-122"/>
-                <a:cs typeface="Courier New" panose="02070309020205020404" pitchFamily="49" charset="0"/>
+                <a:cs typeface="Courier New" panose="02070409020205090404" pitchFamily="49" charset="0"/>
               </a:rPr>
               <a:t> #{} 占位符引用方法参数</a:t>
             </a:r>
@@ -43239,9 +43154,9 @@
                 <a:solidFill>
                   <a:schemeClr val="lt1"/>
                 </a:solidFill>
-                <a:latin typeface="Arial" panose="020B0604020202020204" pitchFamily="34" charset="0"/>
+                <a:latin typeface="Arial" panose="020B0604020202090204" pitchFamily="34" charset="0"/>
                 <a:ea typeface="思源黑体 CN Normal" panose="020B0400000000000000" pitchFamily="34" charset="-122"/>
-                <a:sym typeface="Arial" panose="020B0604020202020204" pitchFamily="34" charset="0"/>
+                <a:sym typeface="Arial" panose="020B0604020202090204" pitchFamily="34" charset="0"/>
               </a:endParaRPr>
             </a:p>
           </p:txBody>
@@ -43296,16 +43211,16 @@
             <a:p>
               <a:r>
                 <a:rPr sz="1700" dirty="0">
-                  <a:latin typeface="Arial" panose="020B0604020202020204" pitchFamily="34" charset="0"/>
+                  <a:latin typeface="Arial" panose="020B0604020202090204" pitchFamily="34" charset="0"/>
                   <a:ea typeface="思源黑体 CN Normal" panose="020B0400000000000000" pitchFamily="34" charset="-122"/>
-                  <a:sym typeface="Arial" panose="020B0604020202020204" pitchFamily="34" charset="0"/>
+                  <a:sym typeface="Arial" panose="020B0604020202090204" pitchFamily="34" charset="0"/>
                 </a:rPr>
                 <a:t>（1）@Insert注解</a:t>
               </a:r>
               <a:endParaRPr sz="1700" dirty="0">
-                <a:latin typeface="Arial" panose="020B0604020202020204" pitchFamily="34" charset="0"/>
+                <a:latin typeface="Arial" panose="020B0604020202090204" pitchFamily="34" charset="0"/>
                 <a:ea typeface="思源黑体 CN Normal" panose="020B0400000000000000" pitchFamily="34" charset="-122"/>
-                <a:sym typeface="Arial" panose="020B0604020202020204" pitchFamily="34" charset="0"/>
+                <a:sym typeface="Arial" panose="020B0604020202090204" pitchFamily="34" charset="0"/>
               </a:endParaRPr>
             </a:p>
           </p:txBody>
@@ -43366,7 +43281,7 @@
               </a:solidFill>
               <a:latin typeface="微软雅黑" panose="020B0503020204020204" pitchFamily="34" charset="-122"/>
               <a:ea typeface="微软雅黑" panose="020B0503020204020204" pitchFamily="34" charset="-122"/>
-              <a:cs typeface="Courier New" panose="02070309020205020404" pitchFamily="49" charset="0"/>
+              <a:cs typeface="Courier New" panose="02070409020205090404" pitchFamily="49" charset="0"/>
               <a:sym typeface="+mn-ea"/>
             </a:endParaRPr>
           </a:p>
@@ -43404,13 +43319,13 @@
             </a:pPr>
             <a:r>
               <a:rPr sz="1800">
-                <a:latin typeface="Courier New" panose="02070309020205020404" pitchFamily="49" charset="0"/>
+                <a:latin typeface="Courier New" panose="02070409020205090404" pitchFamily="49" charset="0"/>
                 <a:sym typeface="+mn-ea"/>
               </a:rPr>
               <a:t>@Insert("INSERT INTO users(username, password) </a:t>
             </a:r>
             <a:endParaRPr sz="1800">
-              <a:latin typeface="Courier New" panose="02070309020205020404" pitchFamily="49" charset="0"/>
+              <a:latin typeface="Courier New" panose="02070409020205090404" pitchFamily="49" charset="0"/>
               <a:sym typeface="+mn-ea"/>
             </a:endParaRPr>
           </a:p>
@@ -43423,13 +43338,13 @@
             </a:pPr>
             <a:r>
               <a:rPr sz="1800">
-                <a:latin typeface="Courier New" panose="02070309020205020404" pitchFamily="49" charset="0"/>
+                <a:latin typeface="Courier New" panose="02070409020205090404" pitchFamily="49" charset="0"/>
                 <a:sym typeface="+mn-ea"/>
               </a:rPr>
               <a:t>  VALUES(#{username}, #{password})")</a:t>
             </a:r>
             <a:endParaRPr sz="1800">
-              <a:latin typeface="Courier New" panose="02070309020205020404" pitchFamily="49" charset="0"/>
+              <a:latin typeface="Courier New" panose="02070409020205090404" pitchFamily="49" charset="0"/>
               <a:sym typeface="+mn-ea"/>
             </a:endParaRPr>
           </a:p>
@@ -43442,13 +43357,13 @@
             </a:pPr>
             <a:r>
               <a:rPr sz="1800">
-                <a:latin typeface="Courier New" panose="02070309020205020404" pitchFamily="49" charset="0"/>
+                <a:latin typeface="Courier New" panose="02070409020205090404" pitchFamily="49" charset="0"/>
                 <a:sym typeface="+mn-ea"/>
               </a:rPr>
               <a:t>void insertUser(User user);</a:t>
             </a:r>
             <a:endParaRPr sz="1800">
-              <a:latin typeface="Courier New" panose="02070309020205020404" pitchFamily="49" charset="0"/>
+              <a:latin typeface="Courier New" panose="02070409020205090404" pitchFamily="49" charset="0"/>
               <a:sym typeface="+mn-ea"/>
             </a:endParaRPr>
           </a:p>
